--- a/plugins/aqmen/shared/company-analysis-deck-template.pptx
+++ b/plugins/aqmen/shared/company-analysis-deck-template.pptx
@@ -17,6 +17,7 @@
     <p:sldId id="265" r:id="rId16"/>
     <p:sldId id="266" r:id="rId17"/>
     <p:sldId id="267" r:id="rId18"/>
+    <p:sldId id="268" r:id="rId19"/>
   </p:sldIdLst>
   <p:sldSz cx="12191695" cy="6858000" type="screen4x3"/>
   <p:notesSz cx="6858000" cy="9144000"/>
@@ -683,285 +684,6 @@
         <c:crosses val="autoZero"/>
       </c:valAx>
     </c:plotArea>
-    <c:dispBlanksAs val="gap"/>
-  </c:chart>
-  <c:txPr>
-    <a:bodyPr/>
-    <a:lstStyle/>
-    <a:p>
-      <a:pPr>
-        <a:defRPr sz="1800"/>
-      </a:pPr>
-      <a:endParaRPr lang="en-US"/>
-    </a:p>
-  </c:txPr>
-  <c:externalData r:id="rId1">
-    <c:autoUpdate val="0"/>
-  </c:externalData>
-</c:chartSpace>
-</file>
-
-<file path=ppt/charts/chart4.xml><?xml version="1.0" encoding="utf-8"?>
-<c:chartSpace xmlns:c="http://schemas.openxmlformats.org/drawingml/2006/chart" xmlns:a="http://schemas.openxmlformats.org/drawingml/2006/main" xmlns:r="http://schemas.openxmlformats.org/officeDocument/2006/relationships">
-  <c:date1904 val="0"/>
-  <c:chart>
-    <c:autoTitleDeleted val="1"/>
-    <c:plotArea>
-      <c:barChart>
-        <c:barDir val="bar"/>
-        <c:grouping val="clustered"/>
-        <c:ser>
-          <c:idx val="0"/>
-          <c:order val="0"/>
-          <c:tx>
-            <c:strRef>
-              <c:f>Sheet1!$B$1</c:f>
-              <c:strCache>
-                <c:ptCount val="1"/>
-                <c:pt idx="0">
-                  <c:v>Low</c:v>
-                </c:pt>
-              </c:strCache>
-            </c:strRef>
-          </c:tx>
-          <c:spPr>
-            <a:solidFill>
-              <a:srgbClr val="03045E"/>
-            </a:solidFill>
-            <a:ln>
-              <a:noFill/>
-            </a:ln>
-          </c:spPr>
-          <c:dLbls>
-            <c:numFmt formatCode="#,##0" sourceLinked="0"/>
-            <c:txPr>
-              <a:bodyPr/>
-              <a:lstStyle/>
-              <a:p>
-                <a:pPr>
-                  <a:defRPr sz="900">
-                    <a:latin typeface="Montserrat Medium"/>
-                  </a:defRPr>
-                </a:pPr>
-              </a:p>
-            </c:txPr>
-            <c:dLblPos val="outEnd"/>
-            <c:showLegendKey val="0"/>
-            <c:showVal val="0"/>
-            <c:showCatName val="0"/>
-            <c:showSerName val="0"/>
-            <c:showPercent val="0"/>
-            <c:showBubbleSize val="0"/>
-            <c:showLeaderLines val="1"/>
-          </c:dLbls>
-          <c:cat>
-            <c:strRef>
-              <c:f>Sheet1!$A$2:$A$4</c:f>
-              <c:strCache>
-                <c:ptCount val="3"/>
-                <c:pt idx="0">
-                  <c:v>Margin ±100bps</c:v>
-                </c:pt>
-                <c:pt idx="1">
-                  <c:v>Growth ±50bps</c:v>
-                </c:pt>
-                <c:pt idx="2">
-                  <c:v>WACC ±50bps</c:v>
-                </c:pt>
-              </c:strCache>
-            </c:strRef>
-          </c:cat>
-          <c:val>
-            <c:numRef>
-              <c:f>Sheet1!$B$2:$B$4</c:f>
-              <c:numCache>
-                <c:formatCode>#,##0</c:formatCode>
-                <c:ptCount val="3"/>
-                <c:pt idx="0">
-                  <c:v>188</c:v>
-                </c:pt>
-                <c:pt idx="1">
-                  <c:v>182</c:v>
-                </c:pt>
-                <c:pt idx="2">
-                  <c:v>176</c:v>
-                </c:pt>
-              </c:numCache>
-            </c:numRef>
-          </c:val>
-        </c:ser>
-        <c:ser>
-          <c:idx val="1"/>
-          <c:order val="1"/>
-          <c:tx>
-            <c:strRef>
-              <c:f>Sheet1!$C$1</c:f>
-              <c:strCache>
-                <c:ptCount val="1"/>
-                <c:pt idx="0">
-                  <c:v>High</c:v>
-                </c:pt>
-              </c:strCache>
-            </c:strRef>
-          </c:tx>
-          <c:spPr>
-            <a:solidFill>
-              <a:srgbClr val="0728A3"/>
-            </a:solidFill>
-            <a:ln>
-              <a:noFill/>
-            </a:ln>
-          </c:spPr>
-          <c:dLbls>
-            <c:numFmt formatCode="#,##0" sourceLinked="0"/>
-            <c:txPr>
-              <a:bodyPr/>
-              <a:lstStyle/>
-              <a:p>
-                <a:pPr>
-                  <a:defRPr sz="900">
-                    <a:latin typeface="Montserrat Medium"/>
-                  </a:defRPr>
-                </a:pPr>
-              </a:p>
-            </c:txPr>
-            <c:dLblPos val="outEnd"/>
-            <c:showLegendKey val="0"/>
-            <c:showVal val="0"/>
-            <c:showCatName val="0"/>
-            <c:showSerName val="0"/>
-            <c:showPercent val="0"/>
-            <c:showBubbleSize val="0"/>
-            <c:showLeaderLines val="1"/>
-          </c:dLbls>
-          <c:cat>
-            <c:strRef>
-              <c:f>Sheet1!$A$2:$A$4</c:f>
-              <c:strCache>
-                <c:ptCount val="3"/>
-                <c:pt idx="0">
-                  <c:v>Margin ±100bps</c:v>
-                </c:pt>
-                <c:pt idx="1">
-                  <c:v>Growth ±50bps</c:v>
-                </c:pt>
-                <c:pt idx="2">
-                  <c:v>WACC ±50bps</c:v>
-                </c:pt>
-              </c:strCache>
-            </c:strRef>
-          </c:cat>
-          <c:val>
-            <c:numRef>
-              <c:f>Sheet1!$C$2:$C$4</c:f>
-              <c:numCache>
-                <c:formatCode>#,##0</c:formatCode>
-                <c:ptCount val="3"/>
-                <c:pt idx="0">
-                  <c:v>232</c:v>
-                </c:pt>
-                <c:pt idx="1">
-                  <c:v>238</c:v>
-                </c:pt>
-                <c:pt idx="2">
-                  <c:v>246</c:v>
-                </c:pt>
-              </c:numCache>
-            </c:numRef>
-          </c:val>
-        </c:ser>
-        <c:axId val="-2068027336"/>
-        <c:axId val="-2113994440"/>
-      </c:barChart>
-      <c:catAx>
-        <c:axId val="-2068027336"/>
-        <c:scaling>
-          <c:orientation val="minMax"/>
-        </c:scaling>
-        <c:delete val="0"/>
-        <c:axPos val="l"/>
-        <c:majorTickMark val="out"/>
-        <c:minorTickMark val="none"/>
-        <c:tickLblPos val="nextTo"/>
-        <c:spPr>
-          <a:ln>
-            <a:solidFill>
-              <a:srgbClr val="C9CBD6"/>
-            </a:solidFill>
-          </a:ln>
-        </c:spPr>
-        <c:txPr>
-          <a:bodyPr/>
-          <a:lstStyle/>
-          <a:p>
-            <a:pPr>
-              <a:defRPr sz="900">
-                <a:latin typeface="Montserrat Medium"/>
-              </a:defRPr>
-            </a:pPr>
-          </a:p>
-        </c:txPr>
-        <c:crossAx val="-2113994440"/>
-        <c:crosses val="autoZero"/>
-        <c:auto val="1"/>
-        <c:lblAlgn val="ctr"/>
-        <c:lblOffset val="100"/>
-        <c:noMultiLvlLbl val="0"/>
-      </c:catAx>
-      <c:valAx>
-        <c:axId val="-2113994440"/>
-        <c:scaling/>
-        <c:delete val="0"/>
-        <c:axPos val="b"/>
-        <c:majorGridlines>
-          <c:spPr>
-            <a:ln>
-              <a:solidFill>
-                <a:srgbClr val="F2F3F7"/>
-              </a:solidFill>
-            </a:ln>
-          </c:spPr>
-        </c:majorGridlines>
-        <c:majorTickMark val="out"/>
-        <c:minorTickMark val="none"/>
-        <c:tickLblPos val="nextTo"/>
-        <c:spPr>
-          <a:ln>
-            <a:solidFill>
-              <a:srgbClr val="C9CBD6"/>
-            </a:solidFill>
-          </a:ln>
-        </c:spPr>
-        <c:txPr>
-          <a:bodyPr/>
-          <a:lstStyle/>
-          <a:p>
-            <a:pPr>
-              <a:defRPr sz="900">
-                <a:latin typeface="Montserrat Medium"/>
-              </a:defRPr>
-            </a:pPr>
-          </a:p>
-        </c:txPr>
-        <c:crossAx val="-2068027336"/>
-        <c:crosses val="autoZero"/>
-      </c:valAx>
-    </c:plotArea>
-    <c:legend>
-      <c:legendPos val="b"/>
-      <c:overlay val="0"/>
-      <c:txPr>
-        <a:bodyPr/>
-        <a:lstStyle/>
-        <a:p>
-          <a:pPr>
-            <a:defRPr sz="900">
-              <a:latin typeface="Montserrat Medium"/>
-            </a:defRPr>
-          </a:pPr>
-        </a:p>
-      </c:txPr>
-    </c:legend>
     <c:dispBlanksAs val="gap"/>
   </c:chart>
   <c:txPr>
@@ -4376,7 +4098,7 @@
                 </a:solidFill>
                 <a:latin typeface="Montserrat"/>
               </a:rPr>
-              <a:t>Sensitivity</a:t>
+              <a:t>DCF valuation</a:t>
             </a:r>
           </a:p>
         </p:txBody>
@@ -4511,7 +4233,7 @@
                 </a:solidFill>
                 <a:latin typeface="Montserrat"/>
               </a:rPr>
-              <a:t>Value is most sensitive to [WACC / terminal growth / margin]</a:t>
+              <a:t>Enterprise value of ~$[XX]–[XX]m on the base case</a:t>
             </a:r>
           </a:p>
         </p:txBody>
@@ -4519,56 +4241,6 @@
       <p:sp>
         <p:nvSpPr>
           <p:cNvPr id="7" name="TextBox 6"/>
-          <p:cNvSpPr txBox="1"/>
-          <p:nvPr/>
-        </p:nvSpPr>
-        <p:spPr>
-          <a:xfrm>
-            <a:off x="10362895" y="1536192"/>
-            <a:ext cx="1554480" cy="219456"/>
-          </a:xfrm>
-          <a:prstGeom prst="rect">
-            <a:avLst/>
-          </a:prstGeom>
-          <a:noFill/>
-          <a:ln w="6350">
-            <a:solidFill>
-              <a:srgbClr val="8A8A8A"/>
-            </a:solidFill>
-          </a:ln>
-        </p:spPr>
-        <p:txBody>
-          <a:bodyPr wrap="square" anchor="ctr" lIns="0" rIns="0" tIns="0" bIns="0">
-            <a:spAutoFit/>
-          </a:bodyPr>
-          <a:lstStyle/>
-          <a:p>
-            <a:pPr algn="ctr">
-              <a:lnSpc>
-                <a:spcPct val="105000"/>
-              </a:lnSpc>
-              <a:spcBef>
-                <a:spcPts val="0"/>
-              </a:spcBef>
-              <a:spcAft>
-                <a:spcPts val="200"/>
-              </a:spcAft>
-            </a:pPr>
-            <a:r>
-              <a:rPr sz="850" b="0" i="0">
-                <a:solidFill>
-                  <a:srgbClr val="302E2E"/>
-                </a:solidFill>
-                <a:latin typeface="Montserrat Medium"/>
-              </a:rPr>
-              <a:t>ILLUSTRATIVE</a:t>
-            </a:r>
-          </a:p>
-        </p:txBody>
-      </p:sp>
-      <p:sp>
-        <p:nvSpPr>
-          <p:cNvPr id="8" name="TextBox 7"/>
           <p:cNvSpPr txBox="1"/>
           <p:nvPr/>
         </p:nvSpPr>
@@ -4606,14 +4278,14 @@
                 </a:solidFill>
                 <a:latin typeface="Montserrat"/>
               </a:rPr>
-              <a:t>EV sensitivity, $m</a:t>
+              <a:t>DCF enterprise value, $m</a:t>
             </a:r>
           </a:p>
         </p:txBody>
       </p:sp>
       <p:graphicFrame>
         <p:nvGraphicFramePr>
-          <p:cNvPr id="9" name="Chart 8"/>
+          <p:cNvPr id="8" name="Chart 7"/>
           <p:cNvGraphicFramePr>
             <a:graphicFrameLocks noGrp="1"/>
           </p:cNvGraphicFramePr>
@@ -4631,7 +4303,7 @@
       </p:graphicFrame>
       <p:cxnSp>
         <p:nvCxnSpPr>
-          <p:cNvPr id="10" name="Connector 9"/>
+          <p:cNvPr id="9" name="Connector 8"/>
           <p:cNvCxnSpPr/>
           <p:nvPr/>
         </p:nvCxnSpPr>
@@ -4666,7 +4338,7 @@
       </p:cxnSp>
       <p:sp>
         <p:nvSpPr>
-          <p:cNvPr id="11" name="Isosceles Triangle 10"/>
+          <p:cNvPr id="10" name="Isosceles Triangle 9"/>
           <p:cNvSpPr/>
           <p:nvPr/>
         </p:nvSpPr>
@@ -4710,7 +4382,7 @@
       </p:sp>
       <p:sp>
         <p:nvSpPr>
-          <p:cNvPr id="12" name="TextBox 11"/>
+          <p:cNvPr id="11" name="TextBox 10"/>
           <p:cNvSpPr txBox="1"/>
           <p:nvPr/>
         </p:nvSpPr>
@@ -4755,7 +4427,7 @@
       </p:sp>
       <p:sp>
         <p:nvSpPr>
-          <p:cNvPr id="13" name="TextBox 12"/>
+          <p:cNvPr id="12" name="TextBox 11"/>
           <p:cNvSpPr txBox="1"/>
           <p:nvPr/>
         </p:nvSpPr>
@@ -4802,7 +4474,7 @@
                 </a:solidFill>
                 <a:latin typeface="Montserrat Medium"/>
               </a:rPr>
-              <a:t>WACC dominates the range</a:t>
+              <a:t>Range reflects WACC and terminal-growth spread</a:t>
             </a:r>
           </a:p>
           <a:p>
@@ -4833,7 +4505,7 @@
                 </a:solidFill>
                 <a:latin typeface="Montserrat Medium"/>
               </a:rPr>
-              <a:t>Terminal assumptions warrant the most diligence</a:t>
+              <a:t>Terminal value ~[XX]% of EV (sanity check)</a:t>
             </a:r>
           </a:p>
         </p:txBody>
@@ -4950,7 +4622,7 @@
                 </a:solidFill>
                 <a:latin typeface="Montserrat"/>
               </a:rPr>
-              <a:t>Scenario</a:t>
+              <a:t>Valuation sensitivity</a:t>
             </a:r>
           </a:p>
         </p:txBody>
@@ -4995,7 +4667,7 @@
                 </a:solidFill>
                 <a:latin typeface="Montserrat Medium"/>
               </a:rPr>
-              <a:t>Source: aqmen analysis</a:t>
+              <a:t>Source: aqmen DCF</a:t>
             </a:r>
           </a:p>
         </p:txBody>
@@ -5085,7 +4757,7 @@
                 </a:solidFill>
                 <a:latin typeface="Montserrat"/>
               </a:rPr>
-              <a:t>[Initiative]: [one-line thesis] adds ~$[X]m of EV</a:t>
+              <a:t>Equity value across WACC × terminal growth; base case highlighted</a:t>
             </a:r>
           </a:p>
         </p:txBody>
@@ -5098,8 +4770,58 @@
         </p:nvSpPr>
         <p:spPr>
           <a:xfrm>
-            <a:off x="502920" y="1783080"/>
-            <a:ext cx="7269480" cy="320040"/>
+            <a:off x="10362895" y="1536192"/>
+            <a:ext cx="1554480" cy="219456"/>
+          </a:xfrm>
+          <a:prstGeom prst="rect">
+            <a:avLst/>
+          </a:prstGeom>
+          <a:noFill/>
+          <a:ln w="6350">
+            <a:solidFill>
+              <a:srgbClr val="8A8A8A"/>
+            </a:solidFill>
+          </a:ln>
+        </p:spPr>
+        <p:txBody>
+          <a:bodyPr wrap="square" anchor="ctr" lIns="0" rIns="0" tIns="0" bIns="0">
+            <a:spAutoFit/>
+          </a:bodyPr>
+          <a:lstStyle/>
+          <a:p>
+            <a:pPr algn="ctr">
+              <a:lnSpc>
+                <a:spcPct val="105000"/>
+              </a:lnSpc>
+              <a:spcBef>
+                <a:spcPts val="0"/>
+              </a:spcBef>
+              <a:spcAft>
+                <a:spcPts val="200"/>
+              </a:spcAft>
+            </a:pPr>
+            <a:r>
+              <a:rPr sz="850" b="0" i="0">
+                <a:solidFill>
+                  <a:srgbClr val="302E2E"/>
+                </a:solidFill>
+                <a:latin typeface="Montserrat Medium"/>
+              </a:rPr>
+              <a:t>ILLUSTRATIVE</a:t>
+            </a:r>
+          </a:p>
+        </p:txBody>
+      </p:sp>
+      <p:sp>
+        <p:nvSpPr>
+          <p:cNvPr id="8" name="TextBox 7"/>
+          <p:cNvSpPr txBox="1"/>
+          <p:nvPr/>
+        </p:nvSpPr>
+        <p:spPr>
+          <a:xfrm>
+            <a:off x="502920" y="1645920"/>
+            <a:ext cx="11185855" cy="320040"/>
           </a:xfrm>
           <a:prstGeom prst="rect">
             <a:avLst/>
@@ -5130,21 +4852,21 @@
                 </a:solidFill>
                 <a:latin typeface="Montserrat"/>
               </a:rPr>
-              <a:t>Initiative (qualitative thesis)</a:t>
-            </a:r>
-          </a:p>
-        </p:txBody>
-      </p:sp>
-      <p:sp>
-        <p:nvSpPr>
-          <p:cNvPr id="8" name="TextBox 7"/>
-          <p:cNvSpPr txBox="1"/>
-          <p:nvPr/>
-        </p:nvSpPr>
-        <p:spPr>
-          <a:xfrm>
-            <a:off x="502920" y="2194560"/>
-            <a:ext cx="7269480" cy="4160520"/>
+              <a:t>Equity value ($m) — WACC × terminal growth</a:t>
+            </a:r>
+          </a:p>
+        </p:txBody>
+      </p:sp>
+      <p:sp>
+        <p:nvSpPr>
+          <p:cNvPr id="9" name="TextBox 8"/>
+          <p:cNvSpPr txBox="1"/>
+          <p:nvPr/>
+        </p:nvSpPr>
+        <p:spPr>
+          <a:xfrm>
+            <a:off x="1737360" y="1901952"/>
+            <a:ext cx="6035040" cy="237744"/>
           </a:xfrm>
           <a:prstGeom prst="rect">
             <a:avLst/>
@@ -5157,134 +4879,2802 @@
           </a:bodyPr>
           <a:lstStyle/>
           <a:p>
+            <a:pPr algn="ctr">
+              <a:lnSpc>
+                <a:spcPct val="105000"/>
+              </a:lnSpc>
+              <a:spcBef>
+                <a:spcPts val="0"/>
+              </a:spcBef>
+              <a:spcAft>
+                <a:spcPts val="200"/>
+              </a:spcAft>
+            </a:pPr>
+            <a:r>
+              <a:rPr sz="1050" b="1" i="0">
+                <a:solidFill>
+                  <a:srgbClr val="03045E"/>
+                </a:solidFill>
+                <a:latin typeface="Montserrat"/>
+              </a:rPr>
+              <a:t>Terminal growth →</a:t>
+            </a:r>
+          </a:p>
+        </p:txBody>
+      </p:sp>
+      <p:sp>
+        <p:nvSpPr>
+          <p:cNvPr id="10" name="TextBox 9"/>
+          <p:cNvSpPr txBox="1"/>
+          <p:nvPr/>
+        </p:nvSpPr>
+        <p:spPr>
+          <a:xfrm>
+            <a:off x="502920" y="1901952"/>
+            <a:ext cx="1234440" cy="237744"/>
+          </a:xfrm>
+          <a:prstGeom prst="rect">
+            <a:avLst/>
+          </a:prstGeom>
+          <a:noFill/>
+        </p:spPr>
+        <p:txBody>
+          <a:bodyPr wrap="square" anchor="ctr" lIns="0" rIns="0" tIns="0" bIns="0">
+            <a:spAutoFit/>
+          </a:bodyPr>
+          <a:lstStyle/>
+          <a:p>
             <a:pPr algn="l">
               <a:lnSpc>
-                <a:spcPct val="110000"/>
-              </a:lnSpc>
-              <a:spcBef>
-                <a:spcPts val="0"/>
-              </a:spcBef>
-              <a:spcAft>
-                <a:spcPts val="600"/>
-              </a:spcAft>
-            </a:pPr>
-            <a:r>
-              <a:rPr sz="1200" b="1" i="0">
+                <a:spcPct val="105000"/>
+              </a:lnSpc>
+              <a:spcBef>
+                <a:spcPts val="0"/>
+              </a:spcBef>
+              <a:spcAft>
+                <a:spcPts val="200"/>
+              </a:spcAft>
+            </a:pPr>
+            <a:r>
+              <a:rPr sz="1050" b="1" i="0">
                 <a:solidFill>
                   <a:srgbClr val="03045E"/>
                 </a:solidFill>
+                <a:latin typeface="Montserrat"/>
+              </a:rPr>
+              <a:t>WACC ↓</a:t>
+            </a:r>
+          </a:p>
+        </p:txBody>
+      </p:sp>
+      <p:sp>
+        <p:nvSpPr>
+          <p:cNvPr id="11" name="TextBox 10"/>
+          <p:cNvSpPr txBox="1"/>
+          <p:nvPr/>
+        </p:nvSpPr>
+        <p:spPr>
+          <a:xfrm>
+            <a:off x="1737360" y="2194560"/>
+            <a:ext cx="1207008" cy="256032"/>
+          </a:xfrm>
+          <a:prstGeom prst="rect">
+            <a:avLst/>
+          </a:prstGeom>
+          <a:noFill/>
+        </p:spPr>
+        <p:txBody>
+          <a:bodyPr wrap="square" anchor="ctr" lIns="0" rIns="0" tIns="0" bIns="0">
+            <a:spAutoFit/>
+          </a:bodyPr>
+          <a:lstStyle/>
+          <a:p>
+            <a:pPr algn="ctr">
+              <a:lnSpc>
+                <a:spcPct val="105000"/>
+              </a:lnSpc>
+              <a:spcBef>
+                <a:spcPts val="0"/>
+              </a:spcBef>
+              <a:spcAft>
+                <a:spcPts val="200"/>
+              </a:spcAft>
+            </a:pPr>
+            <a:r>
+              <a:rPr sz="1000" b="1" i="0">
+                <a:solidFill>
+                  <a:srgbClr val="302E2E"/>
+                </a:solidFill>
                 <a:latin typeface="Montserrat Medium"/>
               </a:rPr>
-              <a:t>•  </a:t>
-            </a:r>
-            <a:r>
-              <a:rPr sz="1200" b="1" i="0">
+              <a:t>1.5%</a:t>
+            </a:r>
+          </a:p>
+        </p:txBody>
+      </p:sp>
+      <p:sp>
+        <p:nvSpPr>
+          <p:cNvPr id="12" name="TextBox 11"/>
+          <p:cNvSpPr txBox="1"/>
+          <p:nvPr/>
+        </p:nvSpPr>
+        <p:spPr>
+          <a:xfrm>
+            <a:off x="2944368" y="2194560"/>
+            <a:ext cx="1207008" cy="256032"/>
+          </a:xfrm>
+          <a:prstGeom prst="rect">
+            <a:avLst/>
+          </a:prstGeom>
+          <a:noFill/>
+        </p:spPr>
+        <p:txBody>
+          <a:bodyPr wrap="square" anchor="ctr" lIns="0" rIns="0" tIns="0" bIns="0">
+            <a:spAutoFit/>
+          </a:bodyPr>
+          <a:lstStyle/>
+          <a:p>
+            <a:pPr algn="ctr">
+              <a:lnSpc>
+                <a:spcPct val="105000"/>
+              </a:lnSpc>
+              <a:spcBef>
+                <a:spcPts val="0"/>
+              </a:spcBef>
+              <a:spcAft>
+                <a:spcPts val="200"/>
+              </a:spcAft>
+            </a:pPr>
+            <a:r>
+              <a:rPr sz="1000" b="1" i="0">
                 <a:solidFill>
                   <a:srgbClr val="302E2E"/>
                 </a:solidFill>
                 <a:latin typeface="Montserrat Medium"/>
               </a:rPr>
-              <a:t>[Directional thesis in plain words — the value-creation lever]</a:t>
-            </a:r>
-          </a:p>
-          <a:p>
-            <a:pPr algn="l">
-              <a:lnSpc>
-                <a:spcPct val="110000"/>
-              </a:lnSpc>
-              <a:spcBef>
-                <a:spcPts val="0"/>
-              </a:spcBef>
-              <a:spcAft>
-                <a:spcPts val="600"/>
-              </a:spcAft>
-            </a:pPr>
-            <a:r>
-              <a:rPr sz="1200" b="1" i="0">
-                <a:solidFill>
-                  <a:srgbClr val="03045E"/>
+              <a:t>2.0%</a:t>
+            </a:r>
+          </a:p>
+        </p:txBody>
+      </p:sp>
+      <p:sp>
+        <p:nvSpPr>
+          <p:cNvPr id="13" name="TextBox 12"/>
+          <p:cNvSpPr txBox="1"/>
+          <p:nvPr/>
+        </p:nvSpPr>
+        <p:spPr>
+          <a:xfrm>
+            <a:off x="4151376" y="2194560"/>
+            <a:ext cx="1207008" cy="256032"/>
+          </a:xfrm>
+          <a:prstGeom prst="rect">
+            <a:avLst/>
+          </a:prstGeom>
+          <a:noFill/>
+        </p:spPr>
+        <p:txBody>
+          <a:bodyPr wrap="square" anchor="ctr" lIns="0" rIns="0" tIns="0" bIns="0">
+            <a:spAutoFit/>
+          </a:bodyPr>
+          <a:lstStyle/>
+          <a:p>
+            <a:pPr algn="ctr">
+              <a:lnSpc>
+                <a:spcPct val="105000"/>
+              </a:lnSpc>
+              <a:spcBef>
+                <a:spcPts val="0"/>
+              </a:spcBef>
+              <a:spcAft>
+                <a:spcPts val="200"/>
+              </a:spcAft>
+            </a:pPr>
+            <a:r>
+              <a:rPr sz="1000" b="1" i="0">
+                <a:solidFill>
+                  <a:srgbClr val="302E2E"/>
                 </a:solidFill>
                 <a:latin typeface="Montserrat Medium"/>
               </a:rPr>
-              <a:t>•  </a:t>
-            </a:r>
-            <a:r>
-              <a:rPr sz="1200" b="0" i="0">
+              <a:t>2.5%</a:t>
+            </a:r>
+          </a:p>
+        </p:txBody>
+      </p:sp>
+      <p:sp>
+        <p:nvSpPr>
+          <p:cNvPr id="14" name="TextBox 13"/>
+          <p:cNvSpPr txBox="1"/>
+          <p:nvPr/>
+        </p:nvSpPr>
+        <p:spPr>
+          <a:xfrm>
+            <a:off x="5358384" y="2194560"/>
+            <a:ext cx="1207008" cy="256032"/>
+          </a:xfrm>
+          <a:prstGeom prst="rect">
+            <a:avLst/>
+          </a:prstGeom>
+          <a:noFill/>
+        </p:spPr>
+        <p:txBody>
+          <a:bodyPr wrap="square" anchor="ctr" lIns="0" rIns="0" tIns="0" bIns="0">
+            <a:spAutoFit/>
+          </a:bodyPr>
+          <a:lstStyle/>
+          <a:p>
+            <a:pPr algn="ctr">
+              <a:lnSpc>
+                <a:spcPct val="105000"/>
+              </a:lnSpc>
+              <a:spcBef>
+                <a:spcPts val="0"/>
+              </a:spcBef>
+              <a:spcAft>
+                <a:spcPts val="200"/>
+              </a:spcAft>
+            </a:pPr>
+            <a:r>
+              <a:rPr sz="1000" b="1" i="0">
                 <a:solidFill>
                   <a:srgbClr val="302E2E"/>
                 </a:solidFill>
                 <a:latin typeface="Montserrat Medium"/>
               </a:rPr>
-              <a:t>Overrides vs Base (quantitative):</a:t>
-            </a:r>
-          </a:p>
-          <a:p>
-            <a:pPr algn="l">
-              <a:lnSpc>
-                <a:spcPct val="110000"/>
-              </a:lnSpc>
-              <a:spcBef>
-                <a:spcPts val="0"/>
-              </a:spcBef>
-              <a:spcAft>
-                <a:spcPts val="600"/>
-              </a:spcAft>
-            </a:pPr>
-            <a:r>
-              <a:rPr sz="1200" b="1" i="0">
-                <a:solidFill>
-                  <a:srgbClr val="03045E"/>
+              <a:t>3.0%</a:t>
+            </a:r>
+          </a:p>
+        </p:txBody>
+      </p:sp>
+      <p:sp>
+        <p:nvSpPr>
+          <p:cNvPr id="15" name="TextBox 14"/>
+          <p:cNvSpPr txBox="1"/>
+          <p:nvPr/>
+        </p:nvSpPr>
+        <p:spPr>
+          <a:xfrm>
+            <a:off x="6565392" y="2194560"/>
+            <a:ext cx="1207008" cy="256032"/>
+          </a:xfrm>
+          <a:prstGeom prst="rect">
+            <a:avLst/>
+          </a:prstGeom>
+          <a:noFill/>
+        </p:spPr>
+        <p:txBody>
+          <a:bodyPr wrap="square" anchor="ctr" lIns="0" rIns="0" tIns="0" bIns="0">
+            <a:spAutoFit/>
+          </a:bodyPr>
+          <a:lstStyle/>
+          <a:p>
+            <a:pPr algn="ctr">
+              <a:lnSpc>
+                <a:spcPct val="105000"/>
+              </a:lnSpc>
+              <a:spcBef>
+                <a:spcPts val="0"/>
+              </a:spcBef>
+              <a:spcAft>
+                <a:spcPts val="200"/>
+              </a:spcAft>
+            </a:pPr>
+            <a:r>
+              <a:rPr sz="1000" b="1" i="0">
+                <a:solidFill>
+                  <a:srgbClr val="302E2E"/>
                 </a:solidFill>
                 <a:latin typeface="Montserrat Medium"/>
               </a:rPr>
-              <a:t>    –  </a:t>
-            </a:r>
-            <a:r>
-              <a:rPr sz="1200" b="0" i="0">
+              <a:t>3.5%</a:t>
+            </a:r>
+          </a:p>
+        </p:txBody>
+      </p:sp>
+      <p:sp>
+        <p:nvSpPr>
+          <p:cNvPr id="16" name="TextBox 15"/>
+          <p:cNvSpPr txBox="1"/>
+          <p:nvPr/>
+        </p:nvSpPr>
+        <p:spPr>
+          <a:xfrm>
+            <a:off x="502920" y="2468880"/>
+            <a:ext cx="1234440" cy="740664"/>
+          </a:xfrm>
+          <a:prstGeom prst="rect">
+            <a:avLst/>
+          </a:prstGeom>
+          <a:noFill/>
+        </p:spPr>
+        <p:txBody>
+          <a:bodyPr wrap="square" anchor="ctr" lIns="0" rIns="0" tIns="0" bIns="0">
+            <a:spAutoFit/>
+          </a:bodyPr>
+          <a:lstStyle/>
+          <a:p>
+            <a:pPr algn="r">
+              <a:lnSpc>
+                <a:spcPct val="105000"/>
+              </a:lnSpc>
+              <a:spcBef>
+                <a:spcPts val="0"/>
+              </a:spcBef>
+              <a:spcAft>
+                <a:spcPts val="200"/>
+              </a:spcAft>
+            </a:pPr>
+            <a:r>
+              <a:rPr sz="1000" b="1" i="0">
                 <a:solidFill>
                   <a:srgbClr val="302E2E"/>
                 </a:solidFill>
                 <a:latin typeface="Montserrat Medium"/>
               </a:rPr>
-              <a:t>[driver] [assumption] → [value] (was [base])</a:t>
-            </a:r>
-          </a:p>
-          <a:p>
-            <a:pPr algn="l">
-              <a:lnSpc>
-                <a:spcPct val="110000"/>
-              </a:lnSpc>
-              <a:spcBef>
-                <a:spcPts val="0"/>
-              </a:spcBef>
-              <a:spcAft>
-                <a:spcPts val="600"/>
-              </a:spcAft>
-            </a:pPr>
-            <a:r>
-              <a:rPr sz="1200" b="1" i="0">
-                <a:solidFill>
-                  <a:srgbClr val="03045E"/>
+              <a:t>8.0%</a:t>
+            </a:r>
+          </a:p>
+        </p:txBody>
+      </p:sp>
+      <p:sp>
+        <p:nvSpPr>
+          <p:cNvPr id="17" name="Rectangle 16"/>
+          <p:cNvSpPr/>
+          <p:nvPr/>
+        </p:nvSpPr>
+        <p:spPr>
+          <a:xfrm>
+            <a:off x="1737360" y="2468880"/>
+            <a:ext cx="1207008" cy="740664"/>
+          </a:xfrm>
+          <a:prstGeom prst="rect">
+            <a:avLst/>
+          </a:prstGeom>
+          <a:solidFill>
+            <a:srgbClr val="5B7AAB"/>
+          </a:solidFill>
+          <a:ln w="12700">
+            <a:solidFill>
+              <a:srgbClr val="FEFFFF"/>
+            </a:solidFill>
+          </a:ln>
+          <a:effectLst/>
+        </p:spPr>
+        <p:style>
+          <a:lnRef idx="1">
+            <a:schemeClr val="accent1"/>
+          </a:lnRef>
+          <a:fillRef idx="3">
+            <a:schemeClr val="accent1"/>
+          </a:fillRef>
+          <a:effectRef idx="2">
+            <a:schemeClr val="accent1"/>
+          </a:effectRef>
+          <a:fontRef idx="minor">
+            <a:schemeClr val="lt1"/>
+          </a:fontRef>
+        </p:style>
+        <p:txBody>
+          <a:bodyPr rtlCol="0" anchor="ctr"/>
+          <a:lstStyle/>
+          <a:p>
+            <a:pPr algn="ctr"/>
+          </a:p>
+        </p:txBody>
+      </p:sp>
+      <p:sp>
+        <p:nvSpPr>
+          <p:cNvPr id="18" name="TextBox 17"/>
+          <p:cNvSpPr txBox="1"/>
+          <p:nvPr/>
+        </p:nvSpPr>
+        <p:spPr>
+          <a:xfrm>
+            <a:off x="1737360" y="2468880"/>
+            <a:ext cx="1207008" cy="740664"/>
+          </a:xfrm>
+          <a:prstGeom prst="rect">
+            <a:avLst/>
+          </a:prstGeom>
+          <a:noFill/>
+        </p:spPr>
+        <p:txBody>
+          <a:bodyPr wrap="square" anchor="ctr" lIns="0" rIns="0" tIns="0" bIns="0">
+            <a:spAutoFit/>
+          </a:bodyPr>
+          <a:lstStyle/>
+          <a:p>
+            <a:pPr algn="ctr">
+              <a:lnSpc>
+                <a:spcPct val="105000"/>
+              </a:lnSpc>
+              <a:spcBef>
+                <a:spcPts val="0"/>
+              </a:spcBef>
+              <a:spcAft>
+                <a:spcPts val="200"/>
+              </a:spcAft>
+            </a:pPr>
+            <a:r>
+              <a:rPr sz="1050" b="0" i="0">
+                <a:solidFill>
+                  <a:srgbClr val="302E2E"/>
                 </a:solidFill>
                 <a:latin typeface="Montserrat Medium"/>
               </a:rPr>
-              <a:t>    –  </a:t>
-            </a:r>
-            <a:r>
-              <a:rPr sz="1200" b="0" i="0">
+              <a:t>262</a:t>
+            </a:r>
+          </a:p>
+        </p:txBody>
+      </p:sp>
+      <p:sp>
+        <p:nvSpPr>
+          <p:cNvPr id="19" name="Rectangle 18"/>
+          <p:cNvSpPr/>
+          <p:nvPr/>
+        </p:nvSpPr>
+        <p:spPr>
+          <a:xfrm>
+            <a:off x="2944368" y="2468880"/>
+            <a:ext cx="1207008" cy="740664"/>
+          </a:xfrm>
+          <a:prstGeom prst="rect">
+            <a:avLst/>
+          </a:prstGeom>
+          <a:solidFill>
+            <a:srgbClr val="4A649C"/>
+          </a:solidFill>
+          <a:ln w="12700">
+            <a:solidFill>
+              <a:srgbClr val="FEFFFF"/>
+            </a:solidFill>
+          </a:ln>
+          <a:effectLst/>
+        </p:spPr>
+        <p:style>
+          <a:lnRef idx="1">
+            <a:schemeClr val="accent1"/>
+          </a:lnRef>
+          <a:fillRef idx="3">
+            <a:schemeClr val="accent1"/>
+          </a:fillRef>
+          <a:effectRef idx="2">
+            <a:schemeClr val="accent1"/>
+          </a:effectRef>
+          <a:fontRef idx="minor">
+            <a:schemeClr val="lt1"/>
+          </a:fontRef>
+        </p:style>
+        <p:txBody>
+          <a:bodyPr rtlCol="0" anchor="ctr"/>
+          <a:lstStyle/>
+          <a:p>
+            <a:pPr algn="ctr"/>
+          </a:p>
+        </p:txBody>
+      </p:sp>
+      <p:sp>
+        <p:nvSpPr>
+          <p:cNvPr id="20" name="TextBox 19"/>
+          <p:cNvSpPr txBox="1"/>
+          <p:nvPr/>
+        </p:nvSpPr>
+        <p:spPr>
+          <a:xfrm>
+            <a:off x="2944368" y="2468880"/>
+            <a:ext cx="1207008" cy="740664"/>
+          </a:xfrm>
+          <a:prstGeom prst="rect">
+            <a:avLst/>
+          </a:prstGeom>
+          <a:noFill/>
+        </p:spPr>
+        <p:txBody>
+          <a:bodyPr wrap="square" anchor="ctr" lIns="0" rIns="0" tIns="0" bIns="0">
+            <a:spAutoFit/>
+          </a:bodyPr>
+          <a:lstStyle/>
+          <a:p>
+            <a:pPr algn="ctr">
+              <a:lnSpc>
+                <a:spcPct val="105000"/>
+              </a:lnSpc>
+              <a:spcBef>
+                <a:spcPts val="0"/>
+              </a:spcBef>
+              <a:spcAft>
+                <a:spcPts val="200"/>
+              </a:spcAft>
+            </a:pPr>
+            <a:r>
+              <a:rPr sz="1050" b="0" i="0">
+                <a:solidFill>
+                  <a:srgbClr val="FEFFFF"/>
+                </a:solidFill>
+                <a:latin typeface="Montserrat Medium"/>
+              </a:rPr>
+              <a:t>278</a:t>
+            </a:r>
+          </a:p>
+        </p:txBody>
+      </p:sp>
+      <p:sp>
+        <p:nvSpPr>
+          <p:cNvPr id="21" name="Rectangle 20"/>
+          <p:cNvSpPr/>
+          <p:nvPr/>
+        </p:nvSpPr>
+        <p:spPr>
+          <a:xfrm>
+            <a:off x="4151376" y="2468880"/>
+            <a:ext cx="1207008" cy="740664"/>
+          </a:xfrm>
+          <a:prstGeom prst="rect">
+            <a:avLst/>
+          </a:prstGeom>
+          <a:solidFill>
+            <a:srgbClr val="374A8B"/>
+          </a:solidFill>
+          <a:ln w="12700">
+            <a:solidFill>
+              <a:srgbClr val="FEFFFF"/>
+            </a:solidFill>
+          </a:ln>
+          <a:effectLst/>
+        </p:spPr>
+        <p:style>
+          <a:lnRef idx="1">
+            <a:schemeClr val="accent1"/>
+          </a:lnRef>
+          <a:fillRef idx="3">
+            <a:schemeClr val="accent1"/>
+          </a:fillRef>
+          <a:effectRef idx="2">
+            <a:schemeClr val="accent1"/>
+          </a:effectRef>
+          <a:fontRef idx="minor">
+            <a:schemeClr val="lt1"/>
+          </a:fontRef>
+        </p:style>
+        <p:txBody>
+          <a:bodyPr rtlCol="0" anchor="ctr"/>
+          <a:lstStyle/>
+          <a:p>
+            <a:pPr algn="ctr"/>
+          </a:p>
+        </p:txBody>
+      </p:sp>
+      <p:sp>
+        <p:nvSpPr>
+          <p:cNvPr id="22" name="TextBox 21"/>
+          <p:cNvSpPr txBox="1"/>
+          <p:nvPr/>
+        </p:nvSpPr>
+        <p:spPr>
+          <a:xfrm>
+            <a:off x="4151376" y="2468880"/>
+            <a:ext cx="1207008" cy="740664"/>
+          </a:xfrm>
+          <a:prstGeom prst="rect">
+            <a:avLst/>
+          </a:prstGeom>
+          <a:noFill/>
+        </p:spPr>
+        <p:txBody>
+          <a:bodyPr wrap="square" anchor="ctr" lIns="0" rIns="0" tIns="0" bIns="0">
+            <a:spAutoFit/>
+          </a:bodyPr>
+          <a:lstStyle/>
+          <a:p>
+            <a:pPr algn="ctr">
+              <a:lnSpc>
+                <a:spcPct val="105000"/>
+              </a:lnSpc>
+              <a:spcBef>
+                <a:spcPts val="0"/>
+              </a:spcBef>
+              <a:spcAft>
+                <a:spcPts val="200"/>
+              </a:spcAft>
+            </a:pPr>
+            <a:r>
+              <a:rPr sz="1050" b="0" i="0">
+                <a:solidFill>
+                  <a:srgbClr val="FEFFFF"/>
+                </a:solidFill>
+                <a:latin typeface="Montserrat Medium"/>
+              </a:rPr>
+              <a:t>297</a:t>
+            </a:r>
+          </a:p>
+        </p:txBody>
+      </p:sp>
+      <p:sp>
+        <p:nvSpPr>
+          <p:cNvPr id="23" name="Rectangle 22"/>
+          <p:cNvSpPr/>
+          <p:nvPr/>
+        </p:nvSpPr>
+        <p:spPr>
+          <a:xfrm>
+            <a:off x="5358384" y="2468880"/>
+            <a:ext cx="1207008" cy="740664"/>
+          </a:xfrm>
+          <a:prstGeom prst="rect">
+            <a:avLst/>
+          </a:prstGeom>
+          <a:solidFill>
+            <a:srgbClr val="1F2A77"/>
+          </a:solidFill>
+          <a:ln w="12700">
+            <a:solidFill>
+              <a:srgbClr val="FEFFFF"/>
+            </a:solidFill>
+          </a:ln>
+          <a:effectLst/>
+        </p:spPr>
+        <p:style>
+          <a:lnRef idx="1">
+            <a:schemeClr val="accent1"/>
+          </a:lnRef>
+          <a:fillRef idx="3">
+            <a:schemeClr val="accent1"/>
+          </a:fillRef>
+          <a:effectRef idx="2">
+            <a:schemeClr val="accent1"/>
+          </a:effectRef>
+          <a:fontRef idx="minor">
+            <a:schemeClr val="lt1"/>
+          </a:fontRef>
+        </p:style>
+        <p:txBody>
+          <a:bodyPr rtlCol="0" anchor="ctr"/>
+          <a:lstStyle/>
+          <a:p>
+            <a:pPr algn="ctr"/>
+          </a:p>
+        </p:txBody>
+      </p:sp>
+      <p:sp>
+        <p:nvSpPr>
+          <p:cNvPr id="24" name="TextBox 23"/>
+          <p:cNvSpPr txBox="1"/>
+          <p:nvPr/>
+        </p:nvSpPr>
+        <p:spPr>
+          <a:xfrm>
+            <a:off x="5358384" y="2468880"/>
+            <a:ext cx="1207008" cy="740664"/>
+          </a:xfrm>
+          <a:prstGeom prst="rect">
+            <a:avLst/>
+          </a:prstGeom>
+          <a:noFill/>
+        </p:spPr>
+        <p:txBody>
+          <a:bodyPr wrap="square" anchor="ctr" lIns="0" rIns="0" tIns="0" bIns="0">
+            <a:spAutoFit/>
+          </a:bodyPr>
+          <a:lstStyle/>
+          <a:p>
+            <a:pPr algn="ctr">
+              <a:lnSpc>
+                <a:spcPct val="105000"/>
+              </a:lnSpc>
+              <a:spcBef>
+                <a:spcPts val="0"/>
+              </a:spcBef>
+              <a:spcAft>
+                <a:spcPts val="200"/>
+              </a:spcAft>
+            </a:pPr>
+            <a:r>
+              <a:rPr sz="1050" b="0" i="0">
+                <a:solidFill>
+                  <a:srgbClr val="FEFFFF"/>
+                </a:solidFill>
+                <a:latin typeface="Montserrat Medium"/>
+              </a:rPr>
+              <a:t>320</a:t>
+            </a:r>
+          </a:p>
+        </p:txBody>
+      </p:sp>
+      <p:sp>
+        <p:nvSpPr>
+          <p:cNvPr id="25" name="Rectangle 24"/>
+          <p:cNvSpPr/>
+          <p:nvPr/>
+        </p:nvSpPr>
+        <p:spPr>
+          <a:xfrm>
+            <a:off x="6565392" y="2468880"/>
+            <a:ext cx="1207008" cy="740664"/>
+          </a:xfrm>
+          <a:prstGeom prst="rect">
+            <a:avLst/>
+          </a:prstGeom>
+          <a:solidFill>
+            <a:srgbClr val="03045E"/>
+          </a:solidFill>
+          <a:ln w="12700">
+            <a:solidFill>
+              <a:srgbClr val="FEFFFF"/>
+            </a:solidFill>
+          </a:ln>
+          <a:effectLst/>
+        </p:spPr>
+        <p:style>
+          <a:lnRef idx="1">
+            <a:schemeClr val="accent1"/>
+          </a:lnRef>
+          <a:fillRef idx="3">
+            <a:schemeClr val="accent1"/>
+          </a:fillRef>
+          <a:effectRef idx="2">
+            <a:schemeClr val="accent1"/>
+          </a:effectRef>
+          <a:fontRef idx="minor">
+            <a:schemeClr val="lt1"/>
+          </a:fontRef>
+        </p:style>
+        <p:txBody>
+          <a:bodyPr rtlCol="0" anchor="ctr"/>
+          <a:lstStyle/>
+          <a:p>
+            <a:pPr algn="ctr"/>
+          </a:p>
+        </p:txBody>
+      </p:sp>
+      <p:sp>
+        <p:nvSpPr>
+          <p:cNvPr id="26" name="TextBox 25"/>
+          <p:cNvSpPr txBox="1"/>
+          <p:nvPr/>
+        </p:nvSpPr>
+        <p:spPr>
+          <a:xfrm>
+            <a:off x="6565392" y="2468880"/>
+            <a:ext cx="1207008" cy="740664"/>
+          </a:xfrm>
+          <a:prstGeom prst="rect">
+            <a:avLst/>
+          </a:prstGeom>
+          <a:noFill/>
+        </p:spPr>
+        <p:txBody>
+          <a:bodyPr wrap="square" anchor="ctr" lIns="0" rIns="0" tIns="0" bIns="0">
+            <a:spAutoFit/>
+          </a:bodyPr>
+          <a:lstStyle/>
+          <a:p>
+            <a:pPr algn="ctr">
+              <a:lnSpc>
+                <a:spcPct val="105000"/>
+              </a:lnSpc>
+              <a:spcBef>
+                <a:spcPts val="0"/>
+              </a:spcBef>
+              <a:spcAft>
+                <a:spcPts val="200"/>
+              </a:spcAft>
+            </a:pPr>
+            <a:r>
+              <a:rPr sz="1050" b="0" i="0">
+                <a:solidFill>
+                  <a:srgbClr val="FEFFFF"/>
+                </a:solidFill>
+                <a:latin typeface="Montserrat Medium"/>
+              </a:rPr>
+              <a:t>348</a:t>
+            </a:r>
+          </a:p>
+        </p:txBody>
+      </p:sp>
+      <p:sp>
+        <p:nvSpPr>
+          <p:cNvPr id="27" name="TextBox 26"/>
+          <p:cNvSpPr txBox="1"/>
+          <p:nvPr/>
+        </p:nvSpPr>
+        <p:spPr>
+          <a:xfrm>
+            <a:off x="502920" y="3209544"/>
+            <a:ext cx="1234440" cy="740664"/>
+          </a:xfrm>
+          <a:prstGeom prst="rect">
+            <a:avLst/>
+          </a:prstGeom>
+          <a:noFill/>
+        </p:spPr>
+        <p:txBody>
+          <a:bodyPr wrap="square" anchor="ctr" lIns="0" rIns="0" tIns="0" bIns="0">
+            <a:spAutoFit/>
+          </a:bodyPr>
+          <a:lstStyle/>
+          <a:p>
+            <a:pPr algn="r">
+              <a:lnSpc>
+                <a:spcPct val="105000"/>
+              </a:lnSpc>
+              <a:spcBef>
+                <a:spcPts val="0"/>
+              </a:spcBef>
+              <a:spcAft>
+                <a:spcPts val="200"/>
+              </a:spcAft>
+            </a:pPr>
+            <a:r>
+              <a:rPr sz="1000" b="1" i="0">
                 <a:solidFill>
                   <a:srgbClr val="302E2E"/>
                 </a:solidFill>
                 <a:latin typeface="Montserrat Medium"/>
               </a:rPr>
-              <a:t>[driver] [assumption] → [value] (was [base])</a:t>
+              <a:t>8.5%</a:t>
+            </a:r>
+          </a:p>
+        </p:txBody>
+      </p:sp>
+      <p:sp>
+        <p:nvSpPr>
+          <p:cNvPr id="28" name="Rectangle 27"/>
+          <p:cNvSpPr/>
+          <p:nvPr/>
+        </p:nvSpPr>
+        <p:spPr>
+          <a:xfrm>
+            <a:off x="1737360" y="3209544"/>
+            <a:ext cx="1207008" cy="740664"/>
+          </a:xfrm>
+          <a:prstGeom prst="rect">
+            <a:avLst/>
+          </a:prstGeom>
+          <a:solidFill>
+            <a:srgbClr val="739BC0"/>
+          </a:solidFill>
+          <a:ln w="12700">
+            <a:solidFill>
+              <a:srgbClr val="FEFFFF"/>
+            </a:solidFill>
+          </a:ln>
+          <a:effectLst/>
+        </p:spPr>
+        <p:style>
+          <a:lnRef idx="1">
+            <a:schemeClr val="accent1"/>
+          </a:lnRef>
+          <a:fillRef idx="3">
+            <a:schemeClr val="accent1"/>
+          </a:fillRef>
+          <a:effectRef idx="2">
+            <a:schemeClr val="accent1"/>
+          </a:effectRef>
+          <a:fontRef idx="minor">
+            <a:schemeClr val="lt1"/>
+          </a:fontRef>
+        </p:style>
+        <p:txBody>
+          <a:bodyPr rtlCol="0" anchor="ctr"/>
+          <a:lstStyle/>
+          <a:p>
+            <a:pPr algn="ctr"/>
+          </a:p>
+        </p:txBody>
+      </p:sp>
+      <p:sp>
+        <p:nvSpPr>
+          <p:cNvPr id="29" name="TextBox 28"/>
+          <p:cNvSpPr txBox="1"/>
+          <p:nvPr/>
+        </p:nvSpPr>
+        <p:spPr>
+          <a:xfrm>
+            <a:off x="1737360" y="3209544"/>
+            <a:ext cx="1207008" cy="740664"/>
+          </a:xfrm>
+          <a:prstGeom prst="rect">
+            <a:avLst/>
+          </a:prstGeom>
+          <a:noFill/>
+        </p:spPr>
+        <p:txBody>
+          <a:bodyPr wrap="square" anchor="ctr" lIns="0" rIns="0" tIns="0" bIns="0">
+            <a:spAutoFit/>
+          </a:bodyPr>
+          <a:lstStyle/>
+          <a:p>
+            <a:pPr algn="ctr">
+              <a:lnSpc>
+                <a:spcPct val="105000"/>
+              </a:lnSpc>
+              <a:spcBef>
+                <a:spcPts val="0"/>
+              </a:spcBef>
+              <a:spcAft>
+                <a:spcPts val="200"/>
+              </a:spcAft>
+            </a:pPr>
+            <a:r>
+              <a:rPr sz="1050" b="0" i="0">
+                <a:solidFill>
+                  <a:srgbClr val="302E2E"/>
+                </a:solidFill>
+                <a:latin typeface="Montserrat Medium"/>
+              </a:rPr>
+              <a:t>238</a:t>
+            </a:r>
+          </a:p>
+        </p:txBody>
+      </p:sp>
+      <p:sp>
+        <p:nvSpPr>
+          <p:cNvPr id="30" name="Rectangle 29"/>
+          <p:cNvSpPr/>
+          <p:nvPr/>
+        </p:nvSpPr>
+        <p:spPr>
+          <a:xfrm>
+            <a:off x="2944368" y="3209544"/>
+            <a:ext cx="1207008" cy="740664"/>
+          </a:xfrm>
+          <a:prstGeom prst="rect">
+            <a:avLst/>
+          </a:prstGeom>
+          <a:solidFill>
+            <a:srgbClr val="6689B5"/>
+          </a:solidFill>
+          <a:ln w="12700">
+            <a:solidFill>
+              <a:srgbClr val="FEFFFF"/>
+            </a:solidFill>
+          </a:ln>
+          <a:effectLst/>
+        </p:spPr>
+        <p:style>
+          <a:lnRef idx="1">
+            <a:schemeClr val="accent1"/>
+          </a:lnRef>
+          <a:fillRef idx="3">
+            <a:schemeClr val="accent1"/>
+          </a:fillRef>
+          <a:effectRef idx="2">
+            <a:schemeClr val="accent1"/>
+          </a:effectRef>
+          <a:fontRef idx="minor">
+            <a:schemeClr val="lt1"/>
+          </a:fontRef>
+        </p:style>
+        <p:txBody>
+          <a:bodyPr rtlCol="0" anchor="ctr"/>
+          <a:lstStyle/>
+          <a:p>
+            <a:pPr algn="ctr"/>
+          </a:p>
+        </p:txBody>
+      </p:sp>
+      <p:sp>
+        <p:nvSpPr>
+          <p:cNvPr id="31" name="TextBox 30"/>
+          <p:cNvSpPr txBox="1"/>
+          <p:nvPr/>
+        </p:nvSpPr>
+        <p:spPr>
+          <a:xfrm>
+            <a:off x="2944368" y="3209544"/>
+            <a:ext cx="1207008" cy="740664"/>
+          </a:xfrm>
+          <a:prstGeom prst="rect">
+            <a:avLst/>
+          </a:prstGeom>
+          <a:noFill/>
+        </p:spPr>
+        <p:txBody>
+          <a:bodyPr wrap="square" anchor="ctr" lIns="0" rIns="0" tIns="0" bIns="0">
+            <a:spAutoFit/>
+          </a:bodyPr>
+          <a:lstStyle/>
+          <a:p>
+            <a:pPr algn="ctr">
+              <a:lnSpc>
+                <a:spcPct val="105000"/>
+              </a:lnSpc>
+              <a:spcBef>
+                <a:spcPts val="0"/>
+              </a:spcBef>
+              <a:spcAft>
+                <a:spcPts val="200"/>
+              </a:spcAft>
+            </a:pPr>
+            <a:r>
+              <a:rPr sz="1050" b="0" i="0">
+                <a:solidFill>
+                  <a:srgbClr val="302E2E"/>
+                </a:solidFill>
+                <a:latin typeface="Montserrat Medium"/>
+              </a:rPr>
+              <a:t>251</a:t>
+            </a:r>
+          </a:p>
+        </p:txBody>
+      </p:sp>
+      <p:sp>
+        <p:nvSpPr>
+          <p:cNvPr id="32" name="Rectangle 31"/>
+          <p:cNvSpPr/>
+          <p:nvPr/>
+        </p:nvSpPr>
+        <p:spPr>
+          <a:xfrm>
+            <a:off x="4151376" y="3209544"/>
+            <a:ext cx="1207008" cy="740664"/>
+          </a:xfrm>
+          <a:prstGeom prst="rect">
+            <a:avLst/>
+          </a:prstGeom>
+          <a:solidFill>
+            <a:srgbClr val="5674A7"/>
+          </a:solidFill>
+          <a:ln w="12700">
+            <a:solidFill>
+              <a:srgbClr val="FEFFFF"/>
+            </a:solidFill>
+          </a:ln>
+          <a:effectLst/>
+        </p:spPr>
+        <p:style>
+          <a:lnRef idx="1">
+            <a:schemeClr val="accent1"/>
+          </a:lnRef>
+          <a:fillRef idx="3">
+            <a:schemeClr val="accent1"/>
+          </a:fillRef>
+          <a:effectRef idx="2">
+            <a:schemeClr val="accent1"/>
+          </a:effectRef>
+          <a:fontRef idx="minor">
+            <a:schemeClr val="lt1"/>
+          </a:fontRef>
+        </p:style>
+        <p:txBody>
+          <a:bodyPr rtlCol="0" anchor="ctr"/>
+          <a:lstStyle/>
+          <a:p>
+            <a:pPr algn="ctr"/>
+          </a:p>
+        </p:txBody>
+      </p:sp>
+      <p:sp>
+        <p:nvSpPr>
+          <p:cNvPr id="33" name="TextBox 32"/>
+          <p:cNvSpPr txBox="1"/>
+          <p:nvPr/>
+        </p:nvSpPr>
+        <p:spPr>
+          <a:xfrm>
+            <a:off x="4151376" y="3209544"/>
+            <a:ext cx="1207008" cy="740664"/>
+          </a:xfrm>
+          <a:prstGeom prst="rect">
+            <a:avLst/>
+          </a:prstGeom>
+          <a:noFill/>
+        </p:spPr>
+        <p:txBody>
+          <a:bodyPr wrap="square" anchor="ctr" lIns="0" rIns="0" tIns="0" bIns="0">
+            <a:spAutoFit/>
+          </a:bodyPr>
+          <a:lstStyle/>
+          <a:p>
+            <a:pPr algn="ctr">
+              <a:lnSpc>
+                <a:spcPct val="105000"/>
+              </a:lnSpc>
+              <a:spcBef>
+                <a:spcPts val="0"/>
+              </a:spcBef>
+              <a:spcAft>
+                <a:spcPts val="200"/>
+              </a:spcAft>
+            </a:pPr>
+            <a:r>
+              <a:rPr sz="1050" b="0" i="0">
+                <a:solidFill>
+                  <a:srgbClr val="302E2E"/>
+                </a:solidFill>
+                <a:latin typeface="Montserrat Medium"/>
+              </a:rPr>
+              <a:t>266</a:t>
+            </a:r>
+          </a:p>
+        </p:txBody>
+      </p:sp>
+      <p:sp>
+        <p:nvSpPr>
+          <p:cNvPr id="34" name="Rectangle 33"/>
+          <p:cNvSpPr/>
+          <p:nvPr/>
+        </p:nvSpPr>
+        <p:spPr>
+          <a:xfrm>
+            <a:off x="5358384" y="3209544"/>
+            <a:ext cx="1207008" cy="740664"/>
+          </a:xfrm>
+          <a:prstGeom prst="rect">
+            <a:avLst/>
+          </a:prstGeom>
+          <a:solidFill>
+            <a:srgbClr val="445B97"/>
+          </a:solidFill>
+          <a:ln w="12700">
+            <a:solidFill>
+              <a:srgbClr val="FEFFFF"/>
+            </a:solidFill>
+          </a:ln>
+          <a:effectLst/>
+        </p:spPr>
+        <p:style>
+          <a:lnRef idx="1">
+            <a:schemeClr val="accent1"/>
+          </a:lnRef>
+          <a:fillRef idx="3">
+            <a:schemeClr val="accent1"/>
+          </a:fillRef>
+          <a:effectRef idx="2">
+            <a:schemeClr val="accent1"/>
+          </a:effectRef>
+          <a:fontRef idx="minor">
+            <a:schemeClr val="lt1"/>
+          </a:fontRef>
+        </p:style>
+        <p:txBody>
+          <a:bodyPr rtlCol="0" anchor="ctr"/>
+          <a:lstStyle/>
+          <a:p>
+            <a:pPr algn="ctr"/>
+          </a:p>
+        </p:txBody>
+      </p:sp>
+      <p:sp>
+        <p:nvSpPr>
+          <p:cNvPr id="35" name="TextBox 34"/>
+          <p:cNvSpPr txBox="1"/>
+          <p:nvPr/>
+        </p:nvSpPr>
+        <p:spPr>
+          <a:xfrm>
+            <a:off x="5358384" y="3209544"/>
+            <a:ext cx="1207008" cy="740664"/>
+          </a:xfrm>
+          <a:prstGeom prst="rect">
+            <a:avLst/>
+          </a:prstGeom>
+          <a:noFill/>
+        </p:spPr>
+        <p:txBody>
+          <a:bodyPr wrap="square" anchor="ctr" lIns="0" rIns="0" tIns="0" bIns="0">
+            <a:spAutoFit/>
+          </a:bodyPr>
+          <a:lstStyle/>
+          <a:p>
+            <a:pPr algn="ctr">
+              <a:lnSpc>
+                <a:spcPct val="105000"/>
+              </a:lnSpc>
+              <a:spcBef>
+                <a:spcPts val="0"/>
+              </a:spcBef>
+              <a:spcAft>
+                <a:spcPts val="200"/>
+              </a:spcAft>
+            </a:pPr>
+            <a:r>
+              <a:rPr sz="1050" b="0" i="0">
+                <a:solidFill>
+                  <a:srgbClr val="FEFFFF"/>
+                </a:solidFill>
+                <a:latin typeface="Montserrat Medium"/>
+              </a:rPr>
+              <a:t>284</a:t>
+            </a:r>
+          </a:p>
+        </p:txBody>
+      </p:sp>
+      <p:sp>
+        <p:nvSpPr>
+          <p:cNvPr id="36" name="Rectangle 35"/>
+          <p:cNvSpPr/>
+          <p:nvPr/>
+        </p:nvSpPr>
+        <p:spPr>
+          <a:xfrm>
+            <a:off x="6565392" y="3209544"/>
+            <a:ext cx="1207008" cy="740664"/>
+          </a:xfrm>
+          <a:prstGeom prst="rect">
+            <a:avLst/>
+          </a:prstGeom>
+          <a:solidFill>
+            <a:srgbClr val="2E3D83"/>
+          </a:solidFill>
+          <a:ln w="12700">
+            <a:solidFill>
+              <a:srgbClr val="FEFFFF"/>
+            </a:solidFill>
+          </a:ln>
+          <a:effectLst/>
+        </p:spPr>
+        <p:style>
+          <a:lnRef idx="1">
+            <a:schemeClr val="accent1"/>
+          </a:lnRef>
+          <a:fillRef idx="3">
+            <a:schemeClr val="accent1"/>
+          </a:fillRef>
+          <a:effectRef idx="2">
+            <a:schemeClr val="accent1"/>
+          </a:effectRef>
+          <a:fontRef idx="minor">
+            <a:schemeClr val="lt1"/>
+          </a:fontRef>
+        </p:style>
+        <p:txBody>
+          <a:bodyPr rtlCol="0" anchor="ctr"/>
+          <a:lstStyle/>
+          <a:p>
+            <a:pPr algn="ctr"/>
+          </a:p>
+        </p:txBody>
+      </p:sp>
+      <p:sp>
+        <p:nvSpPr>
+          <p:cNvPr id="37" name="TextBox 36"/>
+          <p:cNvSpPr txBox="1"/>
+          <p:nvPr/>
+        </p:nvSpPr>
+        <p:spPr>
+          <a:xfrm>
+            <a:off x="6565392" y="3209544"/>
+            <a:ext cx="1207008" cy="740664"/>
+          </a:xfrm>
+          <a:prstGeom prst="rect">
+            <a:avLst/>
+          </a:prstGeom>
+          <a:noFill/>
+        </p:spPr>
+        <p:txBody>
+          <a:bodyPr wrap="square" anchor="ctr" lIns="0" rIns="0" tIns="0" bIns="0">
+            <a:spAutoFit/>
+          </a:bodyPr>
+          <a:lstStyle/>
+          <a:p>
+            <a:pPr algn="ctr">
+              <a:lnSpc>
+                <a:spcPct val="105000"/>
+              </a:lnSpc>
+              <a:spcBef>
+                <a:spcPts val="0"/>
+              </a:spcBef>
+              <a:spcAft>
+                <a:spcPts val="200"/>
+              </a:spcAft>
+            </a:pPr>
+            <a:r>
+              <a:rPr sz="1050" b="0" i="0">
+                <a:solidFill>
+                  <a:srgbClr val="FEFFFF"/>
+                </a:solidFill>
+                <a:latin typeface="Montserrat Medium"/>
+              </a:rPr>
+              <a:t>306</a:t>
+            </a:r>
+          </a:p>
+        </p:txBody>
+      </p:sp>
+      <p:sp>
+        <p:nvSpPr>
+          <p:cNvPr id="38" name="TextBox 37"/>
+          <p:cNvSpPr txBox="1"/>
+          <p:nvPr/>
+        </p:nvSpPr>
+        <p:spPr>
+          <a:xfrm>
+            <a:off x="502920" y="3950208"/>
+            <a:ext cx="1234440" cy="740664"/>
+          </a:xfrm>
+          <a:prstGeom prst="rect">
+            <a:avLst/>
+          </a:prstGeom>
+          <a:noFill/>
+        </p:spPr>
+        <p:txBody>
+          <a:bodyPr wrap="square" anchor="ctr" lIns="0" rIns="0" tIns="0" bIns="0">
+            <a:spAutoFit/>
+          </a:bodyPr>
+          <a:lstStyle/>
+          <a:p>
+            <a:pPr algn="r">
+              <a:lnSpc>
+                <a:spcPct val="105000"/>
+              </a:lnSpc>
+              <a:spcBef>
+                <a:spcPts val="0"/>
+              </a:spcBef>
+              <a:spcAft>
+                <a:spcPts val="200"/>
+              </a:spcAft>
+            </a:pPr>
+            <a:r>
+              <a:rPr sz="1000" b="1" i="0">
+                <a:solidFill>
+                  <a:srgbClr val="302E2E"/>
+                </a:solidFill>
+                <a:latin typeface="Montserrat Medium"/>
+              </a:rPr>
+              <a:t>9.0%</a:t>
+            </a:r>
+          </a:p>
+        </p:txBody>
+      </p:sp>
+      <p:sp>
+        <p:nvSpPr>
+          <p:cNvPr id="39" name="Rectangle 38"/>
+          <p:cNvSpPr/>
+          <p:nvPr/>
+        </p:nvSpPr>
+        <p:spPr>
+          <a:xfrm>
+            <a:off x="1737360" y="3950208"/>
+            <a:ext cx="1207008" cy="740664"/>
+          </a:xfrm>
+          <a:prstGeom prst="rect">
+            <a:avLst/>
+          </a:prstGeom>
+          <a:solidFill>
+            <a:srgbClr val="8AB9D4"/>
+          </a:solidFill>
+          <a:ln w="12700">
+            <a:solidFill>
+              <a:srgbClr val="FEFFFF"/>
+            </a:solidFill>
+          </a:ln>
+          <a:effectLst/>
+        </p:spPr>
+        <p:style>
+          <a:lnRef idx="1">
+            <a:schemeClr val="accent1"/>
+          </a:lnRef>
+          <a:fillRef idx="3">
+            <a:schemeClr val="accent1"/>
+          </a:fillRef>
+          <a:effectRef idx="2">
+            <a:schemeClr val="accent1"/>
+          </a:effectRef>
+          <a:fontRef idx="minor">
+            <a:schemeClr val="lt1"/>
+          </a:fontRef>
+        </p:style>
+        <p:txBody>
+          <a:bodyPr rtlCol="0" anchor="ctr"/>
+          <a:lstStyle/>
+          <a:p>
+            <a:pPr algn="ctr"/>
+          </a:p>
+        </p:txBody>
+      </p:sp>
+      <p:sp>
+        <p:nvSpPr>
+          <p:cNvPr id="40" name="TextBox 39"/>
+          <p:cNvSpPr txBox="1"/>
+          <p:nvPr/>
+        </p:nvSpPr>
+        <p:spPr>
+          <a:xfrm>
+            <a:off x="1737360" y="3950208"/>
+            <a:ext cx="1207008" cy="740664"/>
+          </a:xfrm>
+          <a:prstGeom prst="rect">
+            <a:avLst/>
+          </a:prstGeom>
+          <a:noFill/>
+        </p:spPr>
+        <p:txBody>
+          <a:bodyPr wrap="square" anchor="ctr" lIns="0" rIns="0" tIns="0" bIns="0">
+            <a:spAutoFit/>
+          </a:bodyPr>
+          <a:lstStyle/>
+          <a:p>
+            <a:pPr algn="ctr">
+              <a:lnSpc>
+                <a:spcPct val="105000"/>
+              </a:lnSpc>
+              <a:spcBef>
+                <a:spcPts val="0"/>
+              </a:spcBef>
+              <a:spcAft>
+                <a:spcPts val="200"/>
+              </a:spcAft>
+            </a:pPr>
+            <a:r>
+              <a:rPr sz="1050" b="0" i="0">
+                <a:solidFill>
+                  <a:srgbClr val="302E2E"/>
+                </a:solidFill>
+                <a:latin typeface="Montserrat Medium"/>
+              </a:rPr>
+              <a:t>216</a:t>
+            </a:r>
+          </a:p>
+        </p:txBody>
+      </p:sp>
+      <p:sp>
+        <p:nvSpPr>
+          <p:cNvPr id="41" name="Rectangle 40"/>
+          <p:cNvSpPr/>
+          <p:nvPr/>
+        </p:nvSpPr>
+        <p:spPr>
+          <a:xfrm>
+            <a:off x="2944368" y="3950208"/>
+            <a:ext cx="1207008" cy="740664"/>
+          </a:xfrm>
+          <a:prstGeom prst="rect">
+            <a:avLst/>
+          </a:prstGeom>
+          <a:solidFill>
+            <a:srgbClr val="7EAACA"/>
+          </a:solidFill>
+          <a:ln w="12700">
+            <a:solidFill>
+              <a:srgbClr val="FEFFFF"/>
+            </a:solidFill>
+          </a:ln>
+          <a:effectLst/>
+        </p:spPr>
+        <p:style>
+          <a:lnRef idx="1">
+            <a:schemeClr val="accent1"/>
+          </a:lnRef>
+          <a:fillRef idx="3">
+            <a:schemeClr val="accent1"/>
+          </a:fillRef>
+          <a:effectRef idx="2">
+            <a:schemeClr val="accent1"/>
+          </a:effectRef>
+          <a:fontRef idx="minor">
+            <a:schemeClr val="lt1"/>
+          </a:fontRef>
+        </p:style>
+        <p:txBody>
+          <a:bodyPr rtlCol="0" anchor="ctr"/>
+          <a:lstStyle/>
+          <a:p>
+            <a:pPr algn="ctr"/>
+          </a:p>
+        </p:txBody>
+      </p:sp>
+      <p:sp>
+        <p:nvSpPr>
+          <p:cNvPr id="42" name="TextBox 41"/>
+          <p:cNvSpPr txBox="1"/>
+          <p:nvPr/>
+        </p:nvSpPr>
+        <p:spPr>
+          <a:xfrm>
+            <a:off x="2944368" y="3950208"/>
+            <a:ext cx="1207008" cy="740664"/>
+          </a:xfrm>
+          <a:prstGeom prst="rect">
+            <a:avLst/>
+          </a:prstGeom>
+          <a:noFill/>
+        </p:spPr>
+        <p:txBody>
+          <a:bodyPr wrap="square" anchor="ctr" lIns="0" rIns="0" tIns="0" bIns="0">
+            <a:spAutoFit/>
+          </a:bodyPr>
+          <a:lstStyle/>
+          <a:p>
+            <a:pPr algn="ctr">
+              <a:lnSpc>
+                <a:spcPct val="105000"/>
+              </a:lnSpc>
+              <a:spcBef>
+                <a:spcPts val="0"/>
+              </a:spcBef>
+              <a:spcAft>
+                <a:spcPts val="200"/>
+              </a:spcAft>
+            </a:pPr>
+            <a:r>
+              <a:rPr sz="1050" b="0" i="0">
+                <a:solidFill>
+                  <a:srgbClr val="302E2E"/>
+                </a:solidFill>
+                <a:latin typeface="Montserrat Medium"/>
+              </a:rPr>
+              <a:t>227</a:t>
+            </a:r>
+          </a:p>
+        </p:txBody>
+      </p:sp>
+      <p:sp>
+        <p:nvSpPr>
+          <p:cNvPr id="43" name="Rectangle 42"/>
+          <p:cNvSpPr/>
+          <p:nvPr/>
+        </p:nvSpPr>
+        <p:spPr>
+          <a:xfrm>
+            <a:off x="4151376" y="3950208"/>
+            <a:ext cx="1207008" cy="740664"/>
+          </a:xfrm>
+          <a:prstGeom prst="rect">
+            <a:avLst/>
+          </a:prstGeom>
+          <a:solidFill>
+            <a:srgbClr val="7198BE"/>
+          </a:solidFill>
+          <a:ln w="31750">
+            <a:solidFill>
+              <a:srgbClr val="E4572E"/>
+            </a:solidFill>
+          </a:ln>
+          <a:effectLst/>
+        </p:spPr>
+        <p:style>
+          <a:lnRef idx="1">
+            <a:schemeClr val="accent1"/>
+          </a:lnRef>
+          <a:fillRef idx="3">
+            <a:schemeClr val="accent1"/>
+          </a:fillRef>
+          <a:effectRef idx="2">
+            <a:schemeClr val="accent1"/>
+          </a:effectRef>
+          <a:fontRef idx="minor">
+            <a:schemeClr val="lt1"/>
+          </a:fontRef>
+        </p:style>
+        <p:txBody>
+          <a:bodyPr rtlCol="0" anchor="ctr"/>
+          <a:lstStyle/>
+          <a:p>
+            <a:pPr algn="ctr"/>
+          </a:p>
+        </p:txBody>
+      </p:sp>
+      <p:sp>
+        <p:nvSpPr>
+          <p:cNvPr id="44" name="TextBox 43"/>
+          <p:cNvSpPr txBox="1"/>
+          <p:nvPr/>
+        </p:nvSpPr>
+        <p:spPr>
+          <a:xfrm>
+            <a:off x="4151376" y="3950208"/>
+            <a:ext cx="1207008" cy="740664"/>
+          </a:xfrm>
+          <a:prstGeom prst="rect">
+            <a:avLst/>
+          </a:prstGeom>
+          <a:noFill/>
+        </p:spPr>
+        <p:txBody>
+          <a:bodyPr wrap="square" anchor="ctr" lIns="0" rIns="0" tIns="0" bIns="0">
+            <a:spAutoFit/>
+          </a:bodyPr>
+          <a:lstStyle/>
+          <a:p>
+            <a:pPr algn="ctr">
+              <a:lnSpc>
+                <a:spcPct val="105000"/>
+              </a:lnSpc>
+              <a:spcBef>
+                <a:spcPts val="0"/>
+              </a:spcBef>
+              <a:spcAft>
+                <a:spcPts val="200"/>
+              </a:spcAft>
+            </a:pPr>
+            <a:r>
+              <a:rPr sz="1050" b="1" i="0">
+                <a:solidFill>
+                  <a:srgbClr val="302E2E"/>
+                </a:solidFill>
+                <a:latin typeface="Montserrat Medium"/>
+              </a:rPr>
+              <a:t>240</a:t>
+            </a:r>
+          </a:p>
+        </p:txBody>
+      </p:sp>
+      <p:sp>
+        <p:nvSpPr>
+          <p:cNvPr id="45" name="Rectangle 44"/>
+          <p:cNvSpPr/>
+          <p:nvPr/>
+        </p:nvSpPr>
+        <p:spPr>
+          <a:xfrm>
+            <a:off x="5358384" y="3950208"/>
+            <a:ext cx="1207008" cy="740664"/>
+          </a:xfrm>
+          <a:prstGeom prst="rect">
+            <a:avLst/>
+          </a:prstGeom>
+          <a:solidFill>
+            <a:srgbClr val="6385B2"/>
+          </a:solidFill>
+          <a:ln w="12700">
+            <a:solidFill>
+              <a:srgbClr val="FEFFFF"/>
+            </a:solidFill>
+          </a:ln>
+          <a:effectLst/>
+        </p:spPr>
+        <p:style>
+          <a:lnRef idx="1">
+            <a:schemeClr val="accent1"/>
+          </a:lnRef>
+          <a:fillRef idx="3">
+            <a:schemeClr val="accent1"/>
+          </a:fillRef>
+          <a:effectRef idx="2">
+            <a:schemeClr val="accent1"/>
+          </a:effectRef>
+          <a:fontRef idx="minor">
+            <a:schemeClr val="lt1"/>
+          </a:fontRef>
+        </p:style>
+        <p:txBody>
+          <a:bodyPr rtlCol="0" anchor="ctr"/>
+          <a:lstStyle/>
+          <a:p>
+            <a:pPr algn="ctr"/>
+          </a:p>
+        </p:txBody>
+      </p:sp>
+      <p:sp>
+        <p:nvSpPr>
+          <p:cNvPr id="46" name="TextBox 45"/>
+          <p:cNvSpPr txBox="1"/>
+          <p:nvPr/>
+        </p:nvSpPr>
+        <p:spPr>
+          <a:xfrm>
+            <a:off x="5358384" y="3950208"/>
+            <a:ext cx="1207008" cy="740664"/>
+          </a:xfrm>
+          <a:prstGeom prst="rect">
+            <a:avLst/>
+          </a:prstGeom>
+          <a:noFill/>
+        </p:spPr>
+        <p:txBody>
+          <a:bodyPr wrap="square" anchor="ctr" lIns="0" rIns="0" tIns="0" bIns="0">
+            <a:spAutoFit/>
+          </a:bodyPr>
+          <a:lstStyle/>
+          <a:p>
+            <a:pPr algn="ctr">
+              <a:lnSpc>
+                <a:spcPct val="105000"/>
+              </a:lnSpc>
+              <a:spcBef>
+                <a:spcPts val="0"/>
+              </a:spcBef>
+              <a:spcAft>
+                <a:spcPts val="200"/>
+              </a:spcAft>
+            </a:pPr>
+            <a:r>
+              <a:rPr sz="1050" b="0" i="0">
+                <a:solidFill>
+                  <a:srgbClr val="302E2E"/>
+                </a:solidFill>
+                <a:latin typeface="Montserrat Medium"/>
+              </a:rPr>
+              <a:t>254</a:t>
+            </a:r>
+          </a:p>
+        </p:txBody>
+      </p:sp>
+      <p:sp>
+        <p:nvSpPr>
+          <p:cNvPr id="47" name="Rectangle 46"/>
+          <p:cNvSpPr/>
+          <p:nvPr/>
+        </p:nvSpPr>
+        <p:spPr>
+          <a:xfrm>
+            <a:off x="6565392" y="3950208"/>
+            <a:ext cx="1207008" cy="740664"/>
+          </a:xfrm>
+          <a:prstGeom prst="rect">
+            <a:avLst/>
+          </a:prstGeom>
+          <a:solidFill>
+            <a:srgbClr val="506CA2"/>
+          </a:solidFill>
+          <a:ln w="12700">
+            <a:solidFill>
+              <a:srgbClr val="FEFFFF"/>
+            </a:solidFill>
+          </a:ln>
+          <a:effectLst/>
+        </p:spPr>
+        <p:style>
+          <a:lnRef idx="1">
+            <a:schemeClr val="accent1"/>
+          </a:lnRef>
+          <a:fillRef idx="3">
+            <a:schemeClr val="accent1"/>
+          </a:fillRef>
+          <a:effectRef idx="2">
+            <a:schemeClr val="accent1"/>
+          </a:effectRef>
+          <a:fontRef idx="minor">
+            <a:schemeClr val="lt1"/>
+          </a:fontRef>
+        </p:style>
+        <p:txBody>
+          <a:bodyPr rtlCol="0" anchor="ctr"/>
+          <a:lstStyle/>
+          <a:p>
+            <a:pPr algn="ctr"/>
+          </a:p>
+        </p:txBody>
+      </p:sp>
+      <p:sp>
+        <p:nvSpPr>
+          <p:cNvPr id="48" name="TextBox 47"/>
+          <p:cNvSpPr txBox="1"/>
+          <p:nvPr/>
+        </p:nvSpPr>
+        <p:spPr>
+          <a:xfrm>
+            <a:off x="6565392" y="3950208"/>
+            <a:ext cx="1207008" cy="740664"/>
+          </a:xfrm>
+          <a:prstGeom prst="rect">
+            <a:avLst/>
+          </a:prstGeom>
+          <a:noFill/>
+        </p:spPr>
+        <p:txBody>
+          <a:bodyPr wrap="square" anchor="ctr" lIns="0" rIns="0" tIns="0" bIns="0">
+            <a:spAutoFit/>
+          </a:bodyPr>
+          <a:lstStyle/>
+          <a:p>
+            <a:pPr algn="ctr">
+              <a:lnSpc>
+                <a:spcPct val="105000"/>
+              </a:lnSpc>
+              <a:spcBef>
+                <a:spcPts val="0"/>
+              </a:spcBef>
+              <a:spcAft>
+                <a:spcPts val="200"/>
+              </a:spcAft>
+            </a:pPr>
+            <a:r>
+              <a:rPr sz="1050" b="0" i="0">
+                <a:solidFill>
+                  <a:srgbClr val="302E2E"/>
+                </a:solidFill>
+                <a:latin typeface="Montserrat Medium"/>
+              </a:rPr>
+              <a:t>272</a:t>
+            </a:r>
+          </a:p>
+        </p:txBody>
+      </p:sp>
+      <p:sp>
+        <p:nvSpPr>
+          <p:cNvPr id="49" name="TextBox 48"/>
+          <p:cNvSpPr txBox="1"/>
+          <p:nvPr/>
+        </p:nvSpPr>
+        <p:spPr>
+          <a:xfrm>
+            <a:off x="502920" y="4690872"/>
+            <a:ext cx="1234440" cy="740664"/>
+          </a:xfrm>
+          <a:prstGeom prst="rect">
+            <a:avLst/>
+          </a:prstGeom>
+          <a:noFill/>
+        </p:spPr>
+        <p:txBody>
+          <a:bodyPr wrap="square" anchor="ctr" lIns="0" rIns="0" tIns="0" bIns="0">
+            <a:spAutoFit/>
+          </a:bodyPr>
+          <a:lstStyle/>
+          <a:p>
+            <a:pPr algn="r">
+              <a:lnSpc>
+                <a:spcPct val="105000"/>
+              </a:lnSpc>
+              <a:spcBef>
+                <a:spcPts val="0"/>
+              </a:spcBef>
+              <a:spcAft>
+                <a:spcPts val="200"/>
+              </a:spcAft>
+            </a:pPr>
+            <a:r>
+              <a:rPr sz="1000" b="1" i="0">
+                <a:solidFill>
+                  <a:srgbClr val="302E2E"/>
+                </a:solidFill>
+                <a:latin typeface="Montserrat Medium"/>
+              </a:rPr>
+              <a:t>9.5%</a:t>
+            </a:r>
+          </a:p>
+        </p:txBody>
+      </p:sp>
+      <p:sp>
+        <p:nvSpPr>
+          <p:cNvPr id="50" name="Rectangle 49"/>
+          <p:cNvSpPr/>
+          <p:nvPr/>
+        </p:nvSpPr>
+        <p:spPr>
+          <a:xfrm>
+            <a:off x="1737360" y="4690872"/>
+            <a:ext cx="1207008" cy="740664"/>
+          </a:xfrm>
+          <a:prstGeom prst="rect">
+            <a:avLst/>
+          </a:prstGeom>
+          <a:solidFill>
+            <a:srgbClr val="9CD2E4"/>
+          </a:solidFill>
+          <a:ln w="12700">
+            <a:solidFill>
+              <a:srgbClr val="FEFFFF"/>
+            </a:solidFill>
+          </a:ln>
+          <a:effectLst/>
+        </p:spPr>
+        <p:style>
+          <a:lnRef idx="1">
+            <a:schemeClr val="accent1"/>
+          </a:lnRef>
+          <a:fillRef idx="3">
+            <a:schemeClr val="accent1"/>
+          </a:fillRef>
+          <a:effectRef idx="2">
+            <a:schemeClr val="accent1"/>
+          </a:effectRef>
+          <a:fontRef idx="minor">
+            <a:schemeClr val="lt1"/>
+          </a:fontRef>
+        </p:style>
+        <p:txBody>
+          <a:bodyPr rtlCol="0" anchor="ctr"/>
+          <a:lstStyle/>
+          <a:p>
+            <a:pPr algn="ctr"/>
+          </a:p>
+        </p:txBody>
+      </p:sp>
+      <p:sp>
+        <p:nvSpPr>
+          <p:cNvPr id="51" name="TextBox 50"/>
+          <p:cNvSpPr txBox="1"/>
+          <p:nvPr/>
+        </p:nvSpPr>
+        <p:spPr>
+          <a:xfrm>
+            <a:off x="1737360" y="4690872"/>
+            <a:ext cx="1207008" cy="740664"/>
+          </a:xfrm>
+          <a:prstGeom prst="rect">
+            <a:avLst/>
+          </a:prstGeom>
+          <a:noFill/>
+        </p:spPr>
+        <p:txBody>
+          <a:bodyPr wrap="square" anchor="ctr" lIns="0" rIns="0" tIns="0" bIns="0">
+            <a:spAutoFit/>
+          </a:bodyPr>
+          <a:lstStyle/>
+          <a:p>
+            <a:pPr algn="ctr">
+              <a:lnSpc>
+                <a:spcPct val="105000"/>
+              </a:lnSpc>
+              <a:spcBef>
+                <a:spcPts val="0"/>
+              </a:spcBef>
+              <a:spcAft>
+                <a:spcPts val="200"/>
+              </a:spcAft>
+            </a:pPr>
+            <a:r>
+              <a:rPr sz="1050" b="0" i="0">
+                <a:solidFill>
+                  <a:srgbClr val="302E2E"/>
+                </a:solidFill>
+                <a:latin typeface="Montserrat Medium"/>
+              </a:rPr>
+              <a:t>198</a:t>
+            </a:r>
+          </a:p>
+        </p:txBody>
+      </p:sp>
+      <p:sp>
+        <p:nvSpPr>
+          <p:cNvPr id="52" name="Rectangle 51"/>
+          <p:cNvSpPr/>
+          <p:nvPr/>
+        </p:nvSpPr>
+        <p:spPr>
+          <a:xfrm>
+            <a:off x="2944368" y="4690872"/>
+            <a:ext cx="1207008" cy="740664"/>
+          </a:xfrm>
+          <a:prstGeom prst="rect">
+            <a:avLst/>
+          </a:prstGeom>
+          <a:solidFill>
+            <a:srgbClr val="93C5DC"/>
+          </a:solidFill>
+          <a:ln w="12700">
+            <a:solidFill>
+              <a:srgbClr val="FEFFFF"/>
+            </a:solidFill>
+          </a:ln>
+          <a:effectLst/>
+        </p:spPr>
+        <p:style>
+          <a:lnRef idx="1">
+            <a:schemeClr val="accent1"/>
+          </a:lnRef>
+          <a:fillRef idx="3">
+            <a:schemeClr val="accent1"/>
+          </a:fillRef>
+          <a:effectRef idx="2">
+            <a:schemeClr val="accent1"/>
+          </a:effectRef>
+          <a:fontRef idx="minor">
+            <a:schemeClr val="lt1"/>
+          </a:fontRef>
+        </p:style>
+        <p:txBody>
+          <a:bodyPr rtlCol="0" anchor="ctr"/>
+          <a:lstStyle/>
+          <a:p>
+            <a:pPr algn="ctr"/>
+          </a:p>
+        </p:txBody>
+      </p:sp>
+      <p:sp>
+        <p:nvSpPr>
+          <p:cNvPr id="53" name="TextBox 52"/>
+          <p:cNvSpPr txBox="1"/>
+          <p:nvPr/>
+        </p:nvSpPr>
+        <p:spPr>
+          <a:xfrm>
+            <a:off x="2944368" y="4690872"/>
+            <a:ext cx="1207008" cy="740664"/>
+          </a:xfrm>
+          <a:prstGeom prst="rect">
+            <a:avLst/>
+          </a:prstGeom>
+          <a:noFill/>
+        </p:spPr>
+        <p:txBody>
+          <a:bodyPr wrap="square" anchor="ctr" lIns="0" rIns="0" tIns="0" bIns="0">
+            <a:spAutoFit/>
+          </a:bodyPr>
+          <a:lstStyle/>
+          <a:p>
+            <a:pPr algn="ctr">
+              <a:lnSpc>
+                <a:spcPct val="105000"/>
+              </a:lnSpc>
+              <a:spcBef>
+                <a:spcPts val="0"/>
+              </a:spcBef>
+              <a:spcAft>
+                <a:spcPts val="200"/>
+              </a:spcAft>
+            </a:pPr>
+            <a:r>
+              <a:rPr sz="1050" b="0" i="0">
+                <a:solidFill>
+                  <a:srgbClr val="302E2E"/>
+                </a:solidFill>
+                <a:latin typeface="Montserrat Medium"/>
+              </a:rPr>
+              <a:t>207</a:t>
+            </a:r>
+          </a:p>
+        </p:txBody>
+      </p:sp>
+      <p:sp>
+        <p:nvSpPr>
+          <p:cNvPr id="54" name="Rectangle 53"/>
+          <p:cNvSpPr/>
+          <p:nvPr/>
+        </p:nvSpPr>
+        <p:spPr>
+          <a:xfrm>
+            <a:off x="4151376" y="4690872"/>
+            <a:ext cx="1207008" cy="740664"/>
+          </a:xfrm>
+          <a:prstGeom prst="rect">
+            <a:avLst/>
+          </a:prstGeom>
+          <a:solidFill>
+            <a:srgbClr val="89B7D3"/>
+          </a:solidFill>
+          <a:ln w="12700">
+            <a:solidFill>
+              <a:srgbClr val="FEFFFF"/>
+            </a:solidFill>
+          </a:ln>
+          <a:effectLst/>
+        </p:spPr>
+        <p:style>
+          <a:lnRef idx="1">
+            <a:schemeClr val="accent1"/>
+          </a:lnRef>
+          <a:fillRef idx="3">
+            <a:schemeClr val="accent1"/>
+          </a:fillRef>
+          <a:effectRef idx="2">
+            <a:schemeClr val="accent1"/>
+          </a:effectRef>
+          <a:fontRef idx="minor">
+            <a:schemeClr val="lt1"/>
+          </a:fontRef>
+        </p:style>
+        <p:txBody>
+          <a:bodyPr rtlCol="0" anchor="ctr"/>
+          <a:lstStyle/>
+          <a:p>
+            <a:pPr algn="ctr"/>
+          </a:p>
+        </p:txBody>
+      </p:sp>
+      <p:sp>
+        <p:nvSpPr>
+          <p:cNvPr id="55" name="TextBox 54"/>
+          <p:cNvSpPr txBox="1"/>
+          <p:nvPr/>
+        </p:nvSpPr>
+        <p:spPr>
+          <a:xfrm>
+            <a:off x="4151376" y="4690872"/>
+            <a:ext cx="1207008" cy="740664"/>
+          </a:xfrm>
+          <a:prstGeom prst="rect">
+            <a:avLst/>
+          </a:prstGeom>
+          <a:noFill/>
+        </p:spPr>
+        <p:txBody>
+          <a:bodyPr wrap="square" anchor="ctr" lIns="0" rIns="0" tIns="0" bIns="0">
+            <a:spAutoFit/>
+          </a:bodyPr>
+          <a:lstStyle/>
+          <a:p>
+            <a:pPr algn="ctr">
+              <a:lnSpc>
+                <a:spcPct val="105000"/>
+              </a:lnSpc>
+              <a:spcBef>
+                <a:spcPts val="0"/>
+              </a:spcBef>
+              <a:spcAft>
+                <a:spcPts val="200"/>
+              </a:spcAft>
+            </a:pPr>
+            <a:r>
+              <a:rPr sz="1050" b="0" i="0">
+                <a:solidFill>
+                  <a:srgbClr val="302E2E"/>
+                </a:solidFill>
+                <a:latin typeface="Montserrat Medium"/>
+              </a:rPr>
+              <a:t>217</a:t>
+            </a:r>
+          </a:p>
+        </p:txBody>
+      </p:sp>
+      <p:sp>
+        <p:nvSpPr>
+          <p:cNvPr id="56" name="Rectangle 55"/>
+          <p:cNvSpPr/>
+          <p:nvPr/>
+        </p:nvSpPr>
+        <p:spPr>
+          <a:xfrm>
+            <a:off x="5358384" y="4690872"/>
+            <a:ext cx="1207008" cy="740664"/>
+          </a:xfrm>
+          <a:prstGeom prst="rect">
+            <a:avLst/>
+          </a:prstGeom>
+          <a:solidFill>
+            <a:srgbClr val="7CA7C8"/>
+          </a:solidFill>
+          <a:ln w="12700">
+            <a:solidFill>
+              <a:srgbClr val="FEFFFF"/>
+            </a:solidFill>
+          </a:ln>
+          <a:effectLst/>
+        </p:spPr>
+        <p:style>
+          <a:lnRef idx="1">
+            <a:schemeClr val="accent1"/>
+          </a:lnRef>
+          <a:fillRef idx="3">
+            <a:schemeClr val="accent1"/>
+          </a:fillRef>
+          <a:effectRef idx="2">
+            <a:schemeClr val="accent1"/>
+          </a:effectRef>
+          <a:fontRef idx="minor">
+            <a:schemeClr val="lt1"/>
+          </a:fontRef>
+        </p:style>
+        <p:txBody>
+          <a:bodyPr rtlCol="0" anchor="ctr"/>
+          <a:lstStyle/>
+          <a:p>
+            <a:pPr algn="ctr"/>
+          </a:p>
+        </p:txBody>
+      </p:sp>
+      <p:sp>
+        <p:nvSpPr>
+          <p:cNvPr id="57" name="TextBox 56"/>
+          <p:cNvSpPr txBox="1"/>
+          <p:nvPr/>
+        </p:nvSpPr>
+        <p:spPr>
+          <a:xfrm>
+            <a:off x="5358384" y="4690872"/>
+            <a:ext cx="1207008" cy="740664"/>
+          </a:xfrm>
+          <a:prstGeom prst="rect">
+            <a:avLst/>
+          </a:prstGeom>
+          <a:noFill/>
+        </p:spPr>
+        <p:txBody>
+          <a:bodyPr wrap="square" anchor="ctr" lIns="0" rIns="0" tIns="0" bIns="0">
+            <a:spAutoFit/>
+          </a:bodyPr>
+          <a:lstStyle/>
+          <a:p>
+            <a:pPr algn="ctr">
+              <a:lnSpc>
+                <a:spcPct val="105000"/>
+              </a:lnSpc>
+              <a:spcBef>
+                <a:spcPts val="0"/>
+              </a:spcBef>
+              <a:spcAft>
+                <a:spcPts val="200"/>
+              </a:spcAft>
+            </a:pPr>
+            <a:r>
+              <a:rPr sz="1050" b="0" i="0">
+                <a:solidFill>
+                  <a:srgbClr val="302E2E"/>
+                </a:solidFill>
+                <a:latin typeface="Montserrat Medium"/>
+              </a:rPr>
+              <a:t>229</a:t>
+            </a:r>
+          </a:p>
+        </p:txBody>
+      </p:sp>
+      <p:sp>
+        <p:nvSpPr>
+          <p:cNvPr id="58" name="Rectangle 57"/>
+          <p:cNvSpPr/>
+          <p:nvPr/>
+        </p:nvSpPr>
+        <p:spPr>
+          <a:xfrm>
+            <a:off x="6565392" y="4690872"/>
+            <a:ext cx="1207008" cy="740664"/>
+          </a:xfrm>
+          <a:prstGeom prst="rect">
+            <a:avLst/>
+          </a:prstGeom>
+          <a:solidFill>
+            <a:srgbClr val="6E94BC"/>
+          </a:solidFill>
+          <a:ln w="12700">
+            <a:solidFill>
+              <a:srgbClr val="FEFFFF"/>
+            </a:solidFill>
+          </a:ln>
+          <a:effectLst/>
+        </p:spPr>
+        <p:style>
+          <a:lnRef idx="1">
+            <a:schemeClr val="accent1"/>
+          </a:lnRef>
+          <a:fillRef idx="3">
+            <a:schemeClr val="accent1"/>
+          </a:fillRef>
+          <a:effectRef idx="2">
+            <a:schemeClr val="accent1"/>
+          </a:effectRef>
+          <a:fontRef idx="minor">
+            <a:schemeClr val="lt1"/>
+          </a:fontRef>
+        </p:style>
+        <p:txBody>
+          <a:bodyPr rtlCol="0" anchor="ctr"/>
+          <a:lstStyle/>
+          <a:p>
+            <a:pPr algn="ctr"/>
+          </a:p>
+        </p:txBody>
+      </p:sp>
+      <p:sp>
+        <p:nvSpPr>
+          <p:cNvPr id="59" name="TextBox 58"/>
+          <p:cNvSpPr txBox="1"/>
+          <p:nvPr/>
+        </p:nvSpPr>
+        <p:spPr>
+          <a:xfrm>
+            <a:off x="6565392" y="4690872"/>
+            <a:ext cx="1207008" cy="740664"/>
+          </a:xfrm>
+          <a:prstGeom prst="rect">
+            <a:avLst/>
+          </a:prstGeom>
+          <a:noFill/>
+        </p:spPr>
+        <p:txBody>
+          <a:bodyPr wrap="square" anchor="ctr" lIns="0" rIns="0" tIns="0" bIns="0">
+            <a:spAutoFit/>
+          </a:bodyPr>
+          <a:lstStyle/>
+          <a:p>
+            <a:pPr algn="ctr">
+              <a:lnSpc>
+                <a:spcPct val="105000"/>
+              </a:lnSpc>
+              <a:spcBef>
+                <a:spcPts val="0"/>
+              </a:spcBef>
+              <a:spcAft>
+                <a:spcPts val="200"/>
+              </a:spcAft>
+            </a:pPr>
+            <a:r>
+              <a:rPr sz="1050" b="0" i="0">
+                <a:solidFill>
+                  <a:srgbClr val="302E2E"/>
+                </a:solidFill>
+                <a:latin typeface="Montserrat Medium"/>
+              </a:rPr>
+              <a:t>243</a:t>
+            </a:r>
+          </a:p>
+        </p:txBody>
+      </p:sp>
+      <p:sp>
+        <p:nvSpPr>
+          <p:cNvPr id="60" name="TextBox 59"/>
+          <p:cNvSpPr txBox="1"/>
+          <p:nvPr/>
+        </p:nvSpPr>
+        <p:spPr>
+          <a:xfrm>
+            <a:off x="502920" y="5431536"/>
+            <a:ext cx="1234440" cy="740664"/>
+          </a:xfrm>
+          <a:prstGeom prst="rect">
+            <a:avLst/>
+          </a:prstGeom>
+          <a:noFill/>
+        </p:spPr>
+        <p:txBody>
+          <a:bodyPr wrap="square" anchor="ctr" lIns="0" rIns="0" tIns="0" bIns="0">
+            <a:spAutoFit/>
+          </a:bodyPr>
+          <a:lstStyle/>
+          <a:p>
+            <a:pPr algn="r">
+              <a:lnSpc>
+                <a:spcPct val="105000"/>
+              </a:lnSpc>
+              <a:spcBef>
+                <a:spcPts val="0"/>
+              </a:spcBef>
+              <a:spcAft>
+                <a:spcPts val="200"/>
+              </a:spcAft>
+            </a:pPr>
+            <a:r>
+              <a:rPr sz="1000" b="1" i="0">
+                <a:solidFill>
+                  <a:srgbClr val="302E2E"/>
+                </a:solidFill>
+                <a:latin typeface="Montserrat Medium"/>
+              </a:rPr>
+              <a:t>10.0%</a:t>
+            </a:r>
+          </a:p>
+        </p:txBody>
+      </p:sp>
+      <p:sp>
+        <p:nvSpPr>
+          <p:cNvPr id="61" name="Rectangle 60"/>
+          <p:cNvSpPr/>
+          <p:nvPr/>
+        </p:nvSpPr>
+        <p:spPr>
+          <a:xfrm>
+            <a:off x="1737360" y="5431536"/>
+            <a:ext cx="1207008" cy="740664"/>
+          </a:xfrm>
+          <a:prstGeom prst="rect">
+            <a:avLst/>
+          </a:prstGeom>
+          <a:solidFill>
+            <a:srgbClr val="ADE8F3"/>
+          </a:solidFill>
+          <a:ln w="12700">
+            <a:solidFill>
+              <a:srgbClr val="FEFFFF"/>
+            </a:solidFill>
+          </a:ln>
+          <a:effectLst/>
+        </p:spPr>
+        <p:style>
+          <a:lnRef idx="1">
+            <a:schemeClr val="accent1"/>
+          </a:lnRef>
+          <a:fillRef idx="3">
+            <a:schemeClr val="accent1"/>
+          </a:fillRef>
+          <a:effectRef idx="2">
+            <a:schemeClr val="accent1"/>
+          </a:effectRef>
+          <a:fontRef idx="minor">
+            <a:schemeClr val="lt1"/>
+          </a:fontRef>
+        </p:style>
+        <p:txBody>
+          <a:bodyPr rtlCol="0" anchor="ctr"/>
+          <a:lstStyle/>
+          <a:p>
+            <a:pPr algn="ctr"/>
+          </a:p>
+        </p:txBody>
+      </p:sp>
+      <p:sp>
+        <p:nvSpPr>
+          <p:cNvPr id="62" name="TextBox 61"/>
+          <p:cNvSpPr txBox="1"/>
+          <p:nvPr/>
+        </p:nvSpPr>
+        <p:spPr>
+          <a:xfrm>
+            <a:off x="1737360" y="5431536"/>
+            <a:ext cx="1207008" cy="740664"/>
+          </a:xfrm>
+          <a:prstGeom prst="rect">
+            <a:avLst/>
+          </a:prstGeom>
+          <a:noFill/>
+        </p:spPr>
+        <p:txBody>
+          <a:bodyPr wrap="square" anchor="ctr" lIns="0" rIns="0" tIns="0" bIns="0">
+            <a:spAutoFit/>
+          </a:bodyPr>
+          <a:lstStyle/>
+          <a:p>
+            <a:pPr algn="ctr">
+              <a:lnSpc>
+                <a:spcPct val="105000"/>
+              </a:lnSpc>
+              <a:spcBef>
+                <a:spcPts val="0"/>
+              </a:spcBef>
+              <a:spcAft>
+                <a:spcPts val="200"/>
+              </a:spcAft>
+            </a:pPr>
+            <a:r>
+              <a:rPr sz="1050" b="0" i="0">
+                <a:solidFill>
+                  <a:srgbClr val="302E2E"/>
+                </a:solidFill>
+                <a:latin typeface="Montserrat Medium"/>
+              </a:rPr>
+              <a:t>182</a:t>
+            </a:r>
+          </a:p>
+        </p:txBody>
+      </p:sp>
+      <p:sp>
+        <p:nvSpPr>
+          <p:cNvPr id="63" name="Rectangle 62"/>
+          <p:cNvSpPr/>
+          <p:nvPr/>
+        </p:nvSpPr>
+        <p:spPr>
+          <a:xfrm>
+            <a:off x="2944368" y="5431536"/>
+            <a:ext cx="1207008" cy="740664"/>
+          </a:xfrm>
+          <a:prstGeom prst="rect">
+            <a:avLst/>
+          </a:prstGeom>
+          <a:solidFill>
+            <a:srgbClr val="A4DDEB"/>
+          </a:solidFill>
+          <a:ln w="12700">
+            <a:solidFill>
+              <a:srgbClr val="FEFFFF"/>
+            </a:solidFill>
+          </a:ln>
+          <a:effectLst/>
+        </p:spPr>
+        <p:style>
+          <a:lnRef idx="1">
+            <a:schemeClr val="accent1"/>
+          </a:lnRef>
+          <a:fillRef idx="3">
+            <a:schemeClr val="accent1"/>
+          </a:fillRef>
+          <a:effectRef idx="2">
+            <a:schemeClr val="accent1"/>
+          </a:effectRef>
+          <a:fontRef idx="minor">
+            <a:schemeClr val="lt1"/>
+          </a:fontRef>
+        </p:style>
+        <p:txBody>
+          <a:bodyPr rtlCol="0" anchor="ctr"/>
+          <a:lstStyle/>
+          <a:p>
+            <a:pPr algn="ctr"/>
+          </a:p>
+        </p:txBody>
+      </p:sp>
+      <p:sp>
+        <p:nvSpPr>
+          <p:cNvPr id="64" name="TextBox 63"/>
+          <p:cNvSpPr txBox="1"/>
+          <p:nvPr/>
+        </p:nvSpPr>
+        <p:spPr>
+          <a:xfrm>
+            <a:off x="2944368" y="5431536"/>
+            <a:ext cx="1207008" cy="740664"/>
+          </a:xfrm>
+          <a:prstGeom prst="rect">
+            <a:avLst/>
+          </a:prstGeom>
+          <a:noFill/>
+        </p:spPr>
+        <p:txBody>
+          <a:bodyPr wrap="square" anchor="ctr" lIns="0" rIns="0" tIns="0" bIns="0">
+            <a:spAutoFit/>
+          </a:bodyPr>
+          <a:lstStyle/>
+          <a:p>
+            <a:pPr algn="ctr">
+              <a:lnSpc>
+                <a:spcPct val="105000"/>
+              </a:lnSpc>
+              <a:spcBef>
+                <a:spcPts val="0"/>
+              </a:spcBef>
+              <a:spcAft>
+                <a:spcPts val="200"/>
+              </a:spcAft>
+            </a:pPr>
+            <a:r>
+              <a:rPr sz="1050" b="0" i="0">
+                <a:solidFill>
+                  <a:srgbClr val="302E2E"/>
+                </a:solidFill>
+                <a:latin typeface="Montserrat Medium"/>
+              </a:rPr>
+              <a:t>190</a:t>
+            </a:r>
+          </a:p>
+        </p:txBody>
+      </p:sp>
+      <p:sp>
+        <p:nvSpPr>
+          <p:cNvPr id="65" name="Rectangle 64"/>
+          <p:cNvSpPr/>
+          <p:nvPr/>
+        </p:nvSpPr>
+        <p:spPr>
+          <a:xfrm>
+            <a:off x="4151376" y="5431536"/>
+            <a:ext cx="1207008" cy="740664"/>
+          </a:xfrm>
+          <a:prstGeom prst="rect">
+            <a:avLst/>
+          </a:prstGeom>
+          <a:solidFill>
+            <a:srgbClr val="9CD2E4"/>
+          </a:solidFill>
+          <a:ln w="12700">
+            <a:solidFill>
+              <a:srgbClr val="FEFFFF"/>
+            </a:solidFill>
+          </a:ln>
+          <a:effectLst/>
+        </p:spPr>
+        <p:style>
+          <a:lnRef idx="1">
+            <a:schemeClr val="accent1"/>
+          </a:lnRef>
+          <a:fillRef idx="3">
+            <a:schemeClr val="accent1"/>
+          </a:fillRef>
+          <a:effectRef idx="2">
+            <a:schemeClr val="accent1"/>
+          </a:effectRef>
+          <a:fontRef idx="minor">
+            <a:schemeClr val="lt1"/>
+          </a:fontRef>
+        </p:style>
+        <p:txBody>
+          <a:bodyPr rtlCol="0" anchor="ctr"/>
+          <a:lstStyle/>
+          <a:p>
+            <a:pPr algn="ctr"/>
+          </a:p>
+        </p:txBody>
+      </p:sp>
+      <p:sp>
+        <p:nvSpPr>
+          <p:cNvPr id="66" name="TextBox 65"/>
+          <p:cNvSpPr txBox="1"/>
+          <p:nvPr/>
+        </p:nvSpPr>
+        <p:spPr>
+          <a:xfrm>
+            <a:off x="4151376" y="5431536"/>
+            <a:ext cx="1207008" cy="740664"/>
+          </a:xfrm>
+          <a:prstGeom prst="rect">
+            <a:avLst/>
+          </a:prstGeom>
+          <a:noFill/>
+        </p:spPr>
+        <p:txBody>
+          <a:bodyPr wrap="square" anchor="ctr" lIns="0" rIns="0" tIns="0" bIns="0">
+            <a:spAutoFit/>
+          </a:bodyPr>
+          <a:lstStyle/>
+          <a:p>
+            <a:pPr algn="ctr">
+              <a:lnSpc>
+                <a:spcPct val="105000"/>
+              </a:lnSpc>
+              <a:spcBef>
+                <a:spcPts val="0"/>
+              </a:spcBef>
+              <a:spcAft>
+                <a:spcPts val="200"/>
+              </a:spcAft>
+            </a:pPr>
+            <a:r>
+              <a:rPr sz="1050" b="0" i="0">
+                <a:solidFill>
+                  <a:srgbClr val="302E2E"/>
+                </a:solidFill>
+                <a:latin typeface="Montserrat Medium"/>
+              </a:rPr>
+              <a:t>198</a:t>
+            </a:r>
+          </a:p>
+        </p:txBody>
+      </p:sp>
+      <p:sp>
+        <p:nvSpPr>
+          <p:cNvPr id="67" name="Rectangle 66"/>
+          <p:cNvSpPr/>
+          <p:nvPr/>
+        </p:nvSpPr>
+        <p:spPr>
+          <a:xfrm>
+            <a:off x="5358384" y="5431536"/>
+            <a:ext cx="1207008" cy="740664"/>
+          </a:xfrm>
+          <a:prstGeom prst="rect">
+            <a:avLst/>
+          </a:prstGeom>
+          <a:solidFill>
+            <a:srgbClr val="92C4DB"/>
+          </a:solidFill>
+          <a:ln w="12700">
+            <a:solidFill>
+              <a:srgbClr val="FEFFFF"/>
+            </a:solidFill>
+          </a:ln>
+          <a:effectLst/>
+        </p:spPr>
+        <p:style>
+          <a:lnRef idx="1">
+            <a:schemeClr val="accent1"/>
+          </a:lnRef>
+          <a:fillRef idx="3">
+            <a:schemeClr val="accent1"/>
+          </a:fillRef>
+          <a:effectRef idx="2">
+            <a:schemeClr val="accent1"/>
+          </a:effectRef>
+          <a:fontRef idx="minor">
+            <a:schemeClr val="lt1"/>
+          </a:fontRef>
+        </p:style>
+        <p:txBody>
+          <a:bodyPr rtlCol="0" anchor="ctr"/>
+          <a:lstStyle/>
+          <a:p>
+            <a:pPr algn="ctr"/>
+          </a:p>
+        </p:txBody>
+      </p:sp>
+      <p:sp>
+        <p:nvSpPr>
+          <p:cNvPr id="68" name="TextBox 67"/>
+          <p:cNvSpPr txBox="1"/>
+          <p:nvPr/>
+        </p:nvSpPr>
+        <p:spPr>
+          <a:xfrm>
+            <a:off x="5358384" y="5431536"/>
+            <a:ext cx="1207008" cy="740664"/>
+          </a:xfrm>
+          <a:prstGeom prst="rect">
+            <a:avLst/>
+          </a:prstGeom>
+          <a:noFill/>
+        </p:spPr>
+        <p:txBody>
+          <a:bodyPr wrap="square" anchor="ctr" lIns="0" rIns="0" tIns="0" bIns="0">
+            <a:spAutoFit/>
+          </a:bodyPr>
+          <a:lstStyle/>
+          <a:p>
+            <a:pPr algn="ctr">
+              <a:lnSpc>
+                <a:spcPct val="105000"/>
+              </a:lnSpc>
+              <a:spcBef>
+                <a:spcPts val="0"/>
+              </a:spcBef>
+              <a:spcAft>
+                <a:spcPts val="200"/>
+              </a:spcAft>
+            </a:pPr>
+            <a:r>
+              <a:rPr sz="1050" b="0" i="0">
+                <a:solidFill>
+                  <a:srgbClr val="302E2E"/>
+                </a:solidFill>
+                <a:latin typeface="Montserrat Medium"/>
+              </a:rPr>
+              <a:t>208</a:t>
+            </a:r>
+          </a:p>
+        </p:txBody>
+      </p:sp>
+      <p:sp>
+        <p:nvSpPr>
+          <p:cNvPr id="69" name="Rectangle 68"/>
+          <p:cNvSpPr/>
+          <p:nvPr/>
+        </p:nvSpPr>
+        <p:spPr>
+          <a:xfrm>
+            <a:off x="6565392" y="5431536"/>
+            <a:ext cx="1207008" cy="740664"/>
+          </a:xfrm>
+          <a:prstGeom prst="rect">
+            <a:avLst/>
+          </a:prstGeom>
+          <a:solidFill>
+            <a:srgbClr val="86B3D0"/>
+          </a:solidFill>
+          <a:ln w="12700">
+            <a:solidFill>
+              <a:srgbClr val="FEFFFF"/>
+            </a:solidFill>
+          </a:ln>
+          <a:effectLst/>
+        </p:spPr>
+        <p:style>
+          <a:lnRef idx="1">
+            <a:schemeClr val="accent1"/>
+          </a:lnRef>
+          <a:fillRef idx="3">
+            <a:schemeClr val="accent1"/>
+          </a:fillRef>
+          <a:effectRef idx="2">
+            <a:schemeClr val="accent1"/>
+          </a:effectRef>
+          <a:fontRef idx="minor">
+            <a:schemeClr val="lt1"/>
+          </a:fontRef>
+        </p:style>
+        <p:txBody>
+          <a:bodyPr rtlCol="0" anchor="ctr"/>
+          <a:lstStyle/>
+          <a:p>
+            <a:pPr algn="ctr"/>
+          </a:p>
+        </p:txBody>
+      </p:sp>
+      <p:sp>
+        <p:nvSpPr>
+          <p:cNvPr id="70" name="TextBox 69"/>
+          <p:cNvSpPr txBox="1"/>
+          <p:nvPr/>
+        </p:nvSpPr>
+        <p:spPr>
+          <a:xfrm>
+            <a:off x="6565392" y="5431536"/>
+            <a:ext cx="1207008" cy="740664"/>
+          </a:xfrm>
+          <a:prstGeom prst="rect">
+            <a:avLst/>
+          </a:prstGeom>
+          <a:noFill/>
+        </p:spPr>
+        <p:txBody>
+          <a:bodyPr wrap="square" anchor="ctr" lIns="0" rIns="0" tIns="0" bIns="0">
+            <a:spAutoFit/>
+          </a:bodyPr>
+          <a:lstStyle/>
+          <a:p>
+            <a:pPr algn="ctr">
+              <a:lnSpc>
+                <a:spcPct val="105000"/>
+              </a:lnSpc>
+              <a:spcBef>
+                <a:spcPts val="0"/>
+              </a:spcBef>
+              <a:spcAft>
+                <a:spcPts val="200"/>
+              </a:spcAft>
+            </a:pPr>
+            <a:r>
+              <a:rPr sz="1050" b="0" i="0">
+                <a:solidFill>
+                  <a:srgbClr val="302E2E"/>
+                </a:solidFill>
+                <a:latin typeface="Montserrat Medium"/>
+              </a:rPr>
+              <a:t>220</a:t>
             </a:r>
           </a:p>
         </p:txBody>
       </p:sp>
       <p:cxnSp>
         <p:nvCxnSpPr>
-          <p:cNvPr id="9" name="Connector 8"/>
+          <p:cNvPr id="71" name="Connector 70"/>
           <p:cNvCxnSpPr/>
           <p:nvPr/>
         </p:nvCxnSpPr>
@@ -5319,7 +7709,7 @@
       </p:cxnSp>
       <p:sp>
         <p:nvSpPr>
-          <p:cNvPr id="10" name="Isosceles Triangle 9"/>
+          <p:cNvPr id="72" name="Isosceles Triangle 71"/>
           <p:cNvSpPr/>
           <p:nvPr/>
         </p:nvSpPr>
@@ -5363,7 +7753,7 @@
       </p:sp>
       <p:sp>
         <p:nvSpPr>
-          <p:cNvPr id="11" name="TextBox 10"/>
+          <p:cNvPr id="73" name="TextBox 72"/>
           <p:cNvSpPr txBox="1"/>
           <p:nvPr/>
         </p:nvSpPr>
@@ -5408,7 +7798,7 @@
       </p:sp>
       <p:sp>
         <p:nvSpPr>
-          <p:cNvPr id="12" name="TextBox 11"/>
+          <p:cNvPr id="74" name="TextBox 73"/>
           <p:cNvSpPr txBox="1"/>
           <p:nvPr/>
         </p:nvSpPr>
@@ -5455,7 +7845,7 @@
                 </a:solidFill>
                 <a:latin typeface="Montserrat Medium"/>
               </a:rPr>
-              <a:t>Thesis in words, then the numbers that implement it</a:t>
+              <a:t>WACC dominates the range</a:t>
             </a:r>
           </a:p>
           <a:p>
@@ -5486,7 +7876,7 @@
                 </a:solidFill>
                 <a:latin typeface="Montserrat Medium"/>
               </a:rPr>
-              <a:t>Base case shown before this scenario</a:t>
+              <a:t>Terminal assumptions warrant the most diligence</a:t>
             </a:r>
           </a:p>
         </p:txBody>
@@ -5594,7 +7984,7 @@
                 </a:solidFill>
                 <a:latin typeface="Montserrat"/>
               </a:rPr>
-              <a:t>Appendix:  </a:t>
+              <a:t>Company Analysis:  </a:t>
             </a:r>
             <a:r>
               <a:rPr sz="1050" b="0" i="1">
@@ -5603,7 +7993,7 @@
                 </a:solidFill>
                 <a:latin typeface="Montserrat"/>
               </a:rPr>
-              <a:t>Sources &amp; confidence</a:t>
+              <a:t>Scenario</a:t>
             </a:r>
           </a:p>
         </p:txBody>
@@ -5648,7 +8038,7 @@
                 </a:solidFill>
                 <a:latin typeface="Montserrat Medium"/>
               </a:rPr>
-              <a:t>Source: Confidence: 5 primary · 4 credible secondary · 3 triangulated (news cap) · 2 weak · 1 estimate</a:t>
+              <a:t>Source: aqmen analysis</a:t>
             </a:r>
           </a:p>
         </p:txBody>
@@ -5694,6 +8084,659 @@
                 <a:latin typeface="Montserrat Medium"/>
               </a:rPr>
               <a:t>11</a:t>
+            </a:r>
+          </a:p>
+        </p:txBody>
+      </p:sp>
+      <p:sp>
+        <p:nvSpPr>
+          <p:cNvPr id="6" name="TextBox 5"/>
+          <p:cNvSpPr txBox="1"/>
+          <p:nvPr/>
+        </p:nvSpPr>
+        <p:spPr>
+          <a:xfrm>
+            <a:off x="502920" y="566928"/>
+            <a:ext cx="11185855" cy="1051560"/>
+          </a:xfrm>
+          <a:prstGeom prst="rect">
+            <a:avLst/>
+          </a:prstGeom>
+          <a:noFill/>
+        </p:spPr>
+        <p:txBody>
+          <a:bodyPr wrap="square" anchor="t" lIns="0" rIns="0" tIns="0" bIns="0">
+            <a:spAutoFit/>
+          </a:bodyPr>
+          <a:lstStyle/>
+          <a:p>
+            <a:pPr algn="l">
+              <a:lnSpc>
+                <a:spcPct val="102000"/>
+              </a:lnSpc>
+              <a:spcBef>
+                <a:spcPts val="0"/>
+              </a:spcBef>
+              <a:spcAft>
+                <a:spcPts val="200"/>
+              </a:spcAft>
+            </a:pPr>
+            <a:r>
+              <a:rPr sz="2400" b="1" i="0">
+                <a:solidFill>
+                  <a:srgbClr val="03045E"/>
+                </a:solidFill>
+                <a:latin typeface="Montserrat"/>
+              </a:rPr>
+              <a:t>[Initiative]: [one-line thesis] adds ~$[X]m of EV</a:t>
+            </a:r>
+          </a:p>
+        </p:txBody>
+      </p:sp>
+      <p:sp>
+        <p:nvSpPr>
+          <p:cNvPr id="7" name="TextBox 6"/>
+          <p:cNvSpPr txBox="1"/>
+          <p:nvPr/>
+        </p:nvSpPr>
+        <p:spPr>
+          <a:xfrm>
+            <a:off x="502920" y="1783080"/>
+            <a:ext cx="7269480" cy="320040"/>
+          </a:xfrm>
+          <a:prstGeom prst="rect">
+            <a:avLst/>
+          </a:prstGeom>
+          <a:noFill/>
+        </p:spPr>
+        <p:txBody>
+          <a:bodyPr wrap="square" anchor="t" lIns="0" rIns="0" tIns="0" bIns="0">
+            <a:spAutoFit/>
+          </a:bodyPr>
+          <a:lstStyle/>
+          <a:p>
+            <a:pPr algn="l">
+              <a:lnSpc>
+                <a:spcPct val="105000"/>
+              </a:lnSpc>
+              <a:spcBef>
+                <a:spcPts val="0"/>
+              </a:spcBef>
+              <a:spcAft>
+                <a:spcPts val="200"/>
+              </a:spcAft>
+            </a:pPr>
+            <a:r>
+              <a:rPr sz="1400" b="1" i="0">
+                <a:solidFill>
+                  <a:srgbClr val="03045E"/>
+                </a:solidFill>
+                <a:latin typeface="Montserrat"/>
+              </a:rPr>
+              <a:t>Initiative (qualitative thesis)</a:t>
+            </a:r>
+          </a:p>
+        </p:txBody>
+      </p:sp>
+      <p:sp>
+        <p:nvSpPr>
+          <p:cNvPr id="8" name="TextBox 7"/>
+          <p:cNvSpPr txBox="1"/>
+          <p:nvPr/>
+        </p:nvSpPr>
+        <p:spPr>
+          <a:xfrm>
+            <a:off x="502920" y="2194560"/>
+            <a:ext cx="7269480" cy="4160520"/>
+          </a:xfrm>
+          <a:prstGeom prst="rect">
+            <a:avLst/>
+          </a:prstGeom>
+          <a:noFill/>
+        </p:spPr>
+        <p:txBody>
+          <a:bodyPr wrap="square" anchor="t" lIns="0" rIns="0" tIns="0" bIns="0">
+            <a:spAutoFit/>
+          </a:bodyPr>
+          <a:lstStyle/>
+          <a:p>
+            <a:pPr algn="l">
+              <a:lnSpc>
+                <a:spcPct val="110000"/>
+              </a:lnSpc>
+              <a:spcBef>
+                <a:spcPts val="0"/>
+              </a:spcBef>
+              <a:spcAft>
+                <a:spcPts val="600"/>
+              </a:spcAft>
+            </a:pPr>
+            <a:r>
+              <a:rPr sz="1200" b="1" i="0">
+                <a:solidFill>
+                  <a:srgbClr val="03045E"/>
+                </a:solidFill>
+                <a:latin typeface="Montserrat Medium"/>
+              </a:rPr>
+              <a:t>•  </a:t>
+            </a:r>
+            <a:r>
+              <a:rPr sz="1200" b="1" i="0">
+                <a:solidFill>
+                  <a:srgbClr val="302E2E"/>
+                </a:solidFill>
+                <a:latin typeface="Montserrat Medium"/>
+              </a:rPr>
+              <a:t>[Directional thesis in plain words — the value-creation lever]</a:t>
+            </a:r>
+          </a:p>
+          <a:p>
+            <a:pPr algn="l">
+              <a:lnSpc>
+                <a:spcPct val="110000"/>
+              </a:lnSpc>
+              <a:spcBef>
+                <a:spcPts val="0"/>
+              </a:spcBef>
+              <a:spcAft>
+                <a:spcPts val="600"/>
+              </a:spcAft>
+            </a:pPr>
+            <a:r>
+              <a:rPr sz="1200" b="1" i="0">
+                <a:solidFill>
+                  <a:srgbClr val="03045E"/>
+                </a:solidFill>
+                <a:latin typeface="Montserrat Medium"/>
+              </a:rPr>
+              <a:t>•  </a:t>
+            </a:r>
+            <a:r>
+              <a:rPr sz="1200" b="0" i="0">
+                <a:solidFill>
+                  <a:srgbClr val="302E2E"/>
+                </a:solidFill>
+                <a:latin typeface="Montserrat Medium"/>
+              </a:rPr>
+              <a:t>Overrides vs Base (quantitative):</a:t>
+            </a:r>
+          </a:p>
+          <a:p>
+            <a:pPr algn="l">
+              <a:lnSpc>
+                <a:spcPct val="110000"/>
+              </a:lnSpc>
+              <a:spcBef>
+                <a:spcPts val="0"/>
+              </a:spcBef>
+              <a:spcAft>
+                <a:spcPts val="600"/>
+              </a:spcAft>
+            </a:pPr>
+            <a:r>
+              <a:rPr sz="1200" b="1" i="0">
+                <a:solidFill>
+                  <a:srgbClr val="03045E"/>
+                </a:solidFill>
+                <a:latin typeface="Montserrat Medium"/>
+              </a:rPr>
+              <a:t>    –  </a:t>
+            </a:r>
+            <a:r>
+              <a:rPr sz="1200" b="0" i="0">
+                <a:solidFill>
+                  <a:srgbClr val="302E2E"/>
+                </a:solidFill>
+                <a:latin typeface="Montserrat Medium"/>
+              </a:rPr>
+              <a:t>[driver] [assumption] → [value] (was [base])</a:t>
+            </a:r>
+          </a:p>
+          <a:p>
+            <a:pPr algn="l">
+              <a:lnSpc>
+                <a:spcPct val="110000"/>
+              </a:lnSpc>
+              <a:spcBef>
+                <a:spcPts val="0"/>
+              </a:spcBef>
+              <a:spcAft>
+                <a:spcPts val="600"/>
+              </a:spcAft>
+            </a:pPr>
+            <a:r>
+              <a:rPr sz="1200" b="1" i="0">
+                <a:solidFill>
+                  <a:srgbClr val="03045E"/>
+                </a:solidFill>
+                <a:latin typeface="Montserrat Medium"/>
+              </a:rPr>
+              <a:t>    –  </a:t>
+            </a:r>
+            <a:r>
+              <a:rPr sz="1200" b="0" i="0">
+                <a:solidFill>
+                  <a:srgbClr val="302E2E"/>
+                </a:solidFill>
+                <a:latin typeface="Montserrat Medium"/>
+              </a:rPr>
+              <a:t>[driver] [assumption] → [value] (was [base])</a:t>
+            </a:r>
+          </a:p>
+        </p:txBody>
+      </p:sp>
+      <p:cxnSp>
+        <p:nvCxnSpPr>
+          <p:cNvPr id="9" name="Connector 8"/>
+          <p:cNvCxnSpPr/>
+          <p:nvPr/>
+        </p:nvCxnSpPr>
+        <p:spPr>
+          <a:xfrm>
+            <a:off x="8001000" y="1463040"/>
+            <a:ext cx="0" cy="4892040"/>
+          </a:xfrm>
+          <a:prstGeom prst="bentConnector3">
+            <a:avLst/>
+          </a:prstGeom>
+          <a:ln w="12700">
+            <a:solidFill>
+              <a:srgbClr val="C9CBD6"/>
+            </a:solidFill>
+          </a:ln>
+        </p:spPr>
+        <p:style>
+          <a:lnRef idx="2">
+            <a:schemeClr val="accent1"/>
+          </a:lnRef>
+          <a:fillRef idx="0">
+            <a:schemeClr val="accent1"/>
+          </a:fillRef>
+          <a:effectRef idx="1">
+            <a:schemeClr val="accent1"/>
+          </a:effectRef>
+          <a:fontRef idx="minor">
+            <a:schemeClr val="tx1"/>
+          </a:fontRef>
+        </p:style>
+      </p:cxnSp>
+      <p:sp>
+        <p:nvSpPr>
+          <p:cNvPr id="10" name="Isosceles Triangle 9"/>
+          <p:cNvSpPr/>
+          <p:nvPr/>
+        </p:nvSpPr>
+        <p:spPr>
+          <a:xfrm rot="5400000">
+            <a:off x="8275320" y="1490472"/>
+            <a:ext cx="201168" cy="201168"/>
+          </a:xfrm>
+          <a:prstGeom prst="triangle">
+            <a:avLst/>
+          </a:prstGeom>
+          <a:solidFill>
+            <a:srgbClr val="03045E"/>
+          </a:solidFill>
+          <a:ln>
+            <a:noFill/>
+          </a:ln>
+          <a:effectLst/>
+        </p:spPr>
+        <p:style>
+          <a:lnRef idx="1">
+            <a:schemeClr val="accent1"/>
+          </a:lnRef>
+          <a:fillRef idx="3">
+            <a:schemeClr val="accent1"/>
+          </a:fillRef>
+          <a:effectRef idx="2">
+            <a:schemeClr val="accent1"/>
+          </a:effectRef>
+          <a:fontRef idx="minor">
+            <a:schemeClr val="lt1"/>
+          </a:fontRef>
+        </p:style>
+        <p:txBody>
+          <a:bodyPr rtlCol="0" anchor="ctr"/>
+          <a:lstStyle/>
+          <a:p>
+            <a:pPr algn="ctr"/>
+          </a:p>
+        </p:txBody>
+      </p:sp>
+      <p:sp>
+        <p:nvSpPr>
+          <p:cNvPr id="11" name="TextBox 10"/>
+          <p:cNvSpPr txBox="1"/>
+          <p:nvPr/>
+        </p:nvSpPr>
+        <p:spPr>
+          <a:xfrm>
+            <a:off x="8567928" y="1472184"/>
+            <a:ext cx="3136392" cy="274320"/>
+          </a:xfrm>
+          <a:prstGeom prst="rect">
+            <a:avLst/>
+          </a:prstGeom>
+          <a:noFill/>
+        </p:spPr>
+        <p:txBody>
+          <a:bodyPr wrap="square" anchor="t" lIns="0" rIns="0" tIns="0" bIns="0">
+            <a:spAutoFit/>
+          </a:bodyPr>
+          <a:lstStyle/>
+          <a:p>
+            <a:pPr algn="l">
+              <a:lnSpc>
+                <a:spcPct val="105000"/>
+              </a:lnSpc>
+              <a:spcBef>
+                <a:spcPts val="0"/>
+              </a:spcBef>
+              <a:spcAft>
+                <a:spcPts val="200"/>
+              </a:spcAft>
+            </a:pPr>
+            <a:r>
+              <a:rPr sz="1300" b="1" i="0">
+                <a:solidFill>
+                  <a:srgbClr val="03045E"/>
+                </a:solidFill>
+                <a:latin typeface="Montserrat"/>
+              </a:rPr>
+              <a:t>Key Takeaways</a:t>
+            </a:r>
+          </a:p>
+        </p:txBody>
+      </p:sp>
+      <p:sp>
+        <p:nvSpPr>
+          <p:cNvPr id="12" name="TextBox 11"/>
+          <p:cNvSpPr txBox="1"/>
+          <p:nvPr/>
+        </p:nvSpPr>
+        <p:spPr>
+          <a:xfrm>
+            <a:off x="8275320" y="1920240"/>
+            <a:ext cx="3429000" cy="4434840"/>
+          </a:xfrm>
+          <a:prstGeom prst="rect">
+            <a:avLst/>
+          </a:prstGeom>
+          <a:noFill/>
+        </p:spPr>
+        <p:txBody>
+          <a:bodyPr wrap="square" anchor="t" lIns="0" rIns="0" tIns="0" bIns="0">
+            <a:spAutoFit/>
+          </a:bodyPr>
+          <a:lstStyle/>
+          <a:p>
+            <a:pPr algn="l">
+              <a:lnSpc>
+                <a:spcPct val="108000"/>
+              </a:lnSpc>
+              <a:spcBef>
+                <a:spcPts val="0"/>
+              </a:spcBef>
+              <a:spcAft>
+                <a:spcPts val="700"/>
+              </a:spcAft>
+            </a:pPr>
+            <a:r>
+              <a:rPr sz="1100" b="1" i="0">
+                <a:solidFill>
+                  <a:srgbClr val="03045E"/>
+                </a:solidFill>
+                <a:latin typeface="Montserrat Medium"/>
+              </a:rPr>
+              <a:t>•  </a:t>
+            </a:r>
+            <a:r>
+              <a:rPr sz="1100" b="0" i="0">
+                <a:solidFill>
+                  <a:srgbClr val="302E2E"/>
+                </a:solidFill>
+                <a:latin typeface="Montserrat Medium"/>
+              </a:rPr>
+              <a:t>Thesis in words, then the numbers that implement it</a:t>
+            </a:r>
+          </a:p>
+          <a:p>
+            <a:pPr algn="l">
+              <a:lnSpc>
+                <a:spcPct val="108000"/>
+              </a:lnSpc>
+              <a:spcBef>
+                <a:spcPts val="0"/>
+              </a:spcBef>
+              <a:spcAft>
+                <a:spcPts val="700"/>
+              </a:spcAft>
+            </a:pPr>
+            <a:r>
+              <a:rPr sz="1100" b="1" i="0">
+                <a:solidFill>
+                  <a:srgbClr val="03045E"/>
+                </a:solidFill>
+                <a:latin typeface="Montserrat Medium"/>
+              </a:rPr>
+              <a:t>•  </a:t>
+            </a:r>
+            <a:r>
+              <a:rPr sz="1100" b="0" i="0">
+                <a:solidFill>
+                  <a:srgbClr val="302E2E"/>
+                </a:solidFill>
+                <a:latin typeface="Montserrat Medium"/>
+              </a:rPr>
+              <a:t>Base case shown before this scenario</a:t>
+            </a:r>
+          </a:p>
+        </p:txBody>
+      </p:sp>
+    </p:spTree>
+  </p:cSld>
+  <p:clrMapOvr>
+    <a:masterClrMapping/>
+  </p:clrMapOvr>
+</p:sld>
+</file>
+
+<file path=ppt/slides/slide13.xml><?xml version="1.0" encoding="utf-8"?>
+<p:sld xmlns:a="http://schemas.openxmlformats.org/drawingml/2006/main" xmlns:p="http://schemas.openxmlformats.org/presentationml/2006/main" xmlns:r="http://schemas.openxmlformats.org/officeDocument/2006/relationships">
+  <p:cSld>
+    <p:spTree>
+      <p:nvGrpSpPr>
+        <p:cNvPr id="1" name=""/>
+        <p:cNvGrpSpPr/>
+        <p:nvPr/>
+      </p:nvGrpSpPr>
+      <p:grpSpPr/>
+      <p:sp>
+        <p:nvSpPr>
+          <p:cNvPr id="2" name="TextBox 1"/>
+          <p:cNvSpPr txBox="1"/>
+          <p:nvPr/>
+        </p:nvSpPr>
+        <p:spPr>
+          <a:xfrm>
+            <a:off x="182880" y="91440"/>
+            <a:ext cx="1828800" cy="274320"/>
+          </a:xfrm>
+          <a:prstGeom prst="rect">
+            <a:avLst/>
+          </a:prstGeom>
+          <a:noFill/>
+        </p:spPr>
+        <p:txBody>
+          <a:bodyPr wrap="square" anchor="t" lIns="0" rIns="0" tIns="0" bIns="0">
+            <a:spAutoFit/>
+          </a:bodyPr>
+          <a:lstStyle/>
+          <a:p>
+            <a:pPr algn="l">
+              <a:lnSpc>
+                <a:spcPct val="105000"/>
+              </a:lnSpc>
+              <a:spcBef>
+                <a:spcPts val="0"/>
+              </a:spcBef>
+              <a:spcAft>
+                <a:spcPts val="200"/>
+              </a:spcAft>
+            </a:pPr>
+            <a:r>
+              <a:rPr sz="900" b="1" i="0">
+                <a:solidFill>
+                  <a:srgbClr val="2E6FD6"/>
+                </a:solidFill>
+                <a:latin typeface="Montserrat"/>
+              </a:rPr>
+              <a:t>DRAFT</a:t>
+            </a:r>
+          </a:p>
+        </p:txBody>
+      </p:sp>
+      <p:sp>
+        <p:nvSpPr>
+          <p:cNvPr id="3" name="TextBox 2"/>
+          <p:cNvSpPr txBox="1"/>
+          <p:nvPr/>
+        </p:nvSpPr>
+        <p:spPr>
+          <a:xfrm>
+            <a:off x="6065215" y="109728"/>
+            <a:ext cx="5943600" cy="274320"/>
+          </a:xfrm>
+          <a:prstGeom prst="rect">
+            <a:avLst/>
+          </a:prstGeom>
+          <a:noFill/>
+        </p:spPr>
+        <p:txBody>
+          <a:bodyPr wrap="square" anchor="t" lIns="0" rIns="0" tIns="0" bIns="0">
+            <a:spAutoFit/>
+          </a:bodyPr>
+          <a:lstStyle/>
+          <a:p>
+            <a:pPr algn="r">
+              <a:lnSpc>
+                <a:spcPct val="105000"/>
+              </a:lnSpc>
+              <a:spcBef>
+                <a:spcPts val="0"/>
+              </a:spcBef>
+              <a:spcAft>
+                <a:spcPts val="200"/>
+              </a:spcAft>
+            </a:pPr>
+            <a:r>
+              <a:rPr sz="1050" b="1" i="0">
+                <a:solidFill>
+                  <a:srgbClr val="03045E"/>
+                </a:solidFill>
+                <a:latin typeface="Montserrat"/>
+              </a:rPr>
+              <a:t>Appendix:  </a:t>
+            </a:r>
+            <a:r>
+              <a:rPr sz="1050" b="0" i="1">
+                <a:solidFill>
+                  <a:srgbClr val="03045E"/>
+                </a:solidFill>
+                <a:latin typeface="Montserrat"/>
+              </a:rPr>
+              <a:t>Sources &amp; confidence</a:t>
+            </a:r>
+          </a:p>
+        </p:txBody>
+      </p:sp>
+      <p:sp>
+        <p:nvSpPr>
+          <p:cNvPr id="4" name="TextBox 3"/>
+          <p:cNvSpPr txBox="1"/>
+          <p:nvPr/>
+        </p:nvSpPr>
+        <p:spPr>
+          <a:xfrm>
+            <a:off x="1417320" y="6528816"/>
+            <a:ext cx="8229600" cy="256032"/>
+          </a:xfrm>
+          <a:prstGeom prst="rect">
+            <a:avLst/>
+          </a:prstGeom>
+          <a:noFill/>
+        </p:spPr>
+        <p:txBody>
+          <a:bodyPr wrap="square" anchor="t" lIns="0" rIns="0" tIns="0" bIns="0">
+            <a:spAutoFit/>
+          </a:bodyPr>
+          <a:lstStyle/>
+          <a:p>
+            <a:pPr algn="l">
+              <a:lnSpc>
+                <a:spcPct val="105000"/>
+              </a:lnSpc>
+              <a:spcBef>
+                <a:spcPts val="0"/>
+              </a:spcBef>
+              <a:spcAft>
+                <a:spcPts val="200"/>
+              </a:spcAft>
+            </a:pPr>
+            <a:r>
+              <a:rPr sz="800" b="0" i="0">
+                <a:solidFill>
+                  <a:srgbClr val="8A8A8A"/>
+                </a:solidFill>
+                <a:latin typeface="Montserrat Medium"/>
+              </a:rPr>
+              <a:t>Source: Confidence: 5 primary · 4 credible secondary · 3 triangulated (news cap) · 2 weak · 1 estimate</a:t>
+            </a:r>
+          </a:p>
+        </p:txBody>
+      </p:sp>
+      <p:sp>
+        <p:nvSpPr>
+          <p:cNvPr id="5" name="TextBox 4"/>
+          <p:cNvSpPr txBox="1"/>
+          <p:nvPr/>
+        </p:nvSpPr>
+        <p:spPr>
+          <a:xfrm>
+            <a:off x="11368735" y="6510528"/>
+            <a:ext cx="548640" cy="256032"/>
+          </a:xfrm>
+          <a:prstGeom prst="rect">
+            <a:avLst/>
+          </a:prstGeom>
+          <a:noFill/>
+        </p:spPr>
+        <p:txBody>
+          <a:bodyPr wrap="square" anchor="t" lIns="0" rIns="0" tIns="0" bIns="0">
+            <a:spAutoFit/>
+          </a:bodyPr>
+          <a:lstStyle/>
+          <a:p>
+            <a:pPr algn="r">
+              <a:lnSpc>
+                <a:spcPct val="105000"/>
+              </a:lnSpc>
+              <a:spcBef>
+                <a:spcPts val="0"/>
+              </a:spcBef>
+              <a:spcAft>
+                <a:spcPts val="200"/>
+              </a:spcAft>
+            </a:pPr>
+            <a:r>
+              <a:rPr sz="900" b="0" i="0">
+                <a:solidFill>
+                  <a:srgbClr val="8A8A8A"/>
+                </a:solidFill>
+                <a:latin typeface="Montserrat Medium"/>
+              </a:rPr>
+              <a:t>12</a:t>
             </a:r>
           </a:p>
         </p:txBody>
@@ -10029,7 +13072,7 @@
                 </a:solidFill>
                 <a:latin typeface="Montserrat"/>
               </a:rPr>
-              <a:t>DCF valuation</a:t>
+              <a:t>Cost of capital (WACC)</a:t>
             </a:r>
           </a:p>
         </p:txBody>
@@ -10074,7 +13117,7 @@
                 </a:solidFill>
                 <a:latin typeface="Montserrat Medium"/>
               </a:rPr>
-              <a:t>Source: aqmen DCF</a:t>
+              <a:t>Source: aqmen, market data</a:t>
             </a:r>
           </a:p>
         </p:txBody>
@@ -10164,7 +13207,7 @@
                 </a:solidFill>
                 <a:latin typeface="Montserrat"/>
               </a:rPr>
-              <a:t>Enterprise value of ~$[XX]–[XX]m on the base case</a:t>
+              <a:t>WACC is built bottom-up from CAPM and the target capital structure</a:t>
             </a:r>
           </a:p>
         </p:txBody>
@@ -10177,8 +13220,8 @@
         </p:nvSpPr>
         <p:spPr>
           <a:xfrm>
-            <a:off x="502920" y="1691640"/>
-            <a:ext cx="7269480" cy="320040"/>
+            <a:off x="502920" y="1645920"/>
+            <a:ext cx="11185855" cy="320040"/>
           </a:xfrm>
           <a:prstGeom prst="rect">
             <a:avLst/>
@@ -10209,76 +13252,246 @@
                 </a:solidFill>
                 <a:latin typeface="Montserrat"/>
               </a:rPr>
-              <a:t>DCF enterprise value, $m</a:t>
-            </a:r>
-          </a:p>
-        </p:txBody>
-      </p:sp>
-      <p:graphicFrame>
-        <p:nvGraphicFramePr>
-          <p:cNvPr id="8" name="Chart 7"/>
-          <p:cNvGraphicFramePr>
-            <a:graphicFrameLocks noGrp="1"/>
-          </p:cNvGraphicFramePr>
-          <p:nvPr/>
-        </p:nvGraphicFramePr>
-        <p:xfrm>
-          <a:off x="502920" y="2103120"/>
-          <a:ext cx="7269480" cy="4251960"/>
-        </p:xfrm>
-        <a:graphic>
-          <a:graphicData uri="http://schemas.openxmlformats.org/drawingml/2006/chart">
-            <c:chart xmlns:c="http://schemas.openxmlformats.org/drawingml/2006/chart" r:id="rId2"/>
-          </a:graphicData>
-        </a:graphic>
-      </p:graphicFrame>
-      <p:cxnSp>
-        <p:nvCxnSpPr>
-          <p:cNvPr id="9" name="Connector 8"/>
-          <p:cNvCxnSpPr/>
-          <p:nvPr/>
-        </p:nvCxnSpPr>
-        <p:spPr>
-          <a:xfrm>
-            <a:off x="8001000" y="1463040"/>
-            <a:ext cx="0" cy="4892040"/>
-          </a:xfrm>
-          <a:prstGeom prst="bentConnector3">
-            <a:avLst/>
-          </a:prstGeom>
-          <a:ln w="12700">
-            <a:solidFill>
-              <a:srgbClr val="C9CBD6"/>
-            </a:solidFill>
+              <a:t>WACC — expression &amp; drivers</a:t>
+            </a:r>
+          </a:p>
+        </p:txBody>
+      </p:sp>
+      <p:sp>
+        <p:nvSpPr>
+          <p:cNvPr id="8" name="TextBox 7"/>
+          <p:cNvSpPr txBox="1"/>
+          <p:nvPr/>
+        </p:nvSpPr>
+        <p:spPr>
+          <a:xfrm>
+            <a:off x="5790895" y="1673352"/>
+            <a:ext cx="1234440" cy="228600"/>
+          </a:xfrm>
+          <a:prstGeom prst="rect">
+            <a:avLst/>
+          </a:prstGeom>
+          <a:noFill/>
+        </p:spPr>
+        <p:txBody>
+          <a:bodyPr wrap="square" anchor="ctr" lIns="0" rIns="0" tIns="0" bIns="0">
+            <a:spAutoFit/>
+          </a:bodyPr>
+          <a:lstStyle/>
+          <a:p>
+            <a:pPr algn="r">
+              <a:lnSpc>
+                <a:spcPct val="105000"/>
+              </a:lnSpc>
+              <a:spcBef>
+                <a:spcPts val="0"/>
+              </a:spcBef>
+              <a:spcAft>
+                <a:spcPts val="200"/>
+              </a:spcAft>
+            </a:pPr>
+            <a:r>
+              <a:rPr sz="950" b="1" i="0">
+                <a:solidFill>
+                  <a:srgbClr val="03045E"/>
+                </a:solidFill>
+                <a:latin typeface="Montserrat"/>
+              </a:rPr>
+              <a:t>Certainty:</a:t>
+            </a:r>
+          </a:p>
+        </p:txBody>
+      </p:sp>
+      <p:sp>
+        <p:nvSpPr>
+          <p:cNvPr id="9" name="Oval 8"/>
+          <p:cNvSpPr/>
+          <p:nvPr/>
+        </p:nvSpPr>
+        <p:spPr>
+          <a:xfrm>
+            <a:off x="7071055" y="1709928"/>
+            <a:ext cx="118872" cy="118872"/>
+          </a:xfrm>
+          <a:prstGeom prst="ellipse">
+            <a:avLst/>
+          </a:prstGeom>
+          <a:solidFill>
+            <a:srgbClr val="9B1C1C"/>
+          </a:solidFill>
+          <a:ln>
+            <a:noFill/>
           </a:ln>
+          <a:effectLst/>
         </p:spPr>
         <p:style>
-          <a:lnRef idx="2">
+          <a:lnRef idx="1">
             <a:schemeClr val="accent1"/>
           </a:lnRef>
-          <a:fillRef idx="0">
+          <a:fillRef idx="3">
             <a:schemeClr val="accent1"/>
           </a:fillRef>
-          <a:effectRef idx="1">
+          <a:effectRef idx="2">
             <a:schemeClr val="accent1"/>
           </a:effectRef>
           <a:fontRef idx="minor">
-            <a:schemeClr val="tx1"/>
+            <a:schemeClr val="lt1"/>
           </a:fontRef>
         </p:style>
-      </p:cxnSp>
-      <p:sp>
-        <p:nvSpPr>
-          <p:cNvPr id="10" name="Isosceles Triangle 9"/>
+        <p:txBody>
+          <a:bodyPr rtlCol="0" anchor="ctr"/>
+          <a:lstStyle/>
+          <a:p>
+            <a:pPr algn="ctr"/>
+          </a:p>
+        </p:txBody>
+      </p:sp>
+      <p:sp>
+        <p:nvSpPr>
+          <p:cNvPr id="10" name="TextBox 9"/>
+          <p:cNvSpPr txBox="1"/>
+          <p:nvPr/>
+        </p:nvSpPr>
+        <p:spPr>
+          <a:xfrm>
+            <a:off x="7235647" y="1673352"/>
+            <a:ext cx="777240" cy="228600"/>
+          </a:xfrm>
+          <a:prstGeom prst="rect">
+            <a:avLst/>
+          </a:prstGeom>
+          <a:noFill/>
+        </p:spPr>
+        <p:txBody>
+          <a:bodyPr wrap="square" anchor="ctr" lIns="0" rIns="0" tIns="0" bIns="0">
+            <a:spAutoFit/>
+          </a:bodyPr>
+          <a:lstStyle/>
+          <a:p>
+            <a:pPr algn="l">
+              <a:lnSpc>
+                <a:spcPct val="105000"/>
+              </a:lnSpc>
+              <a:spcBef>
+                <a:spcPts val="0"/>
+              </a:spcBef>
+              <a:spcAft>
+                <a:spcPts val="200"/>
+              </a:spcAft>
+            </a:pPr>
+            <a:r>
+              <a:rPr sz="950" b="0" i="0">
+                <a:solidFill>
+                  <a:srgbClr val="302E2E"/>
+                </a:solidFill>
+                <a:latin typeface="Montserrat Medium"/>
+              </a:rPr>
+              <a:t>Low</a:t>
+            </a:r>
+          </a:p>
+        </p:txBody>
+      </p:sp>
+      <p:sp>
+        <p:nvSpPr>
+          <p:cNvPr id="11" name="Oval 10"/>
           <p:cNvSpPr/>
           <p:nvPr/>
         </p:nvSpPr>
         <p:spPr>
-          <a:xfrm rot="5400000">
-            <a:off x="8275320" y="1490472"/>
-            <a:ext cx="201168" cy="201168"/>
-          </a:xfrm>
-          <a:prstGeom prst="triangle">
+          <a:xfrm>
+            <a:off x="8122615" y="1709928"/>
+            <a:ext cx="118872" cy="118872"/>
+          </a:xfrm>
+          <a:prstGeom prst="ellipse">
+            <a:avLst/>
+          </a:prstGeom>
+          <a:solidFill>
+            <a:srgbClr val="B7791F"/>
+          </a:solidFill>
+          <a:ln>
+            <a:noFill/>
+          </a:ln>
+          <a:effectLst/>
+        </p:spPr>
+        <p:style>
+          <a:lnRef idx="1">
+            <a:schemeClr val="accent1"/>
+          </a:lnRef>
+          <a:fillRef idx="3">
+            <a:schemeClr val="accent1"/>
+          </a:fillRef>
+          <a:effectRef idx="2">
+            <a:schemeClr val="accent1"/>
+          </a:effectRef>
+          <a:fontRef idx="minor">
+            <a:schemeClr val="lt1"/>
+          </a:fontRef>
+        </p:style>
+        <p:txBody>
+          <a:bodyPr rtlCol="0" anchor="ctr"/>
+          <a:lstStyle/>
+          <a:p>
+            <a:pPr algn="ctr"/>
+          </a:p>
+        </p:txBody>
+      </p:sp>
+      <p:sp>
+        <p:nvSpPr>
+          <p:cNvPr id="12" name="TextBox 11"/>
+          <p:cNvSpPr txBox="1"/>
+          <p:nvPr/>
+        </p:nvSpPr>
+        <p:spPr>
+          <a:xfrm>
+            <a:off x="8287207" y="1673352"/>
+            <a:ext cx="777240" cy="228600"/>
+          </a:xfrm>
+          <a:prstGeom prst="rect">
+            <a:avLst/>
+          </a:prstGeom>
+          <a:noFill/>
+        </p:spPr>
+        <p:txBody>
+          <a:bodyPr wrap="square" anchor="ctr" lIns="0" rIns="0" tIns="0" bIns="0">
+            <a:spAutoFit/>
+          </a:bodyPr>
+          <a:lstStyle/>
+          <a:p>
+            <a:pPr algn="l">
+              <a:lnSpc>
+                <a:spcPct val="105000"/>
+              </a:lnSpc>
+              <a:spcBef>
+                <a:spcPts val="0"/>
+              </a:spcBef>
+              <a:spcAft>
+                <a:spcPts val="200"/>
+              </a:spcAft>
+            </a:pPr>
+            <a:r>
+              <a:rPr sz="950" b="0" i="0">
+                <a:solidFill>
+                  <a:srgbClr val="302E2E"/>
+                </a:solidFill>
+                <a:latin typeface="Montserrat Medium"/>
+              </a:rPr>
+              <a:t>Medium</a:t>
+            </a:r>
+          </a:p>
+        </p:txBody>
+      </p:sp>
+      <p:sp>
+        <p:nvSpPr>
+          <p:cNvPr id="13" name="Oval 12"/>
+          <p:cNvSpPr/>
+          <p:nvPr/>
+        </p:nvSpPr>
+        <p:spPr>
+          <a:xfrm>
+            <a:off x="9174175" y="1709928"/>
+            <a:ext cx="118872" cy="118872"/>
+          </a:xfrm>
+          <a:prstGeom prst="ellipse">
             <a:avLst/>
           </a:prstGeom>
           <a:solidFill>
@@ -10313,14 +13526,59 @@
       </p:sp>
       <p:sp>
         <p:nvSpPr>
-          <p:cNvPr id="11" name="TextBox 10"/>
-          <p:cNvSpPr txBox="1"/>
-          <p:nvPr/>
-        </p:nvSpPr>
-        <p:spPr>
-          <a:xfrm>
-            <a:off x="8567928" y="1472184"/>
-            <a:ext cx="3136392" cy="274320"/>
+          <p:cNvPr id="14" name="TextBox 13"/>
+          <p:cNvSpPr txBox="1"/>
+          <p:nvPr/>
+        </p:nvSpPr>
+        <p:spPr>
+          <a:xfrm>
+            <a:off x="9338767" y="1673352"/>
+            <a:ext cx="777240" cy="228600"/>
+          </a:xfrm>
+          <a:prstGeom prst="rect">
+            <a:avLst/>
+          </a:prstGeom>
+          <a:noFill/>
+        </p:spPr>
+        <p:txBody>
+          <a:bodyPr wrap="square" anchor="ctr" lIns="0" rIns="0" tIns="0" bIns="0">
+            <a:spAutoFit/>
+          </a:bodyPr>
+          <a:lstStyle/>
+          <a:p>
+            <a:pPr algn="l">
+              <a:lnSpc>
+                <a:spcPct val="105000"/>
+              </a:lnSpc>
+              <a:spcBef>
+                <a:spcPts val="0"/>
+              </a:spcBef>
+              <a:spcAft>
+                <a:spcPts val="200"/>
+              </a:spcAft>
+            </a:pPr>
+            <a:r>
+              <a:rPr sz="950" b="0" i="0">
+                <a:solidFill>
+                  <a:srgbClr val="302E2E"/>
+                </a:solidFill>
+                <a:latin typeface="Montserrat Medium"/>
+              </a:rPr>
+              <a:t>High</a:t>
+            </a:r>
+          </a:p>
+        </p:txBody>
+      </p:sp>
+      <p:sp>
+        <p:nvSpPr>
+          <p:cNvPr id="15" name="TextBox 14"/>
+          <p:cNvSpPr txBox="1"/>
+          <p:nvPr/>
+        </p:nvSpPr>
+        <p:spPr>
+          <a:xfrm>
+            <a:off x="502920" y="1901952"/>
+            <a:ext cx="3423818" cy="320040"/>
           </a:xfrm>
           <a:prstGeom prst="rect">
             <a:avLst/>
@@ -10333,6 +13591,2844 @@
           </a:bodyPr>
           <a:lstStyle/>
           <a:p>
+            <a:pPr algn="ctr">
+              <a:lnSpc>
+                <a:spcPct val="105000"/>
+              </a:lnSpc>
+              <a:spcBef>
+                <a:spcPts val="0"/>
+              </a:spcBef>
+              <a:spcAft>
+                <a:spcPts val="200"/>
+              </a:spcAft>
+            </a:pPr>
+            <a:r>
+              <a:rPr sz="1050" b="1" i="1">
+                <a:solidFill>
+                  <a:srgbClr val="03045E"/>
+                </a:solidFill>
+                <a:latin typeface="Montserrat"/>
+              </a:rPr>
+              <a:t>Discount rate</a:t>
+            </a:r>
+          </a:p>
+        </p:txBody>
+      </p:sp>
+      <p:sp>
+        <p:nvSpPr>
+          <p:cNvPr id="16" name="Rounded Rectangle 15"/>
+          <p:cNvSpPr/>
+          <p:nvPr/>
+        </p:nvSpPr>
+        <p:spPr>
+          <a:xfrm>
+            <a:off x="502920" y="3817620"/>
+            <a:ext cx="3423818" cy="868680"/>
+          </a:xfrm>
+          <a:prstGeom prst="roundRect">
+            <a:avLst>
+              <a:gd name="adj" fmla="val 8000"/>
+            </a:avLst>
+          </a:prstGeom>
+          <a:solidFill>
+            <a:srgbClr val="D6EEF5"/>
+          </a:solidFill>
+          <a:ln w="9525">
+            <a:solidFill>
+              <a:srgbClr val="2E6FD6"/>
+            </a:solidFill>
+          </a:ln>
+          <a:effectLst/>
+        </p:spPr>
+        <p:style>
+          <a:lnRef idx="1">
+            <a:schemeClr val="accent1"/>
+          </a:lnRef>
+          <a:fillRef idx="3">
+            <a:schemeClr val="accent1"/>
+          </a:fillRef>
+          <a:effectRef idx="2">
+            <a:schemeClr val="accent1"/>
+          </a:effectRef>
+          <a:fontRef idx="minor">
+            <a:schemeClr val="lt1"/>
+          </a:fontRef>
+        </p:style>
+        <p:txBody>
+          <a:bodyPr rtlCol="0" anchor="ctr"/>
+          <a:lstStyle/>
+          <a:p>
+            <a:pPr algn="ctr"/>
+          </a:p>
+        </p:txBody>
+      </p:sp>
+      <p:sp>
+        <p:nvSpPr>
+          <p:cNvPr id="17" name="TextBox 16"/>
+          <p:cNvSpPr txBox="1"/>
+          <p:nvPr/>
+        </p:nvSpPr>
+        <p:spPr>
+          <a:xfrm>
+            <a:off x="557784" y="3817620"/>
+            <a:ext cx="3314090" cy="411480"/>
+          </a:xfrm>
+          <a:prstGeom prst="rect">
+            <a:avLst/>
+          </a:prstGeom>
+          <a:noFill/>
+        </p:spPr>
+        <p:txBody>
+          <a:bodyPr wrap="square" anchor="ctr" lIns="0" rIns="0" tIns="0" bIns="0">
+            <a:spAutoFit/>
+          </a:bodyPr>
+          <a:lstStyle/>
+          <a:p>
+            <a:pPr algn="ctr">
+              <a:lnSpc>
+                <a:spcPct val="100000"/>
+              </a:lnSpc>
+              <a:spcBef>
+                <a:spcPts val="0"/>
+              </a:spcBef>
+              <a:spcAft>
+                <a:spcPts val="200"/>
+              </a:spcAft>
+            </a:pPr>
+            <a:r>
+              <a:rPr sz="950" b="1" i="0">
+                <a:solidFill>
+                  <a:srgbClr val="03045E"/>
+                </a:solidFill>
+                <a:latin typeface="Montserrat"/>
+              </a:rPr>
+              <a:t>WACC</a:t>
+            </a:r>
+          </a:p>
+        </p:txBody>
+      </p:sp>
+      <p:sp>
+        <p:nvSpPr>
+          <p:cNvPr id="18" name="TextBox 17"/>
+          <p:cNvSpPr txBox="1"/>
+          <p:nvPr/>
+        </p:nvSpPr>
+        <p:spPr>
+          <a:xfrm>
+            <a:off x="557784" y="4229100"/>
+            <a:ext cx="3314090" cy="182880"/>
+          </a:xfrm>
+          <a:prstGeom prst="rect">
+            <a:avLst/>
+          </a:prstGeom>
+          <a:noFill/>
+        </p:spPr>
+        <p:txBody>
+          <a:bodyPr wrap="square" anchor="ctr" lIns="0" rIns="0" tIns="0" bIns="0">
+            <a:spAutoFit/>
+          </a:bodyPr>
+          <a:lstStyle/>
+          <a:p>
+            <a:pPr algn="ctr">
+              <a:lnSpc>
+                <a:spcPct val="105000"/>
+              </a:lnSpc>
+              <a:spcBef>
+                <a:spcPts val="0"/>
+              </a:spcBef>
+              <a:spcAft>
+                <a:spcPts val="200"/>
+              </a:spcAft>
+            </a:pPr>
+            <a:r>
+              <a:rPr sz="750" b="0" i="1">
+                <a:solidFill>
+                  <a:srgbClr val="0728A3"/>
+                </a:solidFill>
+                <a:latin typeface="Montserrat Medium"/>
+              </a:rPr>
+              <a:t>= wE·Ke + wD·Kd·(1−t)</a:t>
+            </a:r>
+          </a:p>
+        </p:txBody>
+      </p:sp>
+      <p:sp>
+        <p:nvSpPr>
+          <p:cNvPr id="19" name="Rounded Rectangle 18"/>
+          <p:cNvSpPr/>
+          <p:nvPr/>
+        </p:nvSpPr>
+        <p:spPr>
+          <a:xfrm>
+            <a:off x="557784" y="4393692"/>
+            <a:ext cx="3314090" cy="274320"/>
+          </a:xfrm>
+          <a:prstGeom prst="roundRect">
+            <a:avLst>
+              <a:gd name="adj" fmla="val 12000"/>
+            </a:avLst>
+          </a:prstGeom>
+          <a:solidFill>
+            <a:srgbClr val="020462"/>
+          </a:solidFill>
+          <a:ln>
+            <a:noFill/>
+          </a:ln>
+          <a:effectLst/>
+        </p:spPr>
+        <p:style>
+          <a:lnRef idx="1">
+            <a:schemeClr val="accent1"/>
+          </a:lnRef>
+          <a:fillRef idx="3">
+            <a:schemeClr val="accent1"/>
+          </a:fillRef>
+          <a:effectRef idx="2">
+            <a:schemeClr val="accent1"/>
+          </a:effectRef>
+          <a:fontRef idx="minor">
+            <a:schemeClr val="lt1"/>
+          </a:fontRef>
+        </p:style>
+        <p:txBody>
+          <a:bodyPr rtlCol="0" anchor="ctr"/>
+          <a:lstStyle/>
+          <a:p>
+            <a:pPr algn="ctr"/>
+          </a:p>
+        </p:txBody>
+      </p:sp>
+      <p:sp>
+        <p:nvSpPr>
+          <p:cNvPr id="20" name="TextBox 19"/>
+          <p:cNvSpPr txBox="1"/>
+          <p:nvPr/>
+        </p:nvSpPr>
+        <p:spPr>
+          <a:xfrm>
+            <a:off x="557784" y="4393692"/>
+            <a:ext cx="3314090" cy="274320"/>
+          </a:xfrm>
+          <a:prstGeom prst="rect">
+            <a:avLst/>
+          </a:prstGeom>
+          <a:noFill/>
+        </p:spPr>
+        <p:txBody>
+          <a:bodyPr wrap="square" anchor="ctr" lIns="0" rIns="0" tIns="0" bIns="0">
+            <a:spAutoFit/>
+          </a:bodyPr>
+          <a:lstStyle/>
+          <a:p>
+            <a:pPr algn="ctr">
+              <a:lnSpc>
+                <a:spcPct val="105000"/>
+              </a:lnSpc>
+              <a:spcBef>
+                <a:spcPts val="0"/>
+              </a:spcBef>
+              <a:spcAft>
+                <a:spcPts val="200"/>
+              </a:spcAft>
+            </a:pPr>
+            <a:r>
+              <a:rPr sz="900" b="1" i="0">
+                <a:solidFill>
+                  <a:srgbClr val="FEFFFF"/>
+                </a:solidFill>
+                <a:latin typeface="Montserrat Medium"/>
+              </a:rPr>
+              <a:t>%</a:t>
+            </a:r>
+          </a:p>
+        </p:txBody>
+      </p:sp>
+      <p:sp>
+        <p:nvSpPr>
+          <p:cNvPr id="21" name="Oval 20"/>
+          <p:cNvSpPr/>
+          <p:nvPr/>
+        </p:nvSpPr>
+        <p:spPr>
+          <a:xfrm>
+            <a:off x="3771290" y="3863340"/>
+            <a:ext cx="109728" cy="109728"/>
+          </a:xfrm>
+          <a:prstGeom prst="ellipse">
+            <a:avLst/>
+          </a:prstGeom>
+          <a:solidFill>
+            <a:srgbClr val="B7791F"/>
+          </a:solidFill>
+          <a:ln w="9525">
+            <a:solidFill>
+              <a:srgbClr val="FEFFFF"/>
+            </a:solidFill>
+          </a:ln>
+          <a:effectLst/>
+        </p:spPr>
+        <p:style>
+          <a:lnRef idx="1">
+            <a:schemeClr val="accent1"/>
+          </a:lnRef>
+          <a:fillRef idx="3">
+            <a:schemeClr val="accent1"/>
+          </a:fillRef>
+          <a:effectRef idx="2">
+            <a:schemeClr val="accent1"/>
+          </a:effectRef>
+          <a:fontRef idx="minor">
+            <a:schemeClr val="lt1"/>
+          </a:fontRef>
+        </p:style>
+        <p:txBody>
+          <a:bodyPr rtlCol="0" anchor="ctr"/>
+          <a:lstStyle/>
+          <a:p>
+            <a:pPr algn="ctr"/>
+          </a:p>
+        </p:txBody>
+      </p:sp>
+      <p:sp>
+        <p:nvSpPr>
+          <p:cNvPr id="22" name="TextBox 21"/>
+          <p:cNvSpPr txBox="1"/>
+          <p:nvPr/>
+        </p:nvSpPr>
+        <p:spPr>
+          <a:xfrm>
+            <a:off x="4383938" y="1901952"/>
+            <a:ext cx="3423818" cy="320040"/>
+          </a:xfrm>
+          <a:prstGeom prst="rect">
+            <a:avLst/>
+          </a:prstGeom>
+          <a:noFill/>
+        </p:spPr>
+        <p:txBody>
+          <a:bodyPr wrap="square" anchor="t" lIns="0" rIns="0" tIns="0" bIns="0">
+            <a:spAutoFit/>
+          </a:bodyPr>
+          <a:lstStyle/>
+          <a:p>
+            <a:pPr algn="ctr">
+              <a:lnSpc>
+                <a:spcPct val="105000"/>
+              </a:lnSpc>
+              <a:spcBef>
+                <a:spcPts val="0"/>
+              </a:spcBef>
+              <a:spcAft>
+                <a:spcPts val="200"/>
+              </a:spcAft>
+            </a:pPr>
+            <a:r>
+              <a:rPr sz="1050" b="1" i="1">
+                <a:solidFill>
+                  <a:srgbClr val="03045E"/>
+                </a:solidFill>
+                <a:latin typeface="Montserrat"/>
+              </a:rPr>
+              <a:t>Components</a:t>
+            </a:r>
+          </a:p>
+        </p:txBody>
+      </p:sp>
+      <p:sp>
+        <p:nvSpPr>
+          <p:cNvPr id="23" name="Rounded Rectangle 22"/>
+          <p:cNvSpPr/>
+          <p:nvPr/>
+        </p:nvSpPr>
+        <p:spPr>
+          <a:xfrm>
+            <a:off x="4383938" y="3300984"/>
+            <a:ext cx="3423818" cy="868680"/>
+          </a:xfrm>
+          <a:prstGeom prst="roundRect">
+            <a:avLst>
+              <a:gd name="adj" fmla="val 8000"/>
+            </a:avLst>
+          </a:prstGeom>
+          <a:solidFill>
+            <a:srgbClr val="D6EEF5"/>
+          </a:solidFill>
+          <a:ln w="9525">
+            <a:solidFill>
+              <a:srgbClr val="2E6FD6"/>
+            </a:solidFill>
+          </a:ln>
+          <a:effectLst/>
+        </p:spPr>
+        <p:style>
+          <a:lnRef idx="1">
+            <a:schemeClr val="accent1"/>
+          </a:lnRef>
+          <a:fillRef idx="3">
+            <a:schemeClr val="accent1"/>
+          </a:fillRef>
+          <a:effectRef idx="2">
+            <a:schemeClr val="accent1"/>
+          </a:effectRef>
+          <a:fontRef idx="minor">
+            <a:schemeClr val="lt1"/>
+          </a:fontRef>
+        </p:style>
+        <p:txBody>
+          <a:bodyPr rtlCol="0" anchor="ctr"/>
+          <a:lstStyle/>
+          <a:p>
+            <a:pPr algn="ctr"/>
+          </a:p>
+        </p:txBody>
+      </p:sp>
+      <p:sp>
+        <p:nvSpPr>
+          <p:cNvPr id="24" name="TextBox 23"/>
+          <p:cNvSpPr txBox="1"/>
+          <p:nvPr/>
+        </p:nvSpPr>
+        <p:spPr>
+          <a:xfrm>
+            <a:off x="4438802" y="3300984"/>
+            <a:ext cx="3314090" cy="411480"/>
+          </a:xfrm>
+          <a:prstGeom prst="rect">
+            <a:avLst/>
+          </a:prstGeom>
+          <a:noFill/>
+        </p:spPr>
+        <p:txBody>
+          <a:bodyPr wrap="square" anchor="ctr" lIns="0" rIns="0" tIns="0" bIns="0">
+            <a:spAutoFit/>
+          </a:bodyPr>
+          <a:lstStyle/>
+          <a:p>
+            <a:pPr algn="ctr">
+              <a:lnSpc>
+                <a:spcPct val="100000"/>
+              </a:lnSpc>
+              <a:spcBef>
+                <a:spcPts val="0"/>
+              </a:spcBef>
+              <a:spcAft>
+                <a:spcPts val="200"/>
+              </a:spcAft>
+            </a:pPr>
+            <a:r>
+              <a:rPr sz="950" b="1" i="0">
+                <a:solidFill>
+                  <a:srgbClr val="03045E"/>
+                </a:solidFill>
+                <a:latin typeface="Montserrat"/>
+              </a:rPr>
+              <a:t>Cost of equity (Ke)</a:t>
+            </a:r>
+          </a:p>
+        </p:txBody>
+      </p:sp>
+      <p:sp>
+        <p:nvSpPr>
+          <p:cNvPr id="25" name="TextBox 24"/>
+          <p:cNvSpPr txBox="1"/>
+          <p:nvPr/>
+        </p:nvSpPr>
+        <p:spPr>
+          <a:xfrm>
+            <a:off x="4438802" y="3712464"/>
+            <a:ext cx="3314090" cy="182880"/>
+          </a:xfrm>
+          <a:prstGeom prst="rect">
+            <a:avLst/>
+          </a:prstGeom>
+          <a:noFill/>
+        </p:spPr>
+        <p:txBody>
+          <a:bodyPr wrap="square" anchor="ctr" lIns="0" rIns="0" tIns="0" bIns="0">
+            <a:spAutoFit/>
+          </a:bodyPr>
+          <a:lstStyle/>
+          <a:p>
+            <a:pPr algn="ctr">
+              <a:lnSpc>
+                <a:spcPct val="105000"/>
+              </a:lnSpc>
+              <a:spcBef>
+                <a:spcPts val="0"/>
+              </a:spcBef>
+              <a:spcAft>
+                <a:spcPts val="200"/>
+              </a:spcAft>
+            </a:pPr>
+            <a:r>
+              <a:rPr sz="750" b="0" i="1">
+                <a:solidFill>
+                  <a:srgbClr val="0728A3"/>
+                </a:solidFill>
+                <a:latin typeface="Montserrat Medium"/>
+              </a:rPr>
+              <a:t>= Rf + β × ERP</a:t>
+            </a:r>
+          </a:p>
+        </p:txBody>
+      </p:sp>
+      <p:sp>
+        <p:nvSpPr>
+          <p:cNvPr id="26" name="Rounded Rectangle 25"/>
+          <p:cNvSpPr/>
+          <p:nvPr/>
+        </p:nvSpPr>
+        <p:spPr>
+          <a:xfrm>
+            <a:off x="4438802" y="3877056"/>
+            <a:ext cx="3314090" cy="274320"/>
+          </a:xfrm>
+          <a:prstGeom prst="roundRect">
+            <a:avLst>
+              <a:gd name="adj" fmla="val 12000"/>
+            </a:avLst>
+          </a:prstGeom>
+          <a:solidFill>
+            <a:srgbClr val="020462"/>
+          </a:solidFill>
+          <a:ln>
+            <a:noFill/>
+          </a:ln>
+          <a:effectLst/>
+        </p:spPr>
+        <p:style>
+          <a:lnRef idx="1">
+            <a:schemeClr val="accent1"/>
+          </a:lnRef>
+          <a:fillRef idx="3">
+            <a:schemeClr val="accent1"/>
+          </a:fillRef>
+          <a:effectRef idx="2">
+            <a:schemeClr val="accent1"/>
+          </a:effectRef>
+          <a:fontRef idx="minor">
+            <a:schemeClr val="lt1"/>
+          </a:fontRef>
+        </p:style>
+        <p:txBody>
+          <a:bodyPr rtlCol="0" anchor="ctr"/>
+          <a:lstStyle/>
+          <a:p>
+            <a:pPr algn="ctr"/>
+          </a:p>
+        </p:txBody>
+      </p:sp>
+      <p:sp>
+        <p:nvSpPr>
+          <p:cNvPr id="27" name="TextBox 26"/>
+          <p:cNvSpPr txBox="1"/>
+          <p:nvPr/>
+        </p:nvSpPr>
+        <p:spPr>
+          <a:xfrm>
+            <a:off x="4438802" y="3877056"/>
+            <a:ext cx="3314090" cy="274320"/>
+          </a:xfrm>
+          <a:prstGeom prst="rect">
+            <a:avLst/>
+          </a:prstGeom>
+          <a:noFill/>
+        </p:spPr>
+        <p:txBody>
+          <a:bodyPr wrap="square" anchor="ctr" lIns="0" rIns="0" tIns="0" bIns="0">
+            <a:spAutoFit/>
+          </a:bodyPr>
+          <a:lstStyle/>
+          <a:p>
+            <a:pPr algn="ctr">
+              <a:lnSpc>
+                <a:spcPct val="105000"/>
+              </a:lnSpc>
+              <a:spcBef>
+                <a:spcPts val="0"/>
+              </a:spcBef>
+              <a:spcAft>
+                <a:spcPts val="200"/>
+              </a:spcAft>
+            </a:pPr>
+            <a:r>
+              <a:rPr sz="900" b="1" i="0">
+                <a:solidFill>
+                  <a:srgbClr val="FEFFFF"/>
+                </a:solidFill>
+                <a:latin typeface="Montserrat Medium"/>
+              </a:rPr>
+              <a:t>%</a:t>
+            </a:r>
+          </a:p>
+        </p:txBody>
+      </p:sp>
+      <p:sp>
+        <p:nvSpPr>
+          <p:cNvPr id="28" name="Oval 27"/>
+          <p:cNvSpPr/>
+          <p:nvPr/>
+        </p:nvSpPr>
+        <p:spPr>
+          <a:xfrm>
+            <a:off x="7652308" y="3346704"/>
+            <a:ext cx="109728" cy="109728"/>
+          </a:xfrm>
+          <a:prstGeom prst="ellipse">
+            <a:avLst/>
+          </a:prstGeom>
+          <a:solidFill>
+            <a:srgbClr val="B7791F"/>
+          </a:solidFill>
+          <a:ln w="9525">
+            <a:solidFill>
+              <a:srgbClr val="FEFFFF"/>
+            </a:solidFill>
+          </a:ln>
+          <a:effectLst/>
+        </p:spPr>
+        <p:style>
+          <a:lnRef idx="1">
+            <a:schemeClr val="accent1"/>
+          </a:lnRef>
+          <a:fillRef idx="3">
+            <a:schemeClr val="accent1"/>
+          </a:fillRef>
+          <a:effectRef idx="2">
+            <a:schemeClr val="accent1"/>
+          </a:effectRef>
+          <a:fontRef idx="minor">
+            <a:schemeClr val="lt1"/>
+          </a:fontRef>
+        </p:style>
+        <p:txBody>
+          <a:bodyPr rtlCol="0" anchor="ctr"/>
+          <a:lstStyle/>
+          <a:p>
+            <a:pPr algn="ctr"/>
+          </a:p>
+        </p:txBody>
+      </p:sp>
+      <p:sp>
+        <p:nvSpPr>
+          <p:cNvPr id="29" name="Rounded Rectangle 28"/>
+          <p:cNvSpPr/>
+          <p:nvPr/>
+        </p:nvSpPr>
+        <p:spPr>
+          <a:xfrm>
+            <a:off x="4383938" y="4334256"/>
+            <a:ext cx="3423818" cy="868680"/>
+          </a:xfrm>
+          <a:prstGeom prst="roundRect">
+            <a:avLst>
+              <a:gd name="adj" fmla="val 8000"/>
+            </a:avLst>
+          </a:prstGeom>
+          <a:solidFill>
+            <a:srgbClr val="D6EEF5"/>
+          </a:solidFill>
+          <a:ln w="9525">
+            <a:solidFill>
+              <a:srgbClr val="2E6FD6"/>
+            </a:solidFill>
+          </a:ln>
+          <a:effectLst/>
+        </p:spPr>
+        <p:style>
+          <a:lnRef idx="1">
+            <a:schemeClr val="accent1"/>
+          </a:lnRef>
+          <a:fillRef idx="3">
+            <a:schemeClr val="accent1"/>
+          </a:fillRef>
+          <a:effectRef idx="2">
+            <a:schemeClr val="accent1"/>
+          </a:effectRef>
+          <a:fontRef idx="minor">
+            <a:schemeClr val="lt1"/>
+          </a:fontRef>
+        </p:style>
+        <p:txBody>
+          <a:bodyPr rtlCol="0" anchor="ctr"/>
+          <a:lstStyle/>
+          <a:p>
+            <a:pPr algn="ctr"/>
+          </a:p>
+        </p:txBody>
+      </p:sp>
+      <p:sp>
+        <p:nvSpPr>
+          <p:cNvPr id="30" name="TextBox 29"/>
+          <p:cNvSpPr txBox="1"/>
+          <p:nvPr/>
+        </p:nvSpPr>
+        <p:spPr>
+          <a:xfrm>
+            <a:off x="4438802" y="4334256"/>
+            <a:ext cx="3314090" cy="411480"/>
+          </a:xfrm>
+          <a:prstGeom prst="rect">
+            <a:avLst/>
+          </a:prstGeom>
+          <a:noFill/>
+        </p:spPr>
+        <p:txBody>
+          <a:bodyPr wrap="square" anchor="ctr" lIns="0" rIns="0" tIns="0" bIns="0">
+            <a:spAutoFit/>
+          </a:bodyPr>
+          <a:lstStyle/>
+          <a:p>
+            <a:pPr algn="ctr">
+              <a:lnSpc>
+                <a:spcPct val="100000"/>
+              </a:lnSpc>
+              <a:spcBef>
+                <a:spcPts val="0"/>
+              </a:spcBef>
+              <a:spcAft>
+                <a:spcPts val="200"/>
+              </a:spcAft>
+            </a:pPr>
+            <a:r>
+              <a:rPr sz="950" b="1" i="0">
+                <a:solidFill>
+                  <a:srgbClr val="03045E"/>
+                </a:solidFill>
+                <a:latin typeface="Montserrat"/>
+              </a:rPr>
+              <a:t>After-tax cost of debt</a:t>
+            </a:r>
+          </a:p>
+        </p:txBody>
+      </p:sp>
+      <p:sp>
+        <p:nvSpPr>
+          <p:cNvPr id="31" name="TextBox 30"/>
+          <p:cNvSpPr txBox="1"/>
+          <p:nvPr/>
+        </p:nvSpPr>
+        <p:spPr>
+          <a:xfrm>
+            <a:off x="4438802" y="4745736"/>
+            <a:ext cx="3314090" cy="182880"/>
+          </a:xfrm>
+          <a:prstGeom prst="rect">
+            <a:avLst/>
+          </a:prstGeom>
+          <a:noFill/>
+        </p:spPr>
+        <p:txBody>
+          <a:bodyPr wrap="square" anchor="ctr" lIns="0" rIns="0" tIns="0" bIns="0">
+            <a:spAutoFit/>
+          </a:bodyPr>
+          <a:lstStyle/>
+          <a:p>
+            <a:pPr algn="ctr">
+              <a:lnSpc>
+                <a:spcPct val="105000"/>
+              </a:lnSpc>
+              <a:spcBef>
+                <a:spcPts val="0"/>
+              </a:spcBef>
+              <a:spcAft>
+                <a:spcPts val="200"/>
+              </a:spcAft>
+            </a:pPr>
+            <a:r>
+              <a:rPr sz="750" b="0" i="1">
+                <a:solidFill>
+                  <a:srgbClr val="0728A3"/>
+                </a:solidFill>
+                <a:latin typeface="Montserrat Medium"/>
+              </a:rPr>
+              <a:t>= Kd × (1 − tax)</a:t>
+            </a:r>
+          </a:p>
+        </p:txBody>
+      </p:sp>
+      <p:sp>
+        <p:nvSpPr>
+          <p:cNvPr id="32" name="Rounded Rectangle 31"/>
+          <p:cNvSpPr/>
+          <p:nvPr/>
+        </p:nvSpPr>
+        <p:spPr>
+          <a:xfrm>
+            <a:off x="4438802" y="4910328"/>
+            <a:ext cx="3314090" cy="274320"/>
+          </a:xfrm>
+          <a:prstGeom prst="roundRect">
+            <a:avLst>
+              <a:gd name="adj" fmla="val 12000"/>
+            </a:avLst>
+          </a:prstGeom>
+          <a:solidFill>
+            <a:srgbClr val="020462"/>
+          </a:solidFill>
+          <a:ln>
+            <a:noFill/>
+          </a:ln>
+          <a:effectLst/>
+        </p:spPr>
+        <p:style>
+          <a:lnRef idx="1">
+            <a:schemeClr val="accent1"/>
+          </a:lnRef>
+          <a:fillRef idx="3">
+            <a:schemeClr val="accent1"/>
+          </a:fillRef>
+          <a:effectRef idx="2">
+            <a:schemeClr val="accent1"/>
+          </a:effectRef>
+          <a:fontRef idx="minor">
+            <a:schemeClr val="lt1"/>
+          </a:fontRef>
+        </p:style>
+        <p:txBody>
+          <a:bodyPr rtlCol="0" anchor="ctr"/>
+          <a:lstStyle/>
+          <a:p>
+            <a:pPr algn="ctr"/>
+          </a:p>
+        </p:txBody>
+      </p:sp>
+      <p:sp>
+        <p:nvSpPr>
+          <p:cNvPr id="33" name="TextBox 32"/>
+          <p:cNvSpPr txBox="1"/>
+          <p:nvPr/>
+        </p:nvSpPr>
+        <p:spPr>
+          <a:xfrm>
+            <a:off x="4438802" y="4910328"/>
+            <a:ext cx="3314090" cy="274320"/>
+          </a:xfrm>
+          <a:prstGeom prst="rect">
+            <a:avLst/>
+          </a:prstGeom>
+          <a:noFill/>
+        </p:spPr>
+        <p:txBody>
+          <a:bodyPr wrap="square" anchor="ctr" lIns="0" rIns="0" tIns="0" bIns="0">
+            <a:spAutoFit/>
+          </a:bodyPr>
+          <a:lstStyle/>
+          <a:p>
+            <a:pPr algn="ctr">
+              <a:lnSpc>
+                <a:spcPct val="105000"/>
+              </a:lnSpc>
+              <a:spcBef>
+                <a:spcPts val="0"/>
+              </a:spcBef>
+              <a:spcAft>
+                <a:spcPts val="200"/>
+              </a:spcAft>
+            </a:pPr>
+            <a:r>
+              <a:rPr sz="900" b="1" i="0">
+                <a:solidFill>
+                  <a:srgbClr val="FEFFFF"/>
+                </a:solidFill>
+                <a:latin typeface="Montserrat Medium"/>
+              </a:rPr>
+              <a:t>%</a:t>
+            </a:r>
+          </a:p>
+        </p:txBody>
+      </p:sp>
+      <p:sp>
+        <p:nvSpPr>
+          <p:cNvPr id="34" name="Oval 33"/>
+          <p:cNvSpPr/>
+          <p:nvPr/>
+        </p:nvSpPr>
+        <p:spPr>
+          <a:xfrm>
+            <a:off x="7652308" y="4379976"/>
+            <a:ext cx="109728" cy="109728"/>
+          </a:xfrm>
+          <a:prstGeom prst="ellipse">
+            <a:avLst/>
+          </a:prstGeom>
+          <a:solidFill>
+            <a:srgbClr val="B7791F"/>
+          </a:solidFill>
+          <a:ln w="9525">
+            <a:solidFill>
+              <a:srgbClr val="FEFFFF"/>
+            </a:solidFill>
+          </a:ln>
+          <a:effectLst/>
+        </p:spPr>
+        <p:style>
+          <a:lnRef idx="1">
+            <a:schemeClr val="accent1"/>
+          </a:lnRef>
+          <a:fillRef idx="3">
+            <a:schemeClr val="accent1"/>
+          </a:fillRef>
+          <a:effectRef idx="2">
+            <a:schemeClr val="accent1"/>
+          </a:effectRef>
+          <a:fontRef idx="minor">
+            <a:schemeClr val="lt1"/>
+          </a:fontRef>
+        </p:style>
+        <p:txBody>
+          <a:bodyPr rtlCol="0" anchor="ctr"/>
+          <a:lstStyle/>
+          <a:p>
+            <a:pPr algn="ctr"/>
+          </a:p>
+        </p:txBody>
+      </p:sp>
+      <p:sp>
+        <p:nvSpPr>
+          <p:cNvPr id="35" name="TextBox 34"/>
+          <p:cNvSpPr txBox="1"/>
+          <p:nvPr/>
+        </p:nvSpPr>
+        <p:spPr>
+          <a:xfrm>
+            <a:off x="8264956" y="1901952"/>
+            <a:ext cx="3423818" cy="320040"/>
+          </a:xfrm>
+          <a:prstGeom prst="rect">
+            <a:avLst/>
+          </a:prstGeom>
+          <a:noFill/>
+        </p:spPr>
+        <p:txBody>
+          <a:bodyPr wrap="square" anchor="t" lIns="0" rIns="0" tIns="0" bIns="0">
+            <a:spAutoFit/>
+          </a:bodyPr>
+          <a:lstStyle/>
+          <a:p>
+            <a:pPr algn="ctr">
+              <a:lnSpc>
+                <a:spcPct val="105000"/>
+              </a:lnSpc>
+              <a:spcBef>
+                <a:spcPts val="0"/>
+              </a:spcBef>
+              <a:spcAft>
+                <a:spcPts val="200"/>
+              </a:spcAft>
+            </a:pPr>
+            <a:r>
+              <a:rPr sz="1050" b="1" i="1">
+                <a:solidFill>
+                  <a:srgbClr val="03045E"/>
+                </a:solidFill>
+                <a:latin typeface="Montserrat"/>
+              </a:rPr>
+              <a:t>Drivers (leaf assumptions)</a:t>
+            </a:r>
+          </a:p>
+        </p:txBody>
+      </p:sp>
+      <p:sp>
+        <p:nvSpPr>
+          <p:cNvPr id="36" name="Rounded Rectangle 35"/>
+          <p:cNvSpPr/>
+          <p:nvPr/>
+        </p:nvSpPr>
+        <p:spPr>
+          <a:xfrm>
+            <a:off x="8264956" y="2286001"/>
+            <a:ext cx="3423818" cy="654710"/>
+          </a:xfrm>
+          <a:prstGeom prst="roundRect">
+            <a:avLst>
+              <a:gd name="adj" fmla="val 8000"/>
+            </a:avLst>
+          </a:prstGeom>
+          <a:solidFill>
+            <a:srgbClr val="D6EEF5"/>
+          </a:solidFill>
+          <a:ln w="9525">
+            <a:solidFill>
+              <a:srgbClr val="2E6FD6"/>
+            </a:solidFill>
+          </a:ln>
+          <a:effectLst/>
+        </p:spPr>
+        <p:style>
+          <a:lnRef idx="1">
+            <a:schemeClr val="accent1"/>
+          </a:lnRef>
+          <a:fillRef idx="3">
+            <a:schemeClr val="accent1"/>
+          </a:fillRef>
+          <a:effectRef idx="2">
+            <a:schemeClr val="accent1"/>
+          </a:effectRef>
+          <a:fontRef idx="minor">
+            <a:schemeClr val="lt1"/>
+          </a:fontRef>
+        </p:style>
+        <p:txBody>
+          <a:bodyPr rtlCol="0" anchor="ctr"/>
+          <a:lstStyle/>
+          <a:p>
+            <a:pPr algn="ctr"/>
+          </a:p>
+        </p:txBody>
+      </p:sp>
+      <p:sp>
+        <p:nvSpPr>
+          <p:cNvPr id="37" name="TextBox 36"/>
+          <p:cNvSpPr txBox="1"/>
+          <p:nvPr/>
+        </p:nvSpPr>
+        <p:spPr>
+          <a:xfrm>
+            <a:off x="8319820" y="2286001"/>
+            <a:ext cx="3314090" cy="419015"/>
+          </a:xfrm>
+          <a:prstGeom prst="rect">
+            <a:avLst/>
+          </a:prstGeom>
+          <a:noFill/>
+        </p:spPr>
+        <p:txBody>
+          <a:bodyPr wrap="square" anchor="ctr" lIns="0" rIns="0" tIns="0" bIns="0">
+            <a:spAutoFit/>
+          </a:bodyPr>
+          <a:lstStyle/>
+          <a:p>
+            <a:pPr algn="ctr">
+              <a:lnSpc>
+                <a:spcPct val="100000"/>
+              </a:lnSpc>
+              <a:spcBef>
+                <a:spcPts val="0"/>
+              </a:spcBef>
+              <a:spcAft>
+                <a:spcPts val="200"/>
+              </a:spcAft>
+            </a:pPr>
+            <a:r>
+              <a:rPr sz="950" b="1" i="0">
+                <a:solidFill>
+                  <a:srgbClr val="03045E"/>
+                </a:solidFill>
+                <a:latin typeface="Montserrat"/>
+              </a:rPr>
+              <a:t>Risk-free rate (Rf)</a:t>
+            </a:r>
+          </a:p>
+        </p:txBody>
+      </p:sp>
+      <p:sp>
+        <p:nvSpPr>
+          <p:cNvPr id="38" name="Rounded Rectangle 37"/>
+          <p:cNvSpPr/>
+          <p:nvPr/>
+        </p:nvSpPr>
+        <p:spPr>
+          <a:xfrm>
+            <a:off x="8319820" y="2686728"/>
+            <a:ext cx="3314090" cy="235695"/>
+          </a:xfrm>
+          <a:prstGeom prst="roundRect">
+            <a:avLst>
+              <a:gd name="adj" fmla="val 12000"/>
+            </a:avLst>
+          </a:prstGeom>
+          <a:solidFill>
+            <a:srgbClr val="020462"/>
+          </a:solidFill>
+          <a:ln>
+            <a:noFill/>
+          </a:ln>
+          <a:effectLst/>
+        </p:spPr>
+        <p:style>
+          <a:lnRef idx="1">
+            <a:schemeClr val="accent1"/>
+          </a:lnRef>
+          <a:fillRef idx="3">
+            <a:schemeClr val="accent1"/>
+          </a:fillRef>
+          <a:effectRef idx="2">
+            <a:schemeClr val="accent1"/>
+          </a:effectRef>
+          <a:fontRef idx="minor">
+            <a:schemeClr val="lt1"/>
+          </a:fontRef>
+        </p:style>
+        <p:txBody>
+          <a:bodyPr rtlCol="0" anchor="ctr"/>
+          <a:lstStyle/>
+          <a:p>
+            <a:pPr algn="ctr"/>
+          </a:p>
+        </p:txBody>
+      </p:sp>
+      <p:sp>
+        <p:nvSpPr>
+          <p:cNvPr id="39" name="TextBox 38"/>
+          <p:cNvSpPr txBox="1"/>
+          <p:nvPr/>
+        </p:nvSpPr>
+        <p:spPr>
+          <a:xfrm>
+            <a:off x="8319820" y="2686728"/>
+            <a:ext cx="3314090" cy="235695"/>
+          </a:xfrm>
+          <a:prstGeom prst="rect">
+            <a:avLst/>
+          </a:prstGeom>
+          <a:noFill/>
+        </p:spPr>
+        <p:txBody>
+          <a:bodyPr wrap="square" anchor="ctr" lIns="0" rIns="0" tIns="0" bIns="0">
+            <a:spAutoFit/>
+          </a:bodyPr>
+          <a:lstStyle/>
+          <a:p>
+            <a:pPr algn="ctr">
+              <a:lnSpc>
+                <a:spcPct val="105000"/>
+              </a:lnSpc>
+              <a:spcBef>
+                <a:spcPts val="0"/>
+              </a:spcBef>
+              <a:spcAft>
+                <a:spcPts val="200"/>
+              </a:spcAft>
+            </a:pPr>
+            <a:r>
+              <a:rPr sz="900" b="1" i="0">
+                <a:solidFill>
+                  <a:srgbClr val="FEFFFF"/>
+                </a:solidFill>
+                <a:latin typeface="Montserrat Medium"/>
+              </a:rPr>
+              <a:t>%</a:t>
+            </a:r>
+          </a:p>
+        </p:txBody>
+      </p:sp>
+      <p:sp>
+        <p:nvSpPr>
+          <p:cNvPr id="40" name="Oval 39"/>
+          <p:cNvSpPr/>
+          <p:nvPr/>
+        </p:nvSpPr>
+        <p:spPr>
+          <a:xfrm>
+            <a:off x="11533326" y="2331721"/>
+            <a:ext cx="109728" cy="109728"/>
+          </a:xfrm>
+          <a:prstGeom prst="ellipse">
+            <a:avLst/>
+          </a:prstGeom>
+          <a:solidFill>
+            <a:srgbClr val="03045E"/>
+          </a:solidFill>
+          <a:ln w="9525">
+            <a:solidFill>
+              <a:srgbClr val="FEFFFF"/>
+            </a:solidFill>
+          </a:ln>
+          <a:effectLst/>
+        </p:spPr>
+        <p:style>
+          <a:lnRef idx="1">
+            <a:schemeClr val="accent1"/>
+          </a:lnRef>
+          <a:fillRef idx="3">
+            <a:schemeClr val="accent1"/>
+          </a:fillRef>
+          <a:effectRef idx="2">
+            <a:schemeClr val="accent1"/>
+          </a:effectRef>
+          <a:fontRef idx="minor">
+            <a:schemeClr val="lt1"/>
+          </a:fontRef>
+        </p:style>
+        <p:txBody>
+          <a:bodyPr rtlCol="0" anchor="ctr"/>
+          <a:lstStyle/>
+          <a:p>
+            <a:pPr algn="ctr"/>
+          </a:p>
+        </p:txBody>
+      </p:sp>
+      <p:sp>
+        <p:nvSpPr>
+          <p:cNvPr id="41" name="Rounded Rectangle 40"/>
+          <p:cNvSpPr/>
+          <p:nvPr/>
+        </p:nvSpPr>
+        <p:spPr>
+          <a:xfrm>
+            <a:off x="8264956" y="3105303"/>
+            <a:ext cx="3423818" cy="654710"/>
+          </a:xfrm>
+          <a:prstGeom prst="roundRect">
+            <a:avLst>
+              <a:gd name="adj" fmla="val 8000"/>
+            </a:avLst>
+          </a:prstGeom>
+          <a:solidFill>
+            <a:srgbClr val="D6EEF5"/>
+          </a:solidFill>
+          <a:ln w="9525">
+            <a:solidFill>
+              <a:srgbClr val="2E6FD6"/>
+            </a:solidFill>
+          </a:ln>
+          <a:effectLst/>
+        </p:spPr>
+        <p:style>
+          <a:lnRef idx="1">
+            <a:schemeClr val="accent1"/>
+          </a:lnRef>
+          <a:fillRef idx="3">
+            <a:schemeClr val="accent1"/>
+          </a:fillRef>
+          <a:effectRef idx="2">
+            <a:schemeClr val="accent1"/>
+          </a:effectRef>
+          <a:fontRef idx="minor">
+            <a:schemeClr val="lt1"/>
+          </a:fontRef>
+        </p:style>
+        <p:txBody>
+          <a:bodyPr rtlCol="0" anchor="ctr"/>
+          <a:lstStyle/>
+          <a:p>
+            <a:pPr algn="ctr"/>
+          </a:p>
+        </p:txBody>
+      </p:sp>
+      <p:sp>
+        <p:nvSpPr>
+          <p:cNvPr id="42" name="TextBox 41"/>
+          <p:cNvSpPr txBox="1"/>
+          <p:nvPr/>
+        </p:nvSpPr>
+        <p:spPr>
+          <a:xfrm>
+            <a:off x="8319820" y="3105303"/>
+            <a:ext cx="3314090" cy="419015"/>
+          </a:xfrm>
+          <a:prstGeom prst="rect">
+            <a:avLst/>
+          </a:prstGeom>
+          <a:noFill/>
+        </p:spPr>
+        <p:txBody>
+          <a:bodyPr wrap="square" anchor="ctr" lIns="0" rIns="0" tIns="0" bIns="0">
+            <a:spAutoFit/>
+          </a:bodyPr>
+          <a:lstStyle/>
+          <a:p>
+            <a:pPr algn="ctr">
+              <a:lnSpc>
+                <a:spcPct val="100000"/>
+              </a:lnSpc>
+              <a:spcBef>
+                <a:spcPts val="0"/>
+              </a:spcBef>
+              <a:spcAft>
+                <a:spcPts val="200"/>
+              </a:spcAft>
+            </a:pPr>
+            <a:r>
+              <a:rPr sz="950" b="1" i="0">
+                <a:solidFill>
+                  <a:srgbClr val="03045E"/>
+                </a:solidFill>
+                <a:latin typeface="Montserrat"/>
+              </a:rPr>
+              <a:t>Beta (β)</a:t>
+            </a:r>
+          </a:p>
+        </p:txBody>
+      </p:sp>
+      <p:sp>
+        <p:nvSpPr>
+          <p:cNvPr id="43" name="Rounded Rectangle 42"/>
+          <p:cNvSpPr/>
+          <p:nvPr/>
+        </p:nvSpPr>
+        <p:spPr>
+          <a:xfrm>
+            <a:off x="8319820" y="3506030"/>
+            <a:ext cx="3314090" cy="235695"/>
+          </a:xfrm>
+          <a:prstGeom prst="roundRect">
+            <a:avLst>
+              <a:gd name="adj" fmla="val 12000"/>
+            </a:avLst>
+          </a:prstGeom>
+          <a:solidFill>
+            <a:srgbClr val="020462"/>
+          </a:solidFill>
+          <a:ln>
+            <a:noFill/>
+          </a:ln>
+          <a:effectLst/>
+        </p:spPr>
+        <p:style>
+          <a:lnRef idx="1">
+            <a:schemeClr val="accent1"/>
+          </a:lnRef>
+          <a:fillRef idx="3">
+            <a:schemeClr val="accent1"/>
+          </a:fillRef>
+          <a:effectRef idx="2">
+            <a:schemeClr val="accent1"/>
+          </a:effectRef>
+          <a:fontRef idx="minor">
+            <a:schemeClr val="lt1"/>
+          </a:fontRef>
+        </p:style>
+        <p:txBody>
+          <a:bodyPr rtlCol="0" anchor="ctr"/>
+          <a:lstStyle/>
+          <a:p>
+            <a:pPr algn="ctr"/>
+          </a:p>
+        </p:txBody>
+      </p:sp>
+      <p:sp>
+        <p:nvSpPr>
+          <p:cNvPr id="44" name="TextBox 43"/>
+          <p:cNvSpPr txBox="1"/>
+          <p:nvPr/>
+        </p:nvSpPr>
+        <p:spPr>
+          <a:xfrm>
+            <a:off x="8319820" y="3506030"/>
+            <a:ext cx="3314090" cy="235695"/>
+          </a:xfrm>
+          <a:prstGeom prst="rect">
+            <a:avLst/>
+          </a:prstGeom>
+          <a:noFill/>
+        </p:spPr>
+        <p:txBody>
+          <a:bodyPr wrap="square" anchor="ctr" lIns="0" rIns="0" tIns="0" bIns="0">
+            <a:spAutoFit/>
+          </a:bodyPr>
+          <a:lstStyle/>
+          <a:p>
+            <a:pPr algn="ctr">
+              <a:lnSpc>
+                <a:spcPct val="105000"/>
+              </a:lnSpc>
+              <a:spcBef>
+                <a:spcPts val="0"/>
+              </a:spcBef>
+              <a:spcAft>
+                <a:spcPts val="200"/>
+              </a:spcAft>
+            </a:pPr>
+            <a:r>
+              <a:rPr sz="900" b="1" i="0">
+                <a:solidFill>
+                  <a:srgbClr val="FEFFFF"/>
+                </a:solidFill>
+                <a:latin typeface="Montserrat Medium"/>
+              </a:rPr>
+              <a:t>x</a:t>
+            </a:r>
+          </a:p>
+        </p:txBody>
+      </p:sp>
+      <p:sp>
+        <p:nvSpPr>
+          <p:cNvPr id="45" name="Oval 44"/>
+          <p:cNvSpPr/>
+          <p:nvPr/>
+        </p:nvSpPr>
+        <p:spPr>
+          <a:xfrm>
+            <a:off x="11533326" y="3151023"/>
+            <a:ext cx="109728" cy="109728"/>
+          </a:xfrm>
+          <a:prstGeom prst="ellipse">
+            <a:avLst/>
+          </a:prstGeom>
+          <a:solidFill>
+            <a:srgbClr val="B7791F"/>
+          </a:solidFill>
+          <a:ln w="9525">
+            <a:solidFill>
+              <a:srgbClr val="FEFFFF"/>
+            </a:solidFill>
+          </a:ln>
+          <a:effectLst/>
+        </p:spPr>
+        <p:style>
+          <a:lnRef idx="1">
+            <a:schemeClr val="accent1"/>
+          </a:lnRef>
+          <a:fillRef idx="3">
+            <a:schemeClr val="accent1"/>
+          </a:fillRef>
+          <a:effectRef idx="2">
+            <a:schemeClr val="accent1"/>
+          </a:effectRef>
+          <a:fontRef idx="minor">
+            <a:schemeClr val="lt1"/>
+          </a:fontRef>
+        </p:style>
+        <p:txBody>
+          <a:bodyPr rtlCol="0" anchor="ctr"/>
+          <a:lstStyle/>
+          <a:p>
+            <a:pPr algn="ctr"/>
+          </a:p>
+        </p:txBody>
+      </p:sp>
+      <p:sp>
+        <p:nvSpPr>
+          <p:cNvPr id="46" name="Rounded Rectangle 45"/>
+          <p:cNvSpPr/>
+          <p:nvPr/>
+        </p:nvSpPr>
+        <p:spPr>
+          <a:xfrm>
+            <a:off x="8264956" y="3924605"/>
+            <a:ext cx="3423818" cy="654710"/>
+          </a:xfrm>
+          <a:prstGeom prst="roundRect">
+            <a:avLst>
+              <a:gd name="adj" fmla="val 8000"/>
+            </a:avLst>
+          </a:prstGeom>
+          <a:solidFill>
+            <a:srgbClr val="D6EEF5"/>
+          </a:solidFill>
+          <a:ln w="9525">
+            <a:solidFill>
+              <a:srgbClr val="2E6FD6"/>
+            </a:solidFill>
+          </a:ln>
+          <a:effectLst/>
+        </p:spPr>
+        <p:style>
+          <a:lnRef idx="1">
+            <a:schemeClr val="accent1"/>
+          </a:lnRef>
+          <a:fillRef idx="3">
+            <a:schemeClr val="accent1"/>
+          </a:fillRef>
+          <a:effectRef idx="2">
+            <a:schemeClr val="accent1"/>
+          </a:effectRef>
+          <a:fontRef idx="minor">
+            <a:schemeClr val="lt1"/>
+          </a:fontRef>
+        </p:style>
+        <p:txBody>
+          <a:bodyPr rtlCol="0" anchor="ctr"/>
+          <a:lstStyle/>
+          <a:p>
+            <a:pPr algn="ctr"/>
+          </a:p>
+        </p:txBody>
+      </p:sp>
+      <p:sp>
+        <p:nvSpPr>
+          <p:cNvPr id="47" name="TextBox 46"/>
+          <p:cNvSpPr txBox="1"/>
+          <p:nvPr/>
+        </p:nvSpPr>
+        <p:spPr>
+          <a:xfrm>
+            <a:off x="8319820" y="3924605"/>
+            <a:ext cx="3314090" cy="419015"/>
+          </a:xfrm>
+          <a:prstGeom prst="rect">
+            <a:avLst/>
+          </a:prstGeom>
+          <a:noFill/>
+        </p:spPr>
+        <p:txBody>
+          <a:bodyPr wrap="square" anchor="ctr" lIns="0" rIns="0" tIns="0" bIns="0">
+            <a:spAutoFit/>
+          </a:bodyPr>
+          <a:lstStyle/>
+          <a:p>
+            <a:pPr algn="ctr">
+              <a:lnSpc>
+                <a:spcPct val="100000"/>
+              </a:lnSpc>
+              <a:spcBef>
+                <a:spcPts val="0"/>
+              </a:spcBef>
+              <a:spcAft>
+                <a:spcPts val="200"/>
+              </a:spcAft>
+            </a:pPr>
+            <a:r>
+              <a:rPr sz="950" b="1" i="0">
+                <a:solidFill>
+                  <a:srgbClr val="03045E"/>
+                </a:solidFill>
+                <a:latin typeface="Montserrat"/>
+              </a:rPr>
+              <a:t>Equity risk premium</a:t>
+            </a:r>
+          </a:p>
+        </p:txBody>
+      </p:sp>
+      <p:sp>
+        <p:nvSpPr>
+          <p:cNvPr id="48" name="Rounded Rectangle 47"/>
+          <p:cNvSpPr/>
+          <p:nvPr/>
+        </p:nvSpPr>
+        <p:spPr>
+          <a:xfrm>
+            <a:off x="8319820" y="4325332"/>
+            <a:ext cx="3314090" cy="235695"/>
+          </a:xfrm>
+          <a:prstGeom prst="roundRect">
+            <a:avLst>
+              <a:gd name="adj" fmla="val 12000"/>
+            </a:avLst>
+          </a:prstGeom>
+          <a:solidFill>
+            <a:srgbClr val="020462"/>
+          </a:solidFill>
+          <a:ln>
+            <a:noFill/>
+          </a:ln>
+          <a:effectLst/>
+        </p:spPr>
+        <p:style>
+          <a:lnRef idx="1">
+            <a:schemeClr val="accent1"/>
+          </a:lnRef>
+          <a:fillRef idx="3">
+            <a:schemeClr val="accent1"/>
+          </a:fillRef>
+          <a:effectRef idx="2">
+            <a:schemeClr val="accent1"/>
+          </a:effectRef>
+          <a:fontRef idx="minor">
+            <a:schemeClr val="lt1"/>
+          </a:fontRef>
+        </p:style>
+        <p:txBody>
+          <a:bodyPr rtlCol="0" anchor="ctr"/>
+          <a:lstStyle/>
+          <a:p>
+            <a:pPr algn="ctr"/>
+          </a:p>
+        </p:txBody>
+      </p:sp>
+      <p:sp>
+        <p:nvSpPr>
+          <p:cNvPr id="49" name="TextBox 48"/>
+          <p:cNvSpPr txBox="1"/>
+          <p:nvPr/>
+        </p:nvSpPr>
+        <p:spPr>
+          <a:xfrm>
+            <a:off x="8319820" y="4325332"/>
+            <a:ext cx="3314090" cy="235695"/>
+          </a:xfrm>
+          <a:prstGeom prst="rect">
+            <a:avLst/>
+          </a:prstGeom>
+          <a:noFill/>
+        </p:spPr>
+        <p:txBody>
+          <a:bodyPr wrap="square" anchor="ctr" lIns="0" rIns="0" tIns="0" bIns="0">
+            <a:spAutoFit/>
+          </a:bodyPr>
+          <a:lstStyle/>
+          <a:p>
+            <a:pPr algn="ctr">
+              <a:lnSpc>
+                <a:spcPct val="105000"/>
+              </a:lnSpc>
+              <a:spcBef>
+                <a:spcPts val="0"/>
+              </a:spcBef>
+              <a:spcAft>
+                <a:spcPts val="200"/>
+              </a:spcAft>
+            </a:pPr>
+            <a:r>
+              <a:rPr sz="900" b="1" i="0">
+                <a:solidFill>
+                  <a:srgbClr val="FEFFFF"/>
+                </a:solidFill>
+                <a:latin typeface="Montserrat Medium"/>
+              </a:rPr>
+              <a:t>%</a:t>
+            </a:r>
+          </a:p>
+        </p:txBody>
+      </p:sp>
+      <p:sp>
+        <p:nvSpPr>
+          <p:cNvPr id="50" name="Oval 49"/>
+          <p:cNvSpPr/>
+          <p:nvPr/>
+        </p:nvSpPr>
+        <p:spPr>
+          <a:xfrm>
+            <a:off x="11533326" y="3970325"/>
+            <a:ext cx="109728" cy="109728"/>
+          </a:xfrm>
+          <a:prstGeom prst="ellipse">
+            <a:avLst/>
+          </a:prstGeom>
+          <a:solidFill>
+            <a:srgbClr val="B7791F"/>
+          </a:solidFill>
+          <a:ln w="9525">
+            <a:solidFill>
+              <a:srgbClr val="FEFFFF"/>
+            </a:solidFill>
+          </a:ln>
+          <a:effectLst/>
+        </p:spPr>
+        <p:style>
+          <a:lnRef idx="1">
+            <a:schemeClr val="accent1"/>
+          </a:lnRef>
+          <a:fillRef idx="3">
+            <a:schemeClr val="accent1"/>
+          </a:fillRef>
+          <a:effectRef idx="2">
+            <a:schemeClr val="accent1"/>
+          </a:effectRef>
+          <a:fontRef idx="minor">
+            <a:schemeClr val="lt1"/>
+          </a:fontRef>
+        </p:style>
+        <p:txBody>
+          <a:bodyPr rtlCol="0" anchor="ctr"/>
+          <a:lstStyle/>
+          <a:p>
+            <a:pPr algn="ctr"/>
+          </a:p>
+        </p:txBody>
+      </p:sp>
+      <p:sp>
+        <p:nvSpPr>
+          <p:cNvPr id="51" name="Rounded Rectangle 50"/>
+          <p:cNvSpPr/>
+          <p:nvPr/>
+        </p:nvSpPr>
+        <p:spPr>
+          <a:xfrm>
+            <a:off x="8264956" y="4743907"/>
+            <a:ext cx="3423818" cy="654710"/>
+          </a:xfrm>
+          <a:prstGeom prst="roundRect">
+            <a:avLst>
+              <a:gd name="adj" fmla="val 8000"/>
+            </a:avLst>
+          </a:prstGeom>
+          <a:solidFill>
+            <a:srgbClr val="D6EEF5"/>
+          </a:solidFill>
+          <a:ln w="9525">
+            <a:solidFill>
+              <a:srgbClr val="2E6FD6"/>
+            </a:solidFill>
+          </a:ln>
+          <a:effectLst/>
+        </p:spPr>
+        <p:style>
+          <a:lnRef idx="1">
+            <a:schemeClr val="accent1"/>
+          </a:lnRef>
+          <a:fillRef idx="3">
+            <a:schemeClr val="accent1"/>
+          </a:fillRef>
+          <a:effectRef idx="2">
+            <a:schemeClr val="accent1"/>
+          </a:effectRef>
+          <a:fontRef idx="minor">
+            <a:schemeClr val="lt1"/>
+          </a:fontRef>
+        </p:style>
+        <p:txBody>
+          <a:bodyPr rtlCol="0" anchor="ctr"/>
+          <a:lstStyle/>
+          <a:p>
+            <a:pPr algn="ctr"/>
+          </a:p>
+        </p:txBody>
+      </p:sp>
+      <p:sp>
+        <p:nvSpPr>
+          <p:cNvPr id="52" name="TextBox 51"/>
+          <p:cNvSpPr txBox="1"/>
+          <p:nvPr/>
+        </p:nvSpPr>
+        <p:spPr>
+          <a:xfrm>
+            <a:off x="8319820" y="4743907"/>
+            <a:ext cx="3314090" cy="419015"/>
+          </a:xfrm>
+          <a:prstGeom prst="rect">
+            <a:avLst/>
+          </a:prstGeom>
+          <a:noFill/>
+        </p:spPr>
+        <p:txBody>
+          <a:bodyPr wrap="square" anchor="ctr" lIns="0" rIns="0" tIns="0" bIns="0">
+            <a:spAutoFit/>
+          </a:bodyPr>
+          <a:lstStyle/>
+          <a:p>
+            <a:pPr algn="ctr">
+              <a:lnSpc>
+                <a:spcPct val="100000"/>
+              </a:lnSpc>
+              <a:spcBef>
+                <a:spcPts val="0"/>
+              </a:spcBef>
+              <a:spcAft>
+                <a:spcPts val="200"/>
+              </a:spcAft>
+            </a:pPr>
+            <a:r>
+              <a:rPr sz="950" b="1" i="0">
+                <a:solidFill>
+                  <a:srgbClr val="03045E"/>
+                </a:solidFill>
+                <a:latin typeface="Montserrat"/>
+              </a:rPr>
+              <a:t>Pre-tax cost of debt (Kd)</a:t>
+            </a:r>
+          </a:p>
+        </p:txBody>
+      </p:sp>
+      <p:sp>
+        <p:nvSpPr>
+          <p:cNvPr id="53" name="Rounded Rectangle 52"/>
+          <p:cNvSpPr/>
+          <p:nvPr/>
+        </p:nvSpPr>
+        <p:spPr>
+          <a:xfrm>
+            <a:off x="8319820" y="5144634"/>
+            <a:ext cx="3314090" cy="235695"/>
+          </a:xfrm>
+          <a:prstGeom prst="roundRect">
+            <a:avLst>
+              <a:gd name="adj" fmla="val 12000"/>
+            </a:avLst>
+          </a:prstGeom>
+          <a:solidFill>
+            <a:srgbClr val="020462"/>
+          </a:solidFill>
+          <a:ln>
+            <a:noFill/>
+          </a:ln>
+          <a:effectLst/>
+        </p:spPr>
+        <p:style>
+          <a:lnRef idx="1">
+            <a:schemeClr val="accent1"/>
+          </a:lnRef>
+          <a:fillRef idx="3">
+            <a:schemeClr val="accent1"/>
+          </a:fillRef>
+          <a:effectRef idx="2">
+            <a:schemeClr val="accent1"/>
+          </a:effectRef>
+          <a:fontRef idx="minor">
+            <a:schemeClr val="lt1"/>
+          </a:fontRef>
+        </p:style>
+        <p:txBody>
+          <a:bodyPr rtlCol="0" anchor="ctr"/>
+          <a:lstStyle/>
+          <a:p>
+            <a:pPr algn="ctr"/>
+          </a:p>
+        </p:txBody>
+      </p:sp>
+      <p:sp>
+        <p:nvSpPr>
+          <p:cNvPr id="54" name="TextBox 53"/>
+          <p:cNvSpPr txBox="1"/>
+          <p:nvPr/>
+        </p:nvSpPr>
+        <p:spPr>
+          <a:xfrm>
+            <a:off x="8319820" y="5144634"/>
+            <a:ext cx="3314090" cy="235695"/>
+          </a:xfrm>
+          <a:prstGeom prst="rect">
+            <a:avLst/>
+          </a:prstGeom>
+          <a:noFill/>
+        </p:spPr>
+        <p:txBody>
+          <a:bodyPr wrap="square" anchor="ctr" lIns="0" rIns="0" tIns="0" bIns="0">
+            <a:spAutoFit/>
+          </a:bodyPr>
+          <a:lstStyle/>
+          <a:p>
+            <a:pPr algn="ctr">
+              <a:lnSpc>
+                <a:spcPct val="105000"/>
+              </a:lnSpc>
+              <a:spcBef>
+                <a:spcPts val="0"/>
+              </a:spcBef>
+              <a:spcAft>
+                <a:spcPts val="200"/>
+              </a:spcAft>
+            </a:pPr>
+            <a:r>
+              <a:rPr sz="900" b="1" i="0">
+                <a:solidFill>
+                  <a:srgbClr val="FEFFFF"/>
+                </a:solidFill>
+                <a:latin typeface="Montserrat Medium"/>
+              </a:rPr>
+              <a:t>%</a:t>
+            </a:r>
+          </a:p>
+        </p:txBody>
+      </p:sp>
+      <p:sp>
+        <p:nvSpPr>
+          <p:cNvPr id="55" name="Oval 54"/>
+          <p:cNvSpPr/>
+          <p:nvPr/>
+        </p:nvSpPr>
+        <p:spPr>
+          <a:xfrm>
+            <a:off x="11533326" y="4789627"/>
+            <a:ext cx="109728" cy="109728"/>
+          </a:xfrm>
+          <a:prstGeom prst="ellipse">
+            <a:avLst/>
+          </a:prstGeom>
+          <a:solidFill>
+            <a:srgbClr val="B7791F"/>
+          </a:solidFill>
+          <a:ln w="9525">
+            <a:solidFill>
+              <a:srgbClr val="FEFFFF"/>
+            </a:solidFill>
+          </a:ln>
+          <a:effectLst/>
+        </p:spPr>
+        <p:style>
+          <a:lnRef idx="1">
+            <a:schemeClr val="accent1"/>
+          </a:lnRef>
+          <a:fillRef idx="3">
+            <a:schemeClr val="accent1"/>
+          </a:fillRef>
+          <a:effectRef idx="2">
+            <a:schemeClr val="accent1"/>
+          </a:effectRef>
+          <a:fontRef idx="minor">
+            <a:schemeClr val="lt1"/>
+          </a:fontRef>
+        </p:style>
+        <p:txBody>
+          <a:bodyPr rtlCol="0" anchor="ctr"/>
+          <a:lstStyle/>
+          <a:p>
+            <a:pPr algn="ctr"/>
+          </a:p>
+        </p:txBody>
+      </p:sp>
+      <p:sp>
+        <p:nvSpPr>
+          <p:cNvPr id="56" name="Rounded Rectangle 55"/>
+          <p:cNvSpPr/>
+          <p:nvPr/>
+        </p:nvSpPr>
+        <p:spPr>
+          <a:xfrm>
+            <a:off x="8264956" y="5563209"/>
+            <a:ext cx="3423818" cy="654710"/>
+          </a:xfrm>
+          <a:prstGeom prst="roundRect">
+            <a:avLst>
+              <a:gd name="adj" fmla="val 8000"/>
+            </a:avLst>
+          </a:prstGeom>
+          <a:solidFill>
+            <a:srgbClr val="D6EEF5"/>
+          </a:solidFill>
+          <a:ln w="9525">
+            <a:solidFill>
+              <a:srgbClr val="2E6FD6"/>
+            </a:solidFill>
+          </a:ln>
+          <a:effectLst/>
+        </p:spPr>
+        <p:style>
+          <a:lnRef idx="1">
+            <a:schemeClr val="accent1"/>
+          </a:lnRef>
+          <a:fillRef idx="3">
+            <a:schemeClr val="accent1"/>
+          </a:fillRef>
+          <a:effectRef idx="2">
+            <a:schemeClr val="accent1"/>
+          </a:effectRef>
+          <a:fontRef idx="minor">
+            <a:schemeClr val="lt1"/>
+          </a:fontRef>
+        </p:style>
+        <p:txBody>
+          <a:bodyPr rtlCol="0" anchor="ctr"/>
+          <a:lstStyle/>
+          <a:p>
+            <a:pPr algn="ctr"/>
+          </a:p>
+        </p:txBody>
+      </p:sp>
+      <p:sp>
+        <p:nvSpPr>
+          <p:cNvPr id="57" name="TextBox 56"/>
+          <p:cNvSpPr txBox="1"/>
+          <p:nvPr/>
+        </p:nvSpPr>
+        <p:spPr>
+          <a:xfrm>
+            <a:off x="8319820" y="5563209"/>
+            <a:ext cx="3314090" cy="419015"/>
+          </a:xfrm>
+          <a:prstGeom prst="rect">
+            <a:avLst/>
+          </a:prstGeom>
+          <a:noFill/>
+        </p:spPr>
+        <p:txBody>
+          <a:bodyPr wrap="square" anchor="ctr" lIns="0" rIns="0" tIns="0" bIns="0">
+            <a:spAutoFit/>
+          </a:bodyPr>
+          <a:lstStyle/>
+          <a:p>
+            <a:pPr algn="ctr">
+              <a:lnSpc>
+                <a:spcPct val="100000"/>
+              </a:lnSpc>
+              <a:spcBef>
+                <a:spcPts val="0"/>
+              </a:spcBef>
+              <a:spcAft>
+                <a:spcPts val="200"/>
+              </a:spcAft>
+            </a:pPr>
+            <a:r>
+              <a:rPr sz="950" b="1" i="0">
+                <a:solidFill>
+                  <a:srgbClr val="03045E"/>
+                </a:solidFill>
+                <a:latin typeface="Montserrat"/>
+              </a:rPr>
+              <a:t>Tax rate</a:t>
+            </a:r>
+          </a:p>
+        </p:txBody>
+      </p:sp>
+      <p:sp>
+        <p:nvSpPr>
+          <p:cNvPr id="58" name="Rounded Rectangle 57"/>
+          <p:cNvSpPr/>
+          <p:nvPr/>
+        </p:nvSpPr>
+        <p:spPr>
+          <a:xfrm>
+            <a:off x="8319820" y="5963936"/>
+            <a:ext cx="3314090" cy="235695"/>
+          </a:xfrm>
+          <a:prstGeom prst="roundRect">
+            <a:avLst>
+              <a:gd name="adj" fmla="val 12000"/>
+            </a:avLst>
+          </a:prstGeom>
+          <a:solidFill>
+            <a:srgbClr val="020462"/>
+          </a:solidFill>
+          <a:ln>
+            <a:noFill/>
+          </a:ln>
+          <a:effectLst/>
+        </p:spPr>
+        <p:style>
+          <a:lnRef idx="1">
+            <a:schemeClr val="accent1"/>
+          </a:lnRef>
+          <a:fillRef idx="3">
+            <a:schemeClr val="accent1"/>
+          </a:fillRef>
+          <a:effectRef idx="2">
+            <a:schemeClr val="accent1"/>
+          </a:effectRef>
+          <a:fontRef idx="minor">
+            <a:schemeClr val="lt1"/>
+          </a:fontRef>
+        </p:style>
+        <p:txBody>
+          <a:bodyPr rtlCol="0" anchor="ctr"/>
+          <a:lstStyle/>
+          <a:p>
+            <a:pPr algn="ctr"/>
+          </a:p>
+        </p:txBody>
+      </p:sp>
+      <p:sp>
+        <p:nvSpPr>
+          <p:cNvPr id="59" name="TextBox 58"/>
+          <p:cNvSpPr txBox="1"/>
+          <p:nvPr/>
+        </p:nvSpPr>
+        <p:spPr>
+          <a:xfrm>
+            <a:off x="8319820" y="5963936"/>
+            <a:ext cx="3314090" cy="235695"/>
+          </a:xfrm>
+          <a:prstGeom prst="rect">
+            <a:avLst/>
+          </a:prstGeom>
+          <a:noFill/>
+        </p:spPr>
+        <p:txBody>
+          <a:bodyPr wrap="square" anchor="ctr" lIns="0" rIns="0" tIns="0" bIns="0">
+            <a:spAutoFit/>
+          </a:bodyPr>
+          <a:lstStyle/>
+          <a:p>
+            <a:pPr algn="ctr">
+              <a:lnSpc>
+                <a:spcPct val="105000"/>
+              </a:lnSpc>
+              <a:spcBef>
+                <a:spcPts val="0"/>
+              </a:spcBef>
+              <a:spcAft>
+                <a:spcPts val="200"/>
+              </a:spcAft>
+            </a:pPr>
+            <a:r>
+              <a:rPr sz="900" b="1" i="0">
+                <a:solidFill>
+                  <a:srgbClr val="FEFFFF"/>
+                </a:solidFill>
+                <a:latin typeface="Montserrat Medium"/>
+              </a:rPr>
+              <a:t>%</a:t>
+            </a:r>
+          </a:p>
+        </p:txBody>
+      </p:sp>
+      <p:sp>
+        <p:nvSpPr>
+          <p:cNvPr id="60" name="Oval 59"/>
+          <p:cNvSpPr/>
+          <p:nvPr/>
+        </p:nvSpPr>
+        <p:spPr>
+          <a:xfrm>
+            <a:off x="11533326" y="5608929"/>
+            <a:ext cx="109728" cy="109728"/>
+          </a:xfrm>
+          <a:prstGeom prst="ellipse">
+            <a:avLst/>
+          </a:prstGeom>
+          <a:solidFill>
+            <a:srgbClr val="03045E"/>
+          </a:solidFill>
+          <a:ln w="9525">
+            <a:solidFill>
+              <a:srgbClr val="FEFFFF"/>
+            </a:solidFill>
+          </a:ln>
+          <a:effectLst/>
+        </p:spPr>
+        <p:style>
+          <a:lnRef idx="1">
+            <a:schemeClr val="accent1"/>
+          </a:lnRef>
+          <a:fillRef idx="3">
+            <a:schemeClr val="accent1"/>
+          </a:fillRef>
+          <a:effectRef idx="2">
+            <a:schemeClr val="accent1"/>
+          </a:effectRef>
+          <a:fontRef idx="minor">
+            <a:schemeClr val="lt1"/>
+          </a:fontRef>
+        </p:style>
+        <p:txBody>
+          <a:bodyPr rtlCol="0" anchor="ctr"/>
+          <a:lstStyle/>
+          <a:p>
+            <a:pPr algn="ctr"/>
+          </a:p>
+        </p:txBody>
+      </p:sp>
+      <p:cxnSp>
+        <p:nvCxnSpPr>
+          <p:cNvPr id="61" name="Connector 60"/>
+          <p:cNvCxnSpPr/>
+          <p:nvPr/>
+        </p:nvCxnSpPr>
+        <p:spPr>
+          <a:xfrm>
+            <a:off x="4155338" y="3735324"/>
+            <a:ext cx="0" cy="1033272"/>
+          </a:xfrm>
+          <a:prstGeom prst="bentConnector3">
+            <a:avLst/>
+          </a:prstGeom>
+          <a:ln w="12700">
+            <a:solidFill>
+              <a:srgbClr val="C9CBD6"/>
+            </a:solidFill>
+          </a:ln>
+        </p:spPr>
+        <p:style>
+          <a:lnRef idx="2">
+            <a:schemeClr val="accent1"/>
+          </a:lnRef>
+          <a:fillRef idx="0">
+            <a:schemeClr val="accent1"/>
+          </a:fillRef>
+          <a:effectRef idx="1">
+            <a:schemeClr val="accent1"/>
+          </a:effectRef>
+          <a:fontRef idx="minor">
+            <a:schemeClr val="tx1"/>
+          </a:fontRef>
+        </p:style>
+      </p:cxnSp>
+      <p:cxnSp>
+        <p:nvCxnSpPr>
+          <p:cNvPr id="62" name="Connector 61"/>
+          <p:cNvCxnSpPr/>
+          <p:nvPr/>
+        </p:nvCxnSpPr>
+        <p:spPr>
+          <a:xfrm>
+            <a:off x="3926738" y="4251960"/>
+            <a:ext cx="228600" cy="0"/>
+          </a:xfrm>
+          <a:prstGeom prst="bentConnector3">
+            <a:avLst/>
+          </a:prstGeom>
+          <a:ln w="12700">
+            <a:solidFill>
+              <a:srgbClr val="C9CBD6"/>
+            </a:solidFill>
+          </a:ln>
+        </p:spPr>
+        <p:style>
+          <a:lnRef idx="2">
+            <a:schemeClr val="accent1"/>
+          </a:lnRef>
+          <a:fillRef idx="0">
+            <a:schemeClr val="accent1"/>
+          </a:fillRef>
+          <a:effectRef idx="1">
+            <a:schemeClr val="accent1"/>
+          </a:effectRef>
+          <a:fontRef idx="minor">
+            <a:schemeClr val="tx1"/>
+          </a:fontRef>
+        </p:style>
+      </p:cxnSp>
+      <p:cxnSp>
+        <p:nvCxnSpPr>
+          <p:cNvPr id="63" name="Connector 62"/>
+          <p:cNvCxnSpPr/>
+          <p:nvPr/>
+        </p:nvCxnSpPr>
+        <p:spPr>
+          <a:xfrm>
+            <a:off x="4155338" y="3735324"/>
+            <a:ext cx="228600" cy="0"/>
+          </a:xfrm>
+          <a:prstGeom prst="bentConnector3">
+            <a:avLst/>
+          </a:prstGeom>
+          <a:ln w="12700">
+            <a:solidFill>
+              <a:srgbClr val="C9CBD6"/>
+            </a:solidFill>
+          </a:ln>
+        </p:spPr>
+        <p:style>
+          <a:lnRef idx="2">
+            <a:schemeClr val="accent1"/>
+          </a:lnRef>
+          <a:fillRef idx="0">
+            <a:schemeClr val="accent1"/>
+          </a:fillRef>
+          <a:effectRef idx="1">
+            <a:schemeClr val="accent1"/>
+          </a:effectRef>
+          <a:fontRef idx="minor">
+            <a:schemeClr val="tx1"/>
+          </a:fontRef>
+        </p:style>
+      </p:cxnSp>
+      <p:cxnSp>
+        <p:nvCxnSpPr>
+          <p:cNvPr id="64" name="Connector 63"/>
+          <p:cNvCxnSpPr/>
+          <p:nvPr/>
+        </p:nvCxnSpPr>
+        <p:spPr>
+          <a:xfrm>
+            <a:off x="4155338" y="4768596"/>
+            <a:ext cx="228600" cy="0"/>
+          </a:xfrm>
+          <a:prstGeom prst="bentConnector3">
+            <a:avLst/>
+          </a:prstGeom>
+          <a:ln w="12700">
+            <a:solidFill>
+              <a:srgbClr val="C9CBD6"/>
+            </a:solidFill>
+          </a:ln>
+        </p:spPr>
+        <p:style>
+          <a:lnRef idx="2">
+            <a:schemeClr val="accent1"/>
+          </a:lnRef>
+          <a:fillRef idx="0">
+            <a:schemeClr val="accent1"/>
+          </a:fillRef>
+          <a:effectRef idx="1">
+            <a:schemeClr val="accent1"/>
+          </a:effectRef>
+          <a:fontRef idx="minor">
+            <a:schemeClr val="tx1"/>
+          </a:fontRef>
+        </p:style>
+      </p:cxnSp>
+      <p:sp>
+        <p:nvSpPr>
+          <p:cNvPr id="65" name="Oval 64"/>
+          <p:cNvSpPr/>
+          <p:nvPr/>
+        </p:nvSpPr>
+        <p:spPr>
+          <a:xfrm>
+            <a:off x="3903878" y="4114800"/>
+            <a:ext cx="274320" cy="274320"/>
+          </a:xfrm>
+          <a:prstGeom prst="ellipse">
+            <a:avLst/>
+          </a:prstGeom>
+          <a:solidFill>
+            <a:srgbClr val="FEFFFF"/>
+          </a:solidFill>
+          <a:ln w="12700">
+            <a:solidFill>
+              <a:srgbClr val="03045E"/>
+            </a:solidFill>
+          </a:ln>
+          <a:effectLst/>
+        </p:spPr>
+        <p:style>
+          <a:lnRef idx="1">
+            <a:schemeClr val="accent1"/>
+          </a:lnRef>
+          <a:fillRef idx="3">
+            <a:schemeClr val="accent1"/>
+          </a:fillRef>
+          <a:effectRef idx="2">
+            <a:schemeClr val="accent1"/>
+          </a:effectRef>
+          <a:fontRef idx="minor">
+            <a:schemeClr val="lt1"/>
+          </a:fontRef>
+        </p:style>
+        <p:txBody>
+          <a:bodyPr rtlCol="0" anchor="ctr"/>
+          <a:lstStyle/>
+          <a:p>
+            <a:pPr algn="ctr"/>
+          </a:p>
+        </p:txBody>
+      </p:sp>
+      <p:sp>
+        <p:nvSpPr>
+          <p:cNvPr id="66" name="TextBox 65"/>
+          <p:cNvSpPr txBox="1"/>
+          <p:nvPr/>
+        </p:nvSpPr>
+        <p:spPr>
+          <a:xfrm>
+            <a:off x="3903878" y="4114800"/>
+            <a:ext cx="274320" cy="274320"/>
+          </a:xfrm>
+          <a:prstGeom prst="rect">
+            <a:avLst/>
+          </a:prstGeom>
+          <a:noFill/>
+        </p:spPr>
+        <p:txBody>
+          <a:bodyPr wrap="square" anchor="ctr" lIns="0" rIns="0" tIns="0" bIns="0">
+            <a:spAutoFit/>
+          </a:bodyPr>
+          <a:lstStyle/>
+          <a:p>
+            <a:pPr algn="ctr">
+              <a:lnSpc>
+                <a:spcPct val="105000"/>
+              </a:lnSpc>
+              <a:spcBef>
+                <a:spcPts val="0"/>
+              </a:spcBef>
+              <a:spcAft>
+                <a:spcPts val="200"/>
+              </a:spcAft>
+            </a:pPr>
+            <a:r>
+              <a:rPr sz="1300" b="1" i="0">
+                <a:solidFill>
+                  <a:srgbClr val="03045E"/>
+                </a:solidFill>
+                <a:latin typeface="Montserrat"/>
+              </a:rPr>
+              <a:t>+</a:t>
+            </a:r>
+          </a:p>
+        </p:txBody>
+      </p:sp>
+      <p:cxnSp>
+        <p:nvCxnSpPr>
+          <p:cNvPr id="67" name="Connector 66"/>
+          <p:cNvCxnSpPr/>
+          <p:nvPr/>
+        </p:nvCxnSpPr>
+        <p:spPr>
+          <a:xfrm>
+            <a:off x="8036356" y="2613356"/>
+            <a:ext cx="0" cy="1638604"/>
+          </a:xfrm>
+          <a:prstGeom prst="bentConnector3">
+            <a:avLst/>
+          </a:prstGeom>
+          <a:ln w="12700">
+            <a:solidFill>
+              <a:srgbClr val="C9CBD6"/>
+            </a:solidFill>
+          </a:ln>
+        </p:spPr>
+        <p:style>
+          <a:lnRef idx="2">
+            <a:schemeClr val="accent1"/>
+          </a:lnRef>
+          <a:fillRef idx="0">
+            <a:schemeClr val="accent1"/>
+          </a:fillRef>
+          <a:effectRef idx="1">
+            <a:schemeClr val="accent1"/>
+          </a:effectRef>
+          <a:fontRef idx="minor">
+            <a:schemeClr val="tx1"/>
+          </a:fontRef>
+        </p:style>
+      </p:cxnSp>
+      <p:cxnSp>
+        <p:nvCxnSpPr>
+          <p:cNvPr id="68" name="Connector 67"/>
+          <p:cNvCxnSpPr/>
+          <p:nvPr/>
+        </p:nvCxnSpPr>
+        <p:spPr>
+          <a:xfrm>
+            <a:off x="7807756" y="3735324"/>
+            <a:ext cx="228600" cy="0"/>
+          </a:xfrm>
+          <a:prstGeom prst="bentConnector3">
+            <a:avLst/>
+          </a:prstGeom>
+          <a:ln w="12700">
+            <a:solidFill>
+              <a:srgbClr val="C9CBD6"/>
+            </a:solidFill>
+          </a:ln>
+        </p:spPr>
+        <p:style>
+          <a:lnRef idx="2">
+            <a:schemeClr val="accent1"/>
+          </a:lnRef>
+          <a:fillRef idx="0">
+            <a:schemeClr val="accent1"/>
+          </a:fillRef>
+          <a:effectRef idx="1">
+            <a:schemeClr val="accent1"/>
+          </a:effectRef>
+          <a:fontRef idx="minor">
+            <a:schemeClr val="tx1"/>
+          </a:fontRef>
+        </p:style>
+      </p:cxnSp>
+      <p:cxnSp>
+        <p:nvCxnSpPr>
+          <p:cNvPr id="69" name="Connector 68"/>
+          <p:cNvCxnSpPr/>
+          <p:nvPr/>
+        </p:nvCxnSpPr>
+        <p:spPr>
+          <a:xfrm>
+            <a:off x="8036356" y="2613356"/>
+            <a:ext cx="228600" cy="0"/>
+          </a:xfrm>
+          <a:prstGeom prst="bentConnector3">
+            <a:avLst/>
+          </a:prstGeom>
+          <a:ln w="12700">
+            <a:solidFill>
+              <a:srgbClr val="C9CBD6"/>
+            </a:solidFill>
+          </a:ln>
+        </p:spPr>
+        <p:style>
+          <a:lnRef idx="2">
+            <a:schemeClr val="accent1"/>
+          </a:lnRef>
+          <a:fillRef idx="0">
+            <a:schemeClr val="accent1"/>
+          </a:fillRef>
+          <a:effectRef idx="1">
+            <a:schemeClr val="accent1"/>
+          </a:effectRef>
+          <a:fontRef idx="minor">
+            <a:schemeClr val="tx1"/>
+          </a:fontRef>
+        </p:style>
+      </p:cxnSp>
+      <p:cxnSp>
+        <p:nvCxnSpPr>
+          <p:cNvPr id="70" name="Connector 69"/>
+          <p:cNvCxnSpPr/>
+          <p:nvPr/>
+        </p:nvCxnSpPr>
+        <p:spPr>
+          <a:xfrm>
+            <a:off x="8036356" y="3432658"/>
+            <a:ext cx="228600" cy="0"/>
+          </a:xfrm>
+          <a:prstGeom prst="bentConnector3">
+            <a:avLst/>
+          </a:prstGeom>
+          <a:ln w="12700">
+            <a:solidFill>
+              <a:srgbClr val="C9CBD6"/>
+            </a:solidFill>
+          </a:ln>
+        </p:spPr>
+        <p:style>
+          <a:lnRef idx="2">
+            <a:schemeClr val="accent1"/>
+          </a:lnRef>
+          <a:fillRef idx="0">
+            <a:schemeClr val="accent1"/>
+          </a:fillRef>
+          <a:effectRef idx="1">
+            <a:schemeClr val="accent1"/>
+          </a:effectRef>
+          <a:fontRef idx="minor">
+            <a:schemeClr val="tx1"/>
+          </a:fontRef>
+        </p:style>
+      </p:cxnSp>
+      <p:cxnSp>
+        <p:nvCxnSpPr>
+          <p:cNvPr id="71" name="Connector 70"/>
+          <p:cNvCxnSpPr/>
+          <p:nvPr/>
+        </p:nvCxnSpPr>
+        <p:spPr>
+          <a:xfrm>
+            <a:off x="8036356" y="4251960"/>
+            <a:ext cx="228600" cy="0"/>
+          </a:xfrm>
+          <a:prstGeom prst="bentConnector3">
+            <a:avLst/>
+          </a:prstGeom>
+          <a:ln w="12700">
+            <a:solidFill>
+              <a:srgbClr val="C9CBD6"/>
+            </a:solidFill>
+          </a:ln>
+        </p:spPr>
+        <p:style>
+          <a:lnRef idx="2">
+            <a:schemeClr val="accent1"/>
+          </a:lnRef>
+          <a:fillRef idx="0">
+            <a:schemeClr val="accent1"/>
+          </a:fillRef>
+          <a:effectRef idx="1">
+            <a:schemeClr val="accent1"/>
+          </a:effectRef>
+          <a:fontRef idx="minor">
+            <a:schemeClr val="tx1"/>
+          </a:fontRef>
+        </p:style>
+      </p:cxnSp>
+      <p:sp>
+        <p:nvSpPr>
+          <p:cNvPr id="72" name="Oval 71"/>
+          <p:cNvSpPr/>
+          <p:nvPr/>
+        </p:nvSpPr>
+        <p:spPr>
+          <a:xfrm>
+            <a:off x="7784896" y="3598164"/>
+            <a:ext cx="274320" cy="274320"/>
+          </a:xfrm>
+          <a:prstGeom prst="ellipse">
+            <a:avLst/>
+          </a:prstGeom>
+          <a:solidFill>
+            <a:srgbClr val="FEFFFF"/>
+          </a:solidFill>
+          <a:ln w="12700">
+            <a:solidFill>
+              <a:srgbClr val="03045E"/>
+            </a:solidFill>
+          </a:ln>
+          <a:effectLst/>
+        </p:spPr>
+        <p:style>
+          <a:lnRef idx="1">
+            <a:schemeClr val="accent1"/>
+          </a:lnRef>
+          <a:fillRef idx="3">
+            <a:schemeClr val="accent1"/>
+          </a:fillRef>
+          <a:effectRef idx="2">
+            <a:schemeClr val="accent1"/>
+          </a:effectRef>
+          <a:fontRef idx="minor">
+            <a:schemeClr val="lt1"/>
+          </a:fontRef>
+        </p:style>
+        <p:txBody>
+          <a:bodyPr rtlCol="0" anchor="ctr"/>
+          <a:lstStyle/>
+          <a:p>
+            <a:pPr algn="ctr"/>
+          </a:p>
+        </p:txBody>
+      </p:sp>
+      <p:sp>
+        <p:nvSpPr>
+          <p:cNvPr id="73" name="TextBox 72"/>
+          <p:cNvSpPr txBox="1"/>
+          <p:nvPr/>
+        </p:nvSpPr>
+        <p:spPr>
+          <a:xfrm>
+            <a:off x="7784896" y="3598164"/>
+            <a:ext cx="274320" cy="274320"/>
+          </a:xfrm>
+          <a:prstGeom prst="rect">
+            <a:avLst/>
+          </a:prstGeom>
+          <a:noFill/>
+        </p:spPr>
+        <p:txBody>
+          <a:bodyPr wrap="square" anchor="ctr" lIns="0" rIns="0" tIns="0" bIns="0">
+            <a:spAutoFit/>
+          </a:bodyPr>
+          <a:lstStyle/>
+          <a:p>
+            <a:pPr algn="ctr">
+              <a:lnSpc>
+                <a:spcPct val="105000"/>
+              </a:lnSpc>
+              <a:spcBef>
+                <a:spcPts val="0"/>
+              </a:spcBef>
+              <a:spcAft>
+                <a:spcPts val="200"/>
+              </a:spcAft>
+            </a:pPr>
+            <a:r>
+              <a:rPr sz="1300" b="1" i="0">
+                <a:solidFill>
+                  <a:srgbClr val="03045E"/>
+                </a:solidFill>
+                <a:latin typeface="Montserrat"/>
+              </a:rPr>
+              <a:t>+</a:t>
+            </a:r>
+          </a:p>
+        </p:txBody>
+      </p:sp>
+      <p:cxnSp>
+        <p:nvCxnSpPr>
+          <p:cNvPr id="74" name="Connector 73"/>
+          <p:cNvCxnSpPr/>
+          <p:nvPr/>
+        </p:nvCxnSpPr>
+        <p:spPr>
+          <a:xfrm>
+            <a:off x="8036356" y="4768596"/>
+            <a:ext cx="0" cy="1121968"/>
+          </a:xfrm>
+          <a:prstGeom prst="bentConnector3">
+            <a:avLst/>
+          </a:prstGeom>
+          <a:ln w="12700">
+            <a:solidFill>
+              <a:srgbClr val="C9CBD6"/>
+            </a:solidFill>
+          </a:ln>
+        </p:spPr>
+        <p:style>
+          <a:lnRef idx="2">
+            <a:schemeClr val="accent1"/>
+          </a:lnRef>
+          <a:fillRef idx="0">
+            <a:schemeClr val="accent1"/>
+          </a:fillRef>
+          <a:effectRef idx="1">
+            <a:schemeClr val="accent1"/>
+          </a:effectRef>
+          <a:fontRef idx="minor">
+            <a:schemeClr val="tx1"/>
+          </a:fontRef>
+        </p:style>
+      </p:cxnSp>
+      <p:cxnSp>
+        <p:nvCxnSpPr>
+          <p:cNvPr id="75" name="Connector 74"/>
+          <p:cNvCxnSpPr/>
+          <p:nvPr/>
+        </p:nvCxnSpPr>
+        <p:spPr>
+          <a:xfrm>
+            <a:off x="7807756" y="4768596"/>
+            <a:ext cx="228600" cy="0"/>
+          </a:xfrm>
+          <a:prstGeom prst="bentConnector3">
+            <a:avLst/>
+          </a:prstGeom>
+          <a:ln w="12700">
+            <a:solidFill>
+              <a:srgbClr val="C9CBD6"/>
+            </a:solidFill>
+          </a:ln>
+        </p:spPr>
+        <p:style>
+          <a:lnRef idx="2">
+            <a:schemeClr val="accent1"/>
+          </a:lnRef>
+          <a:fillRef idx="0">
+            <a:schemeClr val="accent1"/>
+          </a:fillRef>
+          <a:effectRef idx="1">
+            <a:schemeClr val="accent1"/>
+          </a:effectRef>
+          <a:fontRef idx="minor">
+            <a:schemeClr val="tx1"/>
+          </a:fontRef>
+        </p:style>
+      </p:cxnSp>
+      <p:cxnSp>
+        <p:nvCxnSpPr>
+          <p:cNvPr id="76" name="Connector 75"/>
+          <p:cNvCxnSpPr/>
+          <p:nvPr/>
+        </p:nvCxnSpPr>
+        <p:spPr>
+          <a:xfrm>
+            <a:off x="8036356" y="5071262"/>
+            <a:ext cx="228600" cy="0"/>
+          </a:xfrm>
+          <a:prstGeom prst="bentConnector3">
+            <a:avLst/>
+          </a:prstGeom>
+          <a:ln w="12700">
+            <a:solidFill>
+              <a:srgbClr val="C9CBD6"/>
+            </a:solidFill>
+          </a:ln>
+        </p:spPr>
+        <p:style>
+          <a:lnRef idx="2">
+            <a:schemeClr val="accent1"/>
+          </a:lnRef>
+          <a:fillRef idx="0">
+            <a:schemeClr val="accent1"/>
+          </a:fillRef>
+          <a:effectRef idx="1">
+            <a:schemeClr val="accent1"/>
+          </a:effectRef>
+          <a:fontRef idx="minor">
+            <a:schemeClr val="tx1"/>
+          </a:fontRef>
+        </p:style>
+      </p:cxnSp>
+      <p:cxnSp>
+        <p:nvCxnSpPr>
+          <p:cNvPr id="77" name="Connector 76"/>
+          <p:cNvCxnSpPr/>
+          <p:nvPr/>
+        </p:nvCxnSpPr>
+        <p:spPr>
+          <a:xfrm>
+            <a:off x="8036356" y="5890564"/>
+            <a:ext cx="228600" cy="0"/>
+          </a:xfrm>
+          <a:prstGeom prst="bentConnector3">
+            <a:avLst/>
+          </a:prstGeom>
+          <a:ln w="12700">
+            <a:solidFill>
+              <a:srgbClr val="C9CBD6"/>
+            </a:solidFill>
+          </a:ln>
+        </p:spPr>
+        <p:style>
+          <a:lnRef idx="2">
+            <a:schemeClr val="accent1"/>
+          </a:lnRef>
+          <a:fillRef idx="0">
+            <a:schemeClr val="accent1"/>
+          </a:fillRef>
+          <a:effectRef idx="1">
+            <a:schemeClr val="accent1"/>
+          </a:effectRef>
+          <a:fontRef idx="minor">
+            <a:schemeClr val="tx1"/>
+          </a:fontRef>
+        </p:style>
+      </p:cxnSp>
+      <p:sp>
+        <p:nvSpPr>
+          <p:cNvPr id="78" name="Oval 77"/>
+          <p:cNvSpPr/>
+          <p:nvPr/>
+        </p:nvSpPr>
+        <p:spPr>
+          <a:xfrm>
+            <a:off x="7784896" y="4631436"/>
+            <a:ext cx="274320" cy="274320"/>
+          </a:xfrm>
+          <a:prstGeom prst="ellipse">
+            <a:avLst/>
+          </a:prstGeom>
+          <a:solidFill>
+            <a:srgbClr val="FEFFFF"/>
+          </a:solidFill>
+          <a:ln w="12700">
+            <a:solidFill>
+              <a:srgbClr val="03045E"/>
+            </a:solidFill>
+          </a:ln>
+          <a:effectLst/>
+        </p:spPr>
+        <p:style>
+          <a:lnRef idx="1">
+            <a:schemeClr val="accent1"/>
+          </a:lnRef>
+          <a:fillRef idx="3">
+            <a:schemeClr val="accent1"/>
+          </a:fillRef>
+          <a:effectRef idx="2">
+            <a:schemeClr val="accent1"/>
+          </a:effectRef>
+          <a:fontRef idx="minor">
+            <a:schemeClr val="lt1"/>
+          </a:fontRef>
+        </p:style>
+        <p:txBody>
+          <a:bodyPr rtlCol="0" anchor="ctr"/>
+          <a:lstStyle/>
+          <a:p>
+            <a:pPr algn="ctr"/>
+          </a:p>
+        </p:txBody>
+      </p:sp>
+      <p:sp>
+        <p:nvSpPr>
+          <p:cNvPr id="79" name="TextBox 78"/>
+          <p:cNvSpPr txBox="1"/>
+          <p:nvPr/>
+        </p:nvSpPr>
+        <p:spPr>
+          <a:xfrm>
+            <a:off x="7784896" y="4631436"/>
+            <a:ext cx="274320" cy="274320"/>
+          </a:xfrm>
+          <a:prstGeom prst="rect">
+            <a:avLst/>
+          </a:prstGeom>
+          <a:noFill/>
+        </p:spPr>
+        <p:txBody>
+          <a:bodyPr wrap="square" anchor="ctr" lIns="0" rIns="0" tIns="0" bIns="0">
+            <a:spAutoFit/>
+          </a:bodyPr>
+          <a:lstStyle/>
+          <a:p>
+            <a:pPr algn="ctr">
+              <a:lnSpc>
+                <a:spcPct val="105000"/>
+              </a:lnSpc>
+              <a:spcBef>
+                <a:spcPts val="0"/>
+              </a:spcBef>
+              <a:spcAft>
+                <a:spcPts val="200"/>
+              </a:spcAft>
+            </a:pPr>
+            <a:r>
+              <a:rPr sz="1300" b="1" i="0">
+                <a:solidFill>
+                  <a:srgbClr val="03045E"/>
+                </a:solidFill>
+                <a:latin typeface="Montserrat"/>
+              </a:rPr>
+              <a:t>×</a:t>
+            </a:r>
+          </a:p>
+        </p:txBody>
+      </p:sp>
+      <p:sp>
+        <p:nvSpPr>
+          <p:cNvPr id="80" name="TextBox 79"/>
+          <p:cNvSpPr txBox="1"/>
+          <p:nvPr/>
+        </p:nvSpPr>
+        <p:spPr>
+          <a:xfrm>
+            <a:off x="502920" y="6336792"/>
+            <a:ext cx="11185855" cy="274320"/>
+          </a:xfrm>
+          <a:prstGeom prst="rect">
+            <a:avLst/>
+          </a:prstGeom>
+          <a:noFill/>
+        </p:spPr>
+        <p:txBody>
+          <a:bodyPr wrap="square" anchor="t" lIns="0" rIns="0" tIns="0" bIns="0">
+            <a:spAutoFit/>
+          </a:bodyPr>
+          <a:lstStyle/>
+          <a:p>
             <a:pPr algn="l">
               <a:lnSpc>
                 <a:spcPct val="105000"/>
@@ -10345,98 +16441,22 @@
               </a:spcAft>
             </a:pPr>
             <a:r>
-              <a:rPr sz="1300" b="1" i="0">
+              <a:rPr sz="900" b="1" i="0">
                 <a:solidFill>
                   <a:srgbClr val="03045E"/>
                 </a:solidFill>
-                <a:latin typeface="Montserrat"/>
-              </a:rPr>
-              <a:t>Key Takeaways</a:t>
-            </a:r>
-          </a:p>
-        </p:txBody>
-      </p:sp>
-      <p:sp>
-        <p:nvSpPr>
-          <p:cNvPr id="12" name="TextBox 11"/>
-          <p:cNvSpPr txBox="1"/>
-          <p:nvPr/>
-        </p:nvSpPr>
-        <p:spPr>
-          <a:xfrm>
-            <a:off x="8275320" y="1920240"/>
-            <a:ext cx="3429000" cy="4434840"/>
-          </a:xfrm>
-          <a:prstGeom prst="rect">
-            <a:avLst/>
-          </a:prstGeom>
-          <a:noFill/>
-        </p:spPr>
-        <p:txBody>
-          <a:bodyPr wrap="square" anchor="t" lIns="0" rIns="0" tIns="0" bIns="0">
-            <a:spAutoFit/>
-          </a:bodyPr>
-          <a:lstStyle/>
-          <a:p>
-            <a:pPr algn="l">
-              <a:lnSpc>
-                <a:spcPct val="108000"/>
-              </a:lnSpc>
-              <a:spcBef>
-                <a:spcPts val="0"/>
-              </a:spcBef>
-              <a:spcAft>
-                <a:spcPts val="700"/>
-              </a:spcAft>
-            </a:pPr>
-            <a:r>
-              <a:rPr sz="1100" b="1" i="0">
-                <a:solidFill>
-                  <a:srgbClr val="03045E"/>
-                </a:solidFill>
                 <a:latin typeface="Montserrat Medium"/>
               </a:rPr>
-              <a:t>•  </a:t>
-            </a:r>
-            <a:r>
-              <a:rPr sz="1100" b="0" i="0">
-                <a:solidFill>
-                  <a:srgbClr val="302E2E"/>
+              <a:t>▸ </a:t>
+            </a:r>
+            <a:r>
+              <a:rPr sz="900" b="0" i="1">
+                <a:solidFill>
+                  <a:srgbClr val="8A8A8A"/>
                 </a:solidFill>
                 <a:latin typeface="Montserrat Medium"/>
               </a:rPr>
-              <a:t>Range reflects WACC and terminal-growth spread</a:t>
-            </a:r>
-          </a:p>
-          <a:p>
-            <a:pPr algn="l">
-              <a:lnSpc>
-                <a:spcPct val="108000"/>
-              </a:lnSpc>
-              <a:spcBef>
-                <a:spcPts val="0"/>
-              </a:spcBef>
-              <a:spcAft>
-                <a:spcPts val="700"/>
-              </a:spcAft>
-            </a:pPr>
-            <a:r>
-              <a:rPr sz="1100" b="1" i="0">
-                <a:solidFill>
-                  <a:srgbClr val="03045E"/>
-                </a:solidFill>
-                <a:latin typeface="Montserrat Medium"/>
-              </a:rPr>
-              <a:t>•  </a:t>
-            </a:r>
-            <a:r>
-              <a:rPr sz="1100" b="0" i="0">
-                <a:solidFill>
-                  <a:srgbClr val="302E2E"/>
-                </a:solidFill>
-                <a:latin typeface="Montserrat Medium"/>
-              </a:rPr>
-              <a:t>Terminal value ~[XX]% of EV (sanity check)</a:t>
+              <a:t>WACC discounts unlevered free cash flow (FCFF); weights reflect the target capital structure (equity vs debt).</a:t>
             </a:r>
           </a:p>
         </p:txBody>
